--- a/gainable_presentation_final.pptx
+++ b/gainable_presentation_final.pptx
@@ -5,17 +5,18 @@
     <p:sldMasterId id="2147483648" r:id="rId1"/>
   </p:sldMasterIdLst>
   <p:sldIdLst>
-    <p:sldId id="256" r:id="rId2"/>
-    <p:sldId id="257" r:id="rId3"/>
-    <p:sldId id="258" r:id="rId4"/>
-    <p:sldId id="259" r:id="rId5"/>
-    <p:sldId id="260" r:id="rId6"/>
-    <p:sldId id="261" r:id="rId7"/>
-    <p:sldId id="263" r:id="rId8"/>
-    <p:sldId id="264" r:id="rId9"/>
-    <p:sldId id="262" r:id="rId10"/>
+    <p:sldId id="256" r:id="rId7"/>
+    <p:sldId id="257" r:id="rId8"/>
+    <p:sldId id="258" r:id="rId9"/>
+    <p:sldId id="259" r:id="rId10"/>
+    <p:sldId id="260" r:id="rId11"/>
+    <p:sldId id="261" r:id="rId12"/>
+    <p:sldId id="262" r:id="rId13"/>
+    <p:sldId id="263" r:id="rId14"/>
+    <p:sldId id="264" r:id="rId15"/>
+    <p:sldId id="265" r:id="rId16"/>
   </p:sldIdLst>
-  <p:sldSz cx="12192000" cy="6858000"/>
+  <p:sldSz cx="12191695" cy="6858000" type="screen4x3"/>
   <p:notesSz cx="6858000" cy="9144000"/>
   <p:defaultTextStyle>
     <a:defPPr>
@@ -112,22 +113,6 @@
       </a:defRPr>
     </a:lvl9pPr>
   </p:defaultTextStyle>
-  <p:extLst>
-    <p:ext uri="{EFAFB233-063F-42B5-8137-9DF3F51BA10A}">
-      <p15:sldGuideLst xmlns:p15="http://schemas.microsoft.com/office/powerpoint/2012/main">
-        <p15:guide id="1" orient="horz" pos="2160">
-          <p15:clr>
-            <a:srgbClr val="A4A3A4"/>
-          </p15:clr>
-        </p15:guide>
-        <p15:guide id="2" pos="2880">
-          <p15:clr>
-            <a:srgbClr val="A4A3A4"/>
-          </p15:clr>
-        </p15:guide>
-      </p15:sldGuideLst>
-    </p:ext>
-  </p:extLst>
 </p:presentation>
 </file>
 
@@ -169,9 +154,10 @@
           <a:lstStyle/>
           <a:p>
             <a:r>
-              <a:rPr lang="en-US"/>
+              <a:rPr lang="en-US" smtClean="0"/>
               <a:t>Click to edit Master title style</a:t>
             </a:r>
+            <a:endParaRPr lang="en-US"/>
           </a:p>
         </p:txBody>
       </p:sp>
@@ -287,9 +273,10 @@
           </a:lstStyle>
           <a:p>
             <a:r>
-              <a:rPr lang="en-US"/>
+              <a:rPr lang="en-US" smtClean="0"/>
               <a:t>Click to edit Master subtitle style</a:t>
             </a:r>
+            <a:endParaRPr lang="en-US"/>
           </a:p>
         </p:txBody>
       </p:sp>
@@ -310,7 +297,7 @@
           <a:p>
             <a:fld id="{5BCAD085-E8A6-8845-BD4E-CB4CCA059FC4}" type="datetimeFigureOut">
               <a:rPr lang="en-US" smtClean="0"/>
-              <a:t>6/23/2026</a:t>
+              <a:t>1/27/13</a:t>
             </a:fld>
             <a:endParaRPr lang="en-US"/>
           </a:p>
@@ -352,7 +339,7 @@
           <a:p>
             <a:fld id="{C1FF6DA9-008F-8B48-92A6-B652298478BF}" type="slidenum">
               <a:rPr lang="en-US" smtClean="0"/>
-              <a:t>‹N°›</a:t>
+              <a:t>‹#›</a:t>
             </a:fld>
             <a:endParaRPr lang="en-US"/>
           </a:p>
@@ -404,9 +391,10 @@
           <a:lstStyle/>
           <a:p>
             <a:r>
-              <a:rPr lang="en-US"/>
+              <a:rPr lang="en-US" smtClean="0"/>
               <a:t>Click to edit Master title style</a:t>
             </a:r>
+            <a:endParaRPr lang="en-US"/>
           </a:p>
         </p:txBody>
       </p:sp>
@@ -427,37 +415,38 @@
           <a:p>
             <a:pPr lvl="0"/>
             <a:r>
-              <a:rPr lang="en-US"/>
+              <a:rPr lang="en-US" smtClean="0"/>
               <a:t>Click to edit Master text styles</a:t>
             </a:r>
           </a:p>
           <a:p>
             <a:pPr lvl="1"/>
             <a:r>
-              <a:rPr lang="en-US"/>
+              <a:rPr lang="en-US" smtClean="0"/>
               <a:t>Second level</a:t>
             </a:r>
           </a:p>
           <a:p>
             <a:pPr lvl="2"/>
             <a:r>
-              <a:rPr lang="en-US"/>
+              <a:rPr lang="en-US" smtClean="0"/>
               <a:t>Third level</a:t>
             </a:r>
           </a:p>
           <a:p>
             <a:pPr lvl="3"/>
             <a:r>
-              <a:rPr lang="en-US"/>
+              <a:rPr lang="en-US" smtClean="0"/>
               <a:t>Fourth level</a:t>
             </a:r>
           </a:p>
           <a:p>
             <a:pPr lvl="4"/>
             <a:r>
-              <a:rPr lang="en-US"/>
+              <a:rPr lang="en-US" smtClean="0"/>
               <a:t>Fifth level</a:t>
             </a:r>
+            <a:endParaRPr lang="en-US"/>
           </a:p>
         </p:txBody>
       </p:sp>
@@ -478,7 +467,7 @@
           <a:p>
             <a:fld id="{5BCAD085-E8A6-8845-BD4E-CB4CCA059FC4}" type="datetimeFigureOut">
               <a:rPr lang="en-US" smtClean="0"/>
-              <a:t>6/23/2026</a:t>
+              <a:t>1/27/13</a:t>
             </a:fld>
             <a:endParaRPr lang="en-US"/>
           </a:p>
@@ -520,7 +509,7 @@
           <a:p>
             <a:fld id="{C1FF6DA9-008F-8B48-92A6-B652298478BF}" type="slidenum">
               <a:rPr lang="en-US" smtClean="0"/>
-              <a:t>‹N°›</a:t>
+              <a:t>‹#›</a:t>
             </a:fld>
             <a:endParaRPr lang="en-US"/>
           </a:p>
@@ -577,9 +566,10 @@
           <a:lstStyle/>
           <a:p>
             <a:r>
-              <a:rPr lang="en-US"/>
+              <a:rPr lang="en-US" smtClean="0"/>
               <a:t>Click to edit Master title style</a:t>
             </a:r>
+            <a:endParaRPr lang="en-US"/>
           </a:p>
         </p:txBody>
       </p:sp>
@@ -605,37 +595,38 @@
           <a:p>
             <a:pPr lvl="0"/>
             <a:r>
-              <a:rPr lang="en-US"/>
+              <a:rPr lang="en-US" smtClean="0"/>
               <a:t>Click to edit Master text styles</a:t>
             </a:r>
           </a:p>
           <a:p>
             <a:pPr lvl="1"/>
             <a:r>
-              <a:rPr lang="en-US"/>
+              <a:rPr lang="en-US" smtClean="0"/>
               <a:t>Second level</a:t>
             </a:r>
           </a:p>
           <a:p>
             <a:pPr lvl="2"/>
             <a:r>
-              <a:rPr lang="en-US"/>
+              <a:rPr lang="en-US" smtClean="0"/>
               <a:t>Third level</a:t>
             </a:r>
           </a:p>
           <a:p>
             <a:pPr lvl="3"/>
             <a:r>
-              <a:rPr lang="en-US"/>
+              <a:rPr lang="en-US" smtClean="0"/>
               <a:t>Fourth level</a:t>
             </a:r>
           </a:p>
           <a:p>
             <a:pPr lvl="4"/>
             <a:r>
-              <a:rPr lang="en-US"/>
+              <a:rPr lang="en-US" smtClean="0"/>
               <a:t>Fifth level</a:t>
             </a:r>
+            <a:endParaRPr lang="en-US"/>
           </a:p>
         </p:txBody>
       </p:sp>
@@ -656,7 +647,7 @@
           <a:p>
             <a:fld id="{5BCAD085-E8A6-8845-BD4E-CB4CCA059FC4}" type="datetimeFigureOut">
               <a:rPr lang="en-US" smtClean="0"/>
-              <a:t>6/23/2026</a:t>
+              <a:t>1/27/13</a:t>
             </a:fld>
             <a:endParaRPr lang="en-US"/>
           </a:p>
@@ -698,7 +689,7 @@
           <a:p>
             <a:fld id="{C1FF6DA9-008F-8B48-92A6-B652298478BF}" type="slidenum">
               <a:rPr lang="en-US" smtClean="0"/>
-              <a:t>‹N°›</a:t>
+              <a:t>‹#›</a:t>
             </a:fld>
             <a:endParaRPr lang="en-US"/>
           </a:p>
@@ -750,9 +741,10 @@
           <a:lstStyle/>
           <a:p>
             <a:r>
-              <a:rPr lang="en-US"/>
+              <a:rPr lang="en-US" smtClean="0"/>
               <a:t>Click to edit Master title style</a:t>
             </a:r>
+            <a:endParaRPr lang="en-US"/>
           </a:p>
         </p:txBody>
       </p:sp>
@@ -773,37 +765,38 @@
           <a:p>
             <a:pPr lvl="0"/>
             <a:r>
-              <a:rPr lang="en-US"/>
+              <a:rPr lang="en-US" smtClean="0"/>
               <a:t>Click to edit Master text styles</a:t>
             </a:r>
           </a:p>
           <a:p>
             <a:pPr lvl="1"/>
             <a:r>
-              <a:rPr lang="en-US"/>
+              <a:rPr lang="en-US" smtClean="0"/>
               <a:t>Second level</a:t>
             </a:r>
           </a:p>
           <a:p>
             <a:pPr lvl="2"/>
             <a:r>
-              <a:rPr lang="en-US"/>
+              <a:rPr lang="en-US" smtClean="0"/>
               <a:t>Third level</a:t>
             </a:r>
           </a:p>
           <a:p>
             <a:pPr lvl="3"/>
             <a:r>
-              <a:rPr lang="en-US"/>
+              <a:rPr lang="en-US" smtClean="0"/>
               <a:t>Fourth level</a:t>
             </a:r>
           </a:p>
           <a:p>
             <a:pPr lvl="4"/>
             <a:r>
-              <a:rPr lang="en-US"/>
+              <a:rPr lang="en-US" smtClean="0"/>
               <a:t>Fifth level</a:t>
             </a:r>
+            <a:endParaRPr lang="en-US"/>
           </a:p>
         </p:txBody>
       </p:sp>
@@ -824,7 +817,7 @@
           <a:p>
             <a:fld id="{5BCAD085-E8A6-8845-BD4E-CB4CCA059FC4}" type="datetimeFigureOut">
               <a:rPr lang="en-US" smtClean="0"/>
-              <a:t>6/23/2026</a:t>
+              <a:t>1/27/13</a:t>
             </a:fld>
             <a:endParaRPr lang="en-US"/>
           </a:p>
@@ -866,7 +859,7 @@
           <a:p>
             <a:fld id="{C1FF6DA9-008F-8B48-92A6-B652298478BF}" type="slidenum">
               <a:rPr lang="en-US" smtClean="0"/>
-              <a:t>‹N°›</a:t>
+              <a:t>‹#›</a:t>
             </a:fld>
             <a:endParaRPr lang="en-US"/>
           </a:p>
@@ -927,9 +920,10 @@
           </a:lstStyle>
           <a:p>
             <a:r>
-              <a:rPr lang="en-US"/>
+              <a:rPr lang="en-US" smtClean="0"/>
               <a:t>Click to edit Master title style</a:t>
             </a:r>
+            <a:endParaRPr lang="en-US"/>
           </a:p>
         </p:txBody>
       </p:sp>
@@ -1046,7 +1040,7 @@
           <a:p>
             <a:pPr lvl="0"/>
             <a:r>
-              <a:rPr lang="en-US"/>
+              <a:rPr lang="en-US" smtClean="0"/>
               <a:t>Click to edit Master text styles</a:t>
             </a:r>
           </a:p>
@@ -1069,7 +1063,7 @@
           <a:p>
             <a:fld id="{5BCAD085-E8A6-8845-BD4E-CB4CCA059FC4}" type="datetimeFigureOut">
               <a:rPr lang="en-US" smtClean="0"/>
-              <a:t>6/23/2026</a:t>
+              <a:t>1/27/13</a:t>
             </a:fld>
             <a:endParaRPr lang="en-US"/>
           </a:p>
@@ -1111,7 +1105,7 @@
           <a:p>
             <a:fld id="{C1FF6DA9-008F-8B48-92A6-B652298478BF}" type="slidenum">
               <a:rPr lang="en-US" smtClean="0"/>
-              <a:t>‹N°›</a:t>
+              <a:t>‹#›</a:t>
             </a:fld>
             <a:endParaRPr lang="en-US"/>
           </a:p>
@@ -1163,9 +1157,10 @@
           <a:lstStyle/>
           <a:p>
             <a:r>
-              <a:rPr lang="en-US"/>
+              <a:rPr lang="en-US" smtClean="0"/>
               <a:t>Click to edit Master title style</a:t>
             </a:r>
+            <a:endParaRPr lang="en-US"/>
           </a:p>
         </p:txBody>
       </p:sp>
@@ -1219,37 +1214,38 @@
           <a:p>
             <a:pPr lvl="0"/>
             <a:r>
-              <a:rPr lang="en-US"/>
+              <a:rPr lang="en-US" smtClean="0"/>
               <a:t>Click to edit Master text styles</a:t>
             </a:r>
           </a:p>
           <a:p>
             <a:pPr lvl="1"/>
             <a:r>
-              <a:rPr lang="en-US"/>
+              <a:rPr lang="en-US" smtClean="0"/>
               <a:t>Second level</a:t>
             </a:r>
           </a:p>
           <a:p>
             <a:pPr lvl="2"/>
             <a:r>
-              <a:rPr lang="en-US"/>
+              <a:rPr lang="en-US" smtClean="0"/>
               <a:t>Third level</a:t>
             </a:r>
           </a:p>
           <a:p>
             <a:pPr lvl="3"/>
             <a:r>
-              <a:rPr lang="en-US"/>
+              <a:rPr lang="en-US" smtClean="0"/>
               <a:t>Fourth level</a:t>
             </a:r>
           </a:p>
           <a:p>
             <a:pPr lvl="4"/>
             <a:r>
-              <a:rPr lang="en-US"/>
+              <a:rPr lang="en-US" smtClean="0"/>
               <a:t>Fifth level</a:t>
             </a:r>
+            <a:endParaRPr lang="en-US"/>
           </a:p>
         </p:txBody>
       </p:sp>
@@ -1303,37 +1299,38 @@
           <a:p>
             <a:pPr lvl="0"/>
             <a:r>
-              <a:rPr lang="en-US"/>
+              <a:rPr lang="en-US" smtClean="0"/>
               <a:t>Click to edit Master text styles</a:t>
             </a:r>
           </a:p>
           <a:p>
             <a:pPr lvl="1"/>
             <a:r>
-              <a:rPr lang="en-US"/>
+              <a:rPr lang="en-US" smtClean="0"/>
               <a:t>Second level</a:t>
             </a:r>
           </a:p>
           <a:p>
             <a:pPr lvl="2"/>
             <a:r>
-              <a:rPr lang="en-US"/>
+              <a:rPr lang="en-US" smtClean="0"/>
               <a:t>Third level</a:t>
             </a:r>
           </a:p>
           <a:p>
             <a:pPr lvl="3"/>
             <a:r>
-              <a:rPr lang="en-US"/>
+              <a:rPr lang="en-US" smtClean="0"/>
               <a:t>Fourth level</a:t>
             </a:r>
           </a:p>
           <a:p>
             <a:pPr lvl="4"/>
             <a:r>
-              <a:rPr lang="en-US"/>
+              <a:rPr lang="en-US" smtClean="0"/>
               <a:t>Fifth level</a:t>
             </a:r>
+            <a:endParaRPr lang="en-US"/>
           </a:p>
         </p:txBody>
       </p:sp>
@@ -1354,7 +1351,7 @@
           <a:p>
             <a:fld id="{5BCAD085-E8A6-8845-BD4E-CB4CCA059FC4}" type="datetimeFigureOut">
               <a:rPr lang="en-US" smtClean="0"/>
-              <a:t>6/23/2026</a:t>
+              <a:t>1/27/13</a:t>
             </a:fld>
             <a:endParaRPr lang="en-US"/>
           </a:p>
@@ -1396,7 +1393,7 @@
           <a:p>
             <a:fld id="{C1FF6DA9-008F-8B48-92A6-B652298478BF}" type="slidenum">
               <a:rPr lang="en-US" smtClean="0"/>
-              <a:t>‹N°›</a:t>
+              <a:t>‹#›</a:t>
             </a:fld>
             <a:endParaRPr lang="en-US"/>
           </a:p>
@@ -1452,9 +1449,10 @@
           </a:lstStyle>
           <a:p>
             <a:r>
-              <a:rPr lang="en-US"/>
+              <a:rPr lang="en-US" smtClean="0"/>
               <a:t>Click to edit Master title style</a:t>
             </a:r>
+            <a:endParaRPr lang="en-US"/>
           </a:p>
         </p:txBody>
       </p:sp>
@@ -1517,7 +1515,7 @@
           <a:p>
             <a:pPr lvl="0"/>
             <a:r>
-              <a:rPr lang="en-US"/>
+              <a:rPr lang="en-US" smtClean="0"/>
               <a:t>Click to edit Master text styles</a:t>
             </a:r>
           </a:p>
@@ -1573,37 +1571,38 @@
           <a:p>
             <a:pPr lvl="0"/>
             <a:r>
-              <a:rPr lang="en-US"/>
+              <a:rPr lang="en-US" smtClean="0"/>
               <a:t>Click to edit Master text styles</a:t>
             </a:r>
           </a:p>
           <a:p>
             <a:pPr lvl="1"/>
             <a:r>
-              <a:rPr lang="en-US"/>
+              <a:rPr lang="en-US" smtClean="0"/>
               <a:t>Second level</a:t>
             </a:r>
           </a:p>
           <a:p>
             <a:pPr lvl="2"/>
             <a:r>
-              <a:rPr lang="en-US"/>
+              <a:rPr lang="en-US" smtClean="0"/>
               <a:t>Third level</a:t>
             </a:r>
           </a:p>
           <a:p>
             <a:pPr lvl="3"/>
             <a:r>
-              <a:rPr lang="en-US"/>
+              <a:rPr lang="en-US" smtClean="0"/>
               <a:t>Fourth level</a:t>
             </a:r>
           </a:p>
           <a:p>
             <a:pPr lvl="4"/>
             <a:r>
-              <a:rPr lang="en-US"/>
+              <a:rPr lang="en-US" smtClean="0"/>
               <a:t>Fifth level</a:t>
             </a:r>
+            <a:endParaRPr lang="en-US"/>
           </a:p>
         </p:txBody>
       </p:sp>
@@ -1666,7 +1665,7 @@
           <a:p>
             <a:pPr lvl="0"/>
             <a:r>
-              <a:rPr lang="en-US"/>
+              <a:rPr lang="en-US" smtClean="0"/>
               <a:t>Click to edit Master text styles</a:t>
             </a:r>
           </a:p>
@@ -1722,37 +1721,38 @@
           <a:p>
             <a:pPr lvl="0"/>
             <a:r>
-              <a:rPr lang="en-US"/>
+              <a:rPr lang="en-US" smtClean="0"/>
               <a:t>Click to edit Master text styles</a:t>
             </a:r>
           </a:p>
           <a:p>
             <a:pPr lvl="1"/>
             <a:r>
-              <a:rPr lang="en-US"/>
+              <a:rPr lang="en-US" smtClean="0"/>
               <a:t>Second level</a:t>
             </a:r>
           </a:p>
           <a:p>
             <a:pPr lvl="2"/>
             <a:r>
-              <a:rPr lang="en-US"/>
+              <a:rPr lang="en-US" smtClean="0"/>
               <a:t>Third level</a:t>
             </a:r>
           </a:p>
           <a:p>
             <a:pPr lvl="3"/>
             <a:r>
-              <a:rPr lang="en-US"/>
+              <a:rPr lang="en-US" smtClean="0"/>
               <a:t>Fourth level</a:t>
             </a:r>
           </a:p>
           <a:p>
             <a:pPr lvl="4"/>
             <a:r>
-              <a:rPr lang="en-US"/>
+              <a:rPr lang="en-US" smtClean="0"/>
               <a:t>Fifth level</a:t>
             </a:r>
+            <a:endParaRPr lang="en-US"/>
           </a:p>
         </p:txBody>
       </p:sp>
@@ -1773,7 +1773,7 @@
           <a:p>
             <a:fld id="{5BCAD085-E8A6-8845-BD4E-CB4CCA059FC4}" type="datetimeFigureOut">
               <a:rPr lang="en-US" smtClean="0"/>
-              <a:t>6/23/2026</a:t>
+              <a:t>1/27/13</a:t>
             </a:fld>
             <a:endParaRPr lang="en-US"/>
           </a:p>
@@ -1815,7 +1815,7 @@
           <a:p>
             <a:fld id="{C1FF6DA9-008F-8B48-92A6-B652298478BF}" type="slidenum">
               <a:rPr lang="en-US" smtClean="0"/>
-              <a:t>‹N°›</a:t>
+              <a:t>‹#›</a:t>
             </a:fld>
             <a:endParaRPr lang="en-US"/>
           </a:p>
@@ -1867,9 +1867,10 @@
           <a:lstStyle/>
           <a:p>
             <a:r>
-              <a:rPr lang="en-US"/>
+              <a:rPr lang="en-US" smtClean="0"/>
               <a:t>Click to edit Master title style</a:t>
             </a:r>
+            <a:endParaRPr lang="en-US"/>
           </a:p>
         </p:txBody>
       </p:sp>
@@ -1890,7 +1891,7 @@
           <a:p>
             <a:fld id="{5BCAD085-E8A6-8845-BD4E-CB4CCA059FC4}" type="datetimeFigureOut">
               <a:rPr lang="en-US" smtClean="0"/>
-              <a:t>6/23/2026</a:t>
+              <a:t>1/27/13</a:t>
             </a:fld>
             <a:endParaRPr lang="en-US"/>
           </a:p>
@@ -1932,7 +1933,7 @@
           <a:p>
             <a:fld id="{C1FF6DA9-008F-8B48-92A6-B652298478BF}" type="slidenum">
               <a:rPr lang="en-US" smtClean="0"/>
-              <a:t>‹N°›</a:t>
+              <a:t>‹#›</a:t>
             </a:fld>
             <a:endParaRPr lang="en-US"/>
           </a:p>
@@ -1985,7 +1986,7 @@
           <a:p>
             <a:fld id="{5BCAD085-E8A6-8845-BD4E-CB4CCA059FC4}" type="datetimeFigureOut">
               <a:rPr lang="en-US" smtClean="0"/>
-              <a:t>6/23/2026</a:t>
+              <a:t>1/27/13</a:t>
             </a:fld>
             <a:endParaRPr lang="en-US"/>
           </a:p>
@@ -2027,7 +2028,7 @@
           <a:p>
             <a:fld id="{C1FF6DA9-008F-8B48-92A6-B652298478BF}" type="slidenum">
               <a:rPr lang="en-US" smtClean="0"/>
-              <a:t>‹N°›</a:t>
+              <a:t>‹#›</a:t>
             </a:fld>
             <a:endParaRPr lang="en-US"/>
           </a:p>
@@ -2088,9 +2089,10 @@
           </a:lstStyle>
           <a:p>
             <a:r>
-              <a:rPr lang="en-US"/>
+              <a:rPr lang="en-US" smtClean="0"/>
               <a:t>Click to edit Master title style</a:t>
             </a:r>
+            <a:endParaRPr lang="en-US"/>
           </a:p>
         </p:txBody>
       </p:sp>
@@ -2144,37 +2146,38 @@
           <a:p>
             <a:pPr lvl="0"/>
             <a:r>
-              <a:rPr lang="en-US"/>
+              <a:rPr lang="en-US" smtClean="0"/>
               <a:t>Click to edit Master text styles</a:t>
             </a:r>
           </a:p>
           <a:p>
             <a:pPr lvl="1"/>
             <a:r>
-              <a:rPr lang="en-US"/>
+              <a:rPr lang="en-US" smtClean="0"/>
               <a:t>Second level</a:t>
             </a:r>
           </a:p>
           <a:p>
             <a:pPr lvl="2"/>
             <a:r>
-              <a:rPr lang="en-US"/>
+              <a:rPr lang="en-US" smtClean="0"/>
               <a:t>Third level</a:t>
             </a:r>
           </a:p>
           <a:p>
             <a:pPr lvl="3"/>
             <a:r>
-              <a:rPr lang="en-US"/>
+              <a:rPr lang="en-US" smtClean="0"/>
               <a:t>Fourth level</a:t>
             </a:r>
           </a:p>
           <a:p>
             <a:pPr lvl="4"/>
             <a:r>
-              <a:rPr lang="en-US"/>
+              <a:rPr lang="en-US" smtClean="0"/>
               <a:t>Fifth level</a:t>
             </a:r>
+            <a:endParaRPr lang="en-US"/>
           </a:p>
         </p:txBody>
       </p:sp>
@@ -2237,7 +2240,7 @@
           <a:p>
             <a:pPr lvl="0"/>
             <a:r>
-              <a:rPr lang="en-US"/>
+              <a:rPr lang="en-US" smtClean="0"/>
               <a:t>Click to edit Master text styles</a:t>
             </a:r>
           </a:p>
@@ -2260,7 +2263,7 @@
           <a:p>
             <a:fld id="{5BCAD085-E8A6-8845-BD4E-CB4CCA059FC4}" type="datetimeFigureOut">
               <a:rPr lang="en-US" smtClean="0"/>
-              <a:t>6/23/2026</a:t>
+              <a:t>1/27/13</a:t>
             </a:fld>
             <a:endParaRPr lang="en-US"/>
           </a:p>
@@ -2302,7 +2305,7 @@
           <a:p>
             <a:fld id="{C1FF6DA9-008F-8B48-92A6-B652298478BF}" type="slidenum">
               <a:rPr lang="en-US" smtClean="0"/>
-              <a:t>‹N°›</a:t>
+              <a:t>‹#›</a:t>
             </a:fld>
             <a:endParaRPr lang="en-US"/>
           </a:p>
@@ -2363,9 +2366,10 @@
           </a:lstStyle>
           <a:p>
             <a:r>
-              <a:rPr lang="en-US"/>
+              <a:rPr lang="en-US" smtClean="0"/>
               <a:t>Click to edit Master title style</a:t>
             </a:r>
+            <a:endParaRPr lang="en-US"/>
           </a:p>
         </p:txBody>
       </p:sp>
@@ -2489,7 +2493,7 @@
           <a:p>
             <a:pPr lvl="0"/>
             <a:r>
-              <a:rPr lang="en-US"/>
+              <a:rPr lang="en-US" smtClean="0"/>
               <a:t>Click to edit Master text styles</a:t>
             </a:r>
           </a:p>
@@ -2512,7 +2516,7 @@
           <a:p>
             <a:fld id="{5BCAD085-E8A6-8845-BD4E-CB4CCA059FC4}" type="datetimeFigureOut">
               <a:rPr lang="en-US" smtClean="0"/>
-              <a:t>6/23/2026</a:t>
+              <a:t>1/27/13</a:t>
             </a:fld>
             <a:endParaRPr lang="en-US"/>
           </a:p>
@@ -2554,7 +2558,7 @@
           <a:p>
             <a:fld id="{C1FF6DA9-008F-8B48-92A6-B652298478BF}" type="slidenum">
               <a:rPr lang="en-US" smtClean="0"/>
-              <a:t>‹N°›</a:t>
+              <a:t>‹#›</a:t>
             </a:fld>
             <a:endParaRPr lang="en-US"/>
           </a:p>
@@ -2621,9 +2625,10 @@
           <a:lstStyle/>
           <a:p>
             <a:r>
-              <a:rPr lang="en-US"/>
+              <a:rPr lang="en-US" smtClean="0"/>
               <a:t>Click to edit Master title style</a:t>
             </a:r>
+            <a:endParaRPr lang="en-US"/>
           </a:p>
         </p:txBody>
       </p:sp>
@@ -2654,37 +2659,38 @@
           <a:p>
             <a:pPr lvl="0"/>
             <a:r>
-              <a:rPr lang="en-US"/>
+              <a:rPr lang="en-US" smtClean="0"/>
               <a:t>Click to edit Master text styles</a:t>
             </a:r>
           </a:p>
           <a:p>
             <a:pPr lvl="1"/>
             <a:r>
-              <a:rPr lang="en-US"/>
+              <a:rPr lang="en-US" smtClean="0"/>
               <a:t>Second level</a:t>
             </a:r>
           </a:p>
           <a:p>
             <a:pPr lvl="2"/>
             <a:r>
-              <a:rPr lang="en-US"/>
+              <a:rPr lang="en-US" smtClean="0"/>
               <a:t>Third level</a:t>
             </a:r>
           </a:p>
           <a:p>
             <a:pPr lvl="3"/>
             <a:r>
-              <a:rPr lang="en-US"/>
+              <a:rPr lang="en-US" smtClean="0"/>
               <a:t>Fourth level</a:t>
             </a:r>
           </a:p>
           <a:p>
             <a:pPr lvl="4"/>
             <a:r>
-              <a:rPr lang="en-US"/>
+              <a:rPr lang="en-US" smtClean="0"/>
               <a:t>Fifth level</a:t>
             </a:r>
+            <a:endParaRPr lang="en-US"/>
           </a:p>
         </p:txBody>
       </p:sp>
@@ -2723,7 +2729,7 @@
           <a:p>
             <a:fld id="{5BCAD085-E8A6-8845-BD4E-CB4CCA059FC4}" type="datetimeFigureOut">
               <a:rPr lang="en-US" smtClean="0"/>
-              <a:t>6/23/2026</a:t>
+              <a:t>1/27/13</a:t>
             </a:fld>
             <a:endParaRPr lang="en-US"/>
           </a:p>
@@ -2801,7 +2807,7 @@
           <a:p>
             <a:fld id="{C1FF6DA9-008F-8B48-92A6-B652298478BF}" type="slidenum">
               <a:rPr lang="en-US" smtClean="0"/>
-              <a:t>‹N°›</a:t>
+              <a:t>‹#›</a:t>
             </a:fld>
             <a:endParaRPr lang="en-US"/>
           </a:p>
@@ -3082,7 +3088,7 @@
 </file>
 
 <file path=ppt/slides/slide1.xml><?xml version="1.0" encoding="utf-8"?>
-<p:sld xmlns:a="http://schemas.openxmlformats.org/drawingml/2006/main" xmlns:r="http://schemas.openxmlformats.org/officeDocument/2006/relationships" xmlns:p="http://schemas.openxmlformats.org/presentationml/2006/main">
+<p:sld xmlns:a="http://schemas.openxmlformats.org/drawingml/2006/main" xmlns:p="http://schemas.openxmlformats.org/presentationml/2006/main" xmlns:r="http://schemas.openxmlformats.org/officeDocument/2006/relationships">
   <p:cSld>
     <p:bg>
       <p:bgPr>
@@ -3098,14 +3104,7 @@
         <p:cNvGrpSpPr/>
         <p:nvPr/>
       </p:nvGrpSpPr>
-      <p:grpSpPr>
-        <a:xfrm>
-          <a:off x="0" y="0"/>
-          <a:ext cx="0" cy="0"/>
-          <a:chOff x="0" y="0"/>
-          <a:chExt cx="0" cy="0"/>
-        </a:xfrm>
-      </p:grpSpPr>
+      <p:grpSpPr/>
       <p:sp>
         <p:nvSpPr>
           <p:cNvPr id="2" name="TextBox 1"/>
@@ -3250,8 +3249,235 @@
 </p:sld>
 </file>
 
+<file path=ppt/slides/slide10.xml><?xml version="1.0" encoding="utf-8"?>
+<p:sld xmlns:a="http://schemas.openxmlformats.org/drawingml/2006/main" xmlns:p="http://schemas.openxmlformats.org/presentationml/2006/main" xmlns:r="http://schemas.openxmlformats.org/officeDocument/2006/relationships">
+  <p:cSld>
+    <p:bg>
+      <p:bgPr>
+        <a:solidFill>
+          <a:srgbClr val="1F2D3D"/>
+        </a:solidFill>
+        <a:effectLst/>
+      </p:bgPr>
+    </p:bg>
+    <p:spTree>
+      <p:nvGrpSpPr>
+        <p:cNvPr id="1" name=""/>
+        <p:cNvGrpSpPr/>
+        <p:nvPr/>
+      </p:nvGrpSpPr>
+      <p:grpSpPr/>
+      <p:sp>
+        <p:nvSpPr>
+          <p:cNvPr id="2" name="TextBox 1"/>
+          <p:cNvSpPr txBox="1"/>
+          <p:nvPr/>
+        </p:nvSpPr>
+        <p:spPr>
+          <a:xfrm>
+            <a:off x="457200" y="1097280"/>
+            <a:ext cx="5943600" cy="5029200"/>
+          </a:xfrm>
+          <a:prstGeom prst="rect">
+            <a:avLst/>
+          </a:prstGeom>
+          <a:noFill/>
+        </p:spPr>
+        <p:txBody>
+          <a:bodyPr wrap="square">
+            <a:spAutoFit/>
+          </a:bodyPr>
+          <a:lstStyle/>
+          <a:p>
+            <a:pPr>
+              <a:spcAft>
+                <a:spcPts val="800"/>
+              </a:spcAft>
+              <a:defRPr sz="2600" b="1">
+                <a:solidFill>
+                  <a:srgbClr val="FFFFFF"/>
+                </a:solidFill>
+                <a:latin typeface="Arial"/>
+              </a:defRPr>
+            </a:pPr>
+            <a:r>
+              <a:t>Prenez le contrôle de votre Acquisition Locale</a:t>
+            </a:r>
+          </a:p>
+          <a:p>
+            <a:pPr>
+              <a:spcAft>
+                <a:spcPts val="1500"/>
+              </a:spcAft>
+              <a:defRPr sz="1350">
+                <a:solidFill>
+                  <a:srgbClr val="D59B2B"/>
+                </a:solidFill>
+                <a:latin typeface="Arial"/>
+              </a:defRPr>
+            </a:pPr>
+            <a:r>
+              <a:t>Boostez vos demandes de climatisation, diagnostics et études thermiques sans intermédiaires.</a:t>
+            </a:r>
+          </a:p>
+          <a:p>
+            <a:pPr>
+              <a:spcAft>
+                <a:spcPts val="600"/>
+              </a:spcAft>
+              <a:defRPr sz="1300">
+                <a:solidFill>
+                  <a:srgbClr val="FFFFFF"/>
+                </a:solidFill>
+              </a:defRPr>
+            </a:pPr>
+            <a:r>
+              <a:t>✔ Abonnement fixe transparent &amp; 0% commission</a:t>
+            </a:r>
+          </a:p>
+          <a:p>
+            <a:pPr>
+              <a:spcAft>
+                <a:spcPts val="600"/>
+              </a:spcAft>
+              <a:defRPr sz="1300">
+                <a:solidFill>
+                  <a:srgbClr val="FFFFFF"/>
+                </a:solidFill>
+              </a:defRPr>
+            </a:pPr>
+            <a:r>
+              <a:t>✔ Valoriser les vrais professionnels</a:t>
+            </a:r>
+          </a:p>
+          <a:p>
+            <a:pPr>
+              <a:spcAft>
+                <a:spcPts val="600"/>
+              </a:spcAft>
+              <a:defRPr sz="1300">
+                <a:solidFill>
+                  <a:srgbClr val="FFFFFF"/>
+                </a:solidFill>
+              </a:defRPr>
+            </a:pPr>
+            <a:r>
+              <a:t>✔ Apporter des contacts réellement qualifiés</a:t>
+            </a:r>
+          </a:p>
+          <a:p>
+            <a:pPr>
+              <a:spcAft>
+                <a:spcPts val="600"/>
+              </a:spcAft>
+              <a:defRPr sz="1300">
+                <a:solidFill>
+                  <a:srgbClr val="FFFFFF"/>
+                </a:solidFill>
+              </a:defRPr>
+            </a:pPr>
+            <a:r>
+              <a:t>✔ Rétablir la confiance entre artisans et clients</a:t>
+            </a:r>
+          </a:p>
+          <a:p>
+            <a:pPr>
+              <a:spcAft>
+                <a:spcPts val="600"/>
+              </a:spcAft>
+              <a:defRPr sz="1300">
+                <a:solidFill>
+                  <a:srgbClr val="FFFFFF"/>
+                </a:solidFill>
+              </a:defRPr>
+            </a:pPr>
+            <a:r>
+              <a:t>✔ Donner aux TPE/PME les outils pour rivaliser</a:t>
+            </a:r>
+          </a:p>
+          <a:p>
+            <a:pPr>
+              <a:spcAft>
+                <a:spcPts val="600"/>
+              </a:spcAft>
+              <a:defRPr sz="1300">
+                <a:solidFill>
+                  <a:srgbClr val="FFFFFF"/>
+                </a:solidFill>
+              </a:defRPr>
+            </a:pPr>
+            <a:r>
+              <a:t>✔ Plus de 58 000 pages et articles référencés sur Google</a:t>
+            </a:r>
+          </a:p>
+          <a:p>
+            <a:pPr>
+              <a:spcAft>
+                <a:spcPts val="1500"/>
+              </a:spcAft>
+              <a:defRPr sz="1300">
+                <a:solidFill>
+                  <a:srgbClr val="FFFFFF"/>
+                </a:solidFill>
+              </a:defRPr>
+            </a:pPr>
+            <a:r>
+              <a:t>✔ Suivi en temps réel des leads et impressions</a:t>
+            </a:r>
+          </a:p>
+          <a:p>
+            <a:pPr>
+              <a:defRPr sz="1250" b="1">
+                <a:solidFill>
+                  <a:srgbClr val="D59B2B"/>
+                </a:solidFill>
+                <a:latin typeface="Arial"/>
+              </a:defRPr>
+            </a:pPr>
+            <a:r>
+              <a:t>Rejoignez le réseau : www.gainable.fr | www.gainable.be | www.gainable.ch</a:t>
+            </a:r>
+            <a:br/>
+            <a:r>
+              <a:t>Contact commercial : contact@gainable.ch</a:t>
+            </a:r>
+          </a:p>
+        </p:txBody>
+      </p:sp>
+      <p:pic>
+        <p:nvPicPr>
+          <p:cNvPr id="3" name="Picture 2" descr="espace_pro_conclusion_1765140856043.png"/>
+          <p:cNvPicPr>
+            <a:picLocks noChangeAspect="1"/>
+          </p:cNvPicPr>
+          <p:nvPr/>
+        </p:nvPicPr>
+        <p:blipFill>
+          <a:blip r:embed="rId2"/>
+          <a:stretch>
+            <a:fillRect/>
+          </a:stretch>
+        </p:blipFill>
+        <p:spPr>
+          <a:xfrm>
+            <a:off x="6705295" y="0"/>
+            <a:ext cx="5486400" cy="6858000"/>
+          </a:xfrm>
+          <a:prstGeom prst="rect">
+            <a:avLst/>
+          </a:prstGeom>
+        </p:spPr>
+      </p:pic>
+    </p:spTree>
+  </p:cSld>
+  <p:clrMapOvr>
+    <a:masterClrMapping/>
+  </p:clrMapOvr>
+</p:sld>
+</file>
+
 <file path=ppt/slides/slide2.xml><?xml version="1.0" encoding="utf-8"?>
-<p:sld xmlns:a="http://schemas.openxmlformats.org/drawingml/2006/main" xmlns:r="http://schemas.openxmlformats.org/officeDocument/2006/relationships" xmlns:p="http://schemas.openxmlformats.org/presentationml/2006/main">
+<p:sld xmlns:a="http://schemas.openxmlformats.org/drawingml/2006/main" xmlns:p="http://schemas.openxmlformats.org/presentationml/2006/main" xmlns:r="http://schemas.openxmlformats.org/officeDocument/2006/relationships">
   <p:cSld>
     <p:bg>
       <p:bgPr>
@@ -3267,14 +3493,7 @@
         <p:cNvGrpSpPr/>
         <p:nvPr/>
       </p:nvGrpSpPr>
-      <p:grpSpPr>
-        <a:xfrm>
-          <a:off x="0" y="0"/>
-          <a:ext cx="0" cy="0"/>
-          <a:chOff x="0" y="0"/>
-          <a:chExt cx="0" cy="0"/>
-        </a:xfrm>
-      </p:grpSpPr>
+      <p:grpSpPr/>
       <p:sp>
         <p:nvSpPr>
           <p:cNvPr id="2" name="TextBox 1"/>
@@ -3334,7 +3553,7 @@
           <a:lstStyle/>
           <a:p>
             <a:pPr>
-              <a:defRPr sz="2600" b="1">
+              <a:defRPr sz="2400" b="1">
                 <a:solidFill>
                   <a:srgbClr val="1F2D3D"/>
                 </a:solidFill>
@@ -3342,7 +3561,7 @@
               </a:defRPr>
             </a:pPr>
             <a:r>
-              <a:t>Pourquoi Gainable.fr ? Un Modèle d'Acquisition Rentable</a:t>
+              <a:t>Pourquoi Gainable.fr ? Dominer sa zone à l'ère numérique</a:t>
             </a:r>
           </a:p>
         </p:txBody>
@@ -3389,7 +3608,6 @@
           <a:lstStyle/>
           <a:p>
             <a:pPr algn="ctr"/>
-            <a:endParaRPr/>
           </a:p>
         </p:txBody>
       </p:sp>
@@ -3402,7 +3620,7 @@
         <p:spPr>
           <a:xfrm>
             <a:off x="731520" y="1645920"/>
-            <a:ext cx="5303520" cy="9164047"/>
+            <a:ext cx="5303520" cy="4572000"/>
           </a:xfrm>
           <a:prstGeom prst="rect">
             <a:avLst/>
@@ -3417,9 +3635,9 @@
           <a:p>
             <a:pPr>
               <a:spcAft>
-                <a:spcPts val="2000"/>
+                <a:spcPts val="1500"/>
               </a:spcAft>
-              <a:defRPr sz="1500" b="1">
+              <a:defRPr sz="1400" b="1">
                 <a:solidFill>
                   <a:srgbClr val="1F2D3D"/>
                 </a:solidFill>
@@ -3427,1012 +3645,92 @@
               </a:defRPr>
             </a:pPr>
             <a:r>
-              <a:rPr dirty="0"/>
-              <a:t>Une alternative </a:t>
-            </a:r>
-            <a:r>
-              <a:rPr dirty="0" err="1"/>
-              <a:t>performante</a:t>
-            </a:r>
-            <a:r>
-              <a:rPr dirty="0"/>
-              <a:t> aux budgets Google Ads et aux </a:t>
-            </a:r>
-            <a:r>
-              <a:rPr dirty="0" err="1"/>
-              <a:t>plateformes</a:t>
-            </a:r>
-            <a:r>
-              <a:rPr dirty="0"/>
-              <a:t> de </a:t>
-            </a:r>
-            <a:r>
-              <a:rPr dirty="0" err="1"/>
-              <a:t>courtage</a:t>
-            </a:r>
-            <a:r>
-              <a:rPr dirty="0"/>
-              <a:t> </a:t>
-            </a:r>
-            <a:r>
-              <a:rPr dirty="0" err="1"/>
-              <a:t>coûteuses</a:t>
-            </a:r>
-            <a:r>
-              <a:rPr dirty="0"/>
-              <a:t>.</a:t>
-            </a:r>
-            <a:endParaRPr lang="fr-FR" dirty="0"/>
+              <a:t>Le bouche-à-oreille et les réseaux sociaux sont insuffisants. Face à la concurrence, un référencement Google et IA de premier ordre est devenu primordial.</a:t>
+            </a:r>
           </a:p>
           <a:p>
             <a:pPr>
               <a:spcAft>
-                <a:spcPts val="2000"/>
+                <a:spcPts val="1200"/>
               </a:spcAft>
-              <a:defRPr sz="1500" b="1">
+              <a:defRPr sz="1250">
+                <a:latin typeface="Arial"/>
+              </a:defRPr>
+            </a:pPr>
+            <a:r>
+              <a:rPr b="1">
                 <a:solidFill>
                   <a:srgbClr val="1F2D3D"/>
                 </a:solidFill>
-                <a:latin typeface="Arial"/>
-              </a:defRPr>
-            </a:pPr>
-            <a:endParaRPr lang="fr-FR" dirty="0"/>
+              </a:rPr>
+              <a:t>• Transition Numérique &amp; IA : </a:t>
+            </a:r>
+            <a:r>
+              <a:rPr b="0">
+                <a:solidFill>
+                  <a:srgbClr val="64748B"/>
+                </a:solidFill>
+              </a:rPr>
+              <a:t>Les comportements d'achat ont changé. Le bouche-à-oreille ne représente qu'une infime partie du marché. Être présent sur Google et optimisé pour les moteurs de recherche IA est capital.</a:t>
+            </a:r>
           </a:p>
           <a:p>
             <a:pPr>
               <a:spcAft>
-                <a:spcPts val="2000"/>
+                <a:spcPts val="1200"/>
               </a:spcAft>
-              <a:defRPr sz="1500" b="1">
+              <a:defRPr sz="1250">
+                <a:latin typeface="Arial"/>
+              </a:defRPr>
+            </a:pPr>
+            <a:r>
+              <a:rPr b="1">
                 <a:solidFill>
                   <a:srgbClr val="1F2D3D"/>
                 </a:solidFill>
-                <a:latin typeface="Arial"/>
-              </a:defRPr>
-            </a:pPr>
-            <a:r>
-              <a:rPr lang="fr-FR" dirty="0" err="1"/>
-              <a:t>Faudrai</a:t>
-            </a:r>
-            <a:r>
-              <a:rPr lang="fr-FR" dirty="0"/>
-              <a:t> parler des </a:t>
-            </a:r>
-            <a:r>
-              <a:rPr lang="fr-FR" dirty="0" err="1"/>
-              <a:t>problematique</a:t>
-            </a:r>
-            <a:r>
-              <a:rPr lang="fr-FR" dirty="0"/>
-              <a:t>  lie a pourquoi   </a:t>
-            </a:r>
-            <a:r>
-              <a:rPr lang="fr-FR" dirty="0" err="1"/>
-              <a:t>etre</a:t>
-            </a:r>
-            <a:r>
-              <a:rPr lang="fr-FR" dirty="0"/>
-              <a:t> sur gainable.fr  est </a:t>
-            </a:r>
-            <a:r>
-              <a:rPr lang="fr-FR" dirty="0" err="1"/>
-              <a:t>necessaire</a:t>
-            </a:r>
-            <a:r>
-              <a:rPr lang="fr-FR" dirty="0"/>
-              <a:t> ( concurrence , non habiliter </a:t>
-            </a:r>
-            <a:r>
-              <a:rPr lang="fr-FR" dirty="0" err="1"/>
-              <a:t>pourle</a:t>
-            </a:r>
-            <a:r>
-              <a:rPr lang="fr-FR" dirty="0"/>
-              <a:t> secteur d’</a:t>
-            </a:r>
-            <a:r>
-              <a:rPr lang="fr-FR" dirty="0" err="1"/>
-              <a:t>activite</a:t>
-            </a:r>
-            <a:r>
-              <a:rPr lang="fr-FR" dirty="0"/>
-              <a:t> sortir  du lot ,</a:t>
-            </a:r>
-            <a:r>
-              <a:rPr lang="fr-FR" dirty="0" err="1"/>
-              <a:t>etre</a:t>
-            </a:r>
-            <a:r>
-              <a:rPr lang="fr-FR" dirty="0"/>
-              <a:t> </a:t>
-            </a:r>
-            <a:r>
-              <a:rPr lang="fr-FR" dirty="0" err="1"/>
-              <a:t>reference</a:t>
-            </a:r>
-            <a:r>
-              <a:rPr lang="fr-FR" dirty="0"/>
-              <a:t> entant que expert  ,objectif </a:t>
-            </a:r>
-            <a:r>
-              <a:rPr lang="fr-FR" dirty="0" err="1"/>
-              <a:t>etre</a:t>
-            </a:r>
-            <a:r>
-              <a:rPr lang="fr-FR" dirty="0"/>
-              <a:t> le </a:t>
-            </a:r>
-            <a:r>
-              <a:rPr lang="fr-FR" dirty="0" err="1"/>
-              <a:t>reference</a:t>
-            </a:r>
-            <a:r>
-              <a:rPr lang="fr-FR" dirty="0"/>
-              <a:t> dans votre zone </a:t>
-            </a:r>
-            <a:r>
-              <a:rPr lang="fr-FR" dirty="0" err="1"/>
-              <a:t>geographique</a:t>
-            </a:r>
-            <a:r>
-              <a:rPr lang="fr-FR" dirty="0"/>
-              <a:t> , les </a:t>
-            </a:r>
-            <a:r>
-              <a:rPr lang="fr-FR" dirty="0" err="1"/>
-              <a:t>reseaux</a:t>
-            </a:r>
-            <a:r>
-              <a:rPr lang="fr-FR" dirty="0"/>
-              <a:t> sociaux , google c’est </a:t>
-            </a:r>
-            <a:r>
-              <a:rPr lang="fr-FR" dirty="0" err="1"/>
-              <a:t>necessaire</a:t>
-            </a:r>
-            <a:r>
-              <a:rPr lang="fr-FR" dirty="0"/>
-              <a:t> mais vu qu’on est   une transition </a:t>
-            </a:r>
-            <a:r>
-              <a:rPr lang="fr-FR" dirty="0" err="1"/>
-              <a:t>numeros</a:t>
-            </a:r>
-            <a:r>
-              <a:rPr lang="fr-FR" dirty="0"/>
-              <a:t> avoir un bon </a:t>
-            </a:r>
-            <a:r>
-              <a:rPr lang="fr-FR" dirty="0" err="1"/>
-              <a:t>referencement</a:t>
-            </a:r>
-            <a:r>
-              <a:rPr lang="fr-FR" dirty="0"/>
-              <a:t> google  est primordial  et </a:t>
-            </a:r>
-            <a:r>
-              <a:rPr lang="fr-FR" dirty="0" err="1"/>
-              <a:t>egalement</a:t>
-            </a:r>
-            <a:r>
-              <a:rPr lang="fr-FR" dirty="0"/>
-              <a:t>  </a:t>
-            </a:r>
-            <a:r>
-              <a:rPr lang="fr-FR" dirty="0" err="1"/>
-              <a:t>referencement</a:t>
-            </a:r>
-            <a:r>
-              <a:rPr lang="fr-FR" dirty="0"/>
-              <a:t> au </a:t>
-            </a:r>
-            <a:r>
-              <a:rPr lang="fr-FR" dirty="0" err="1"/>
-              <a:t>pres</a:t>
-            </a:r>
-            <a:r>
-              <a:rPr lang="fr-FR" dirty="0"/>
-              <a:t> des IA , le bouche a </a:t>
-            </a:r>
-            <a:r>
-              <a:rPr lang="fr-FR" dirty="0" err="1"/>
-              <a:t>orielle</a:t>
-            </a:r>
-            <a:r>
-              <a:rPr lang="fr-FR" dirty="0"/>
-              <a:t> c’est bien  mais  ne </a:t>
-            </a:r>
-            <a:r>
-              <a:rPr lang="fr-FR" dirty="0" err="1"/>
-              <a:t>represente</a:t>
-            </a:r>
-            <a:r>
-              <a:rPr lang="fr-FR" dirty="0"/>
-              <a:t> qu’une </a:t>
-            </a:r>
-            <a:r>
-              <a:rPr lang="fr-FR" dirty="0" err="1"/>
-              <a:t>infine</a:t>
-            </a:r>
-            <a:r>
-              <a:rPr lang="fr-FR" dirty="0"/>
-              <a:t> partie   … l’objectif de gainable est de vous  donner un outils ou seul votre implication et </a:t>
-            </a:r>
-            <a:r>
-              <a:rPr lang="fr-FR" dirty="0" err="1"/>
-              <a:t>serieux</a:t>
-            </a:r>
-            <a:r>
-              <a:rPr lang="fr-FR" dirty="0"/>
-              <a:t>  boostera  votre </a:t>
-            </a:r>
-            <a:r>
-              <a:rPr lang="fr-FR" dirty="0" err="1"/>
-              <a:t>visibilite</a:t>
-            </a:r>
-            <a:r>
-              <a:rPr lang="fr-FR" dirty="0"/>
-              <a:t>  en  </a:t>
-            </a:r>
-            <a:r>
-              <a:rPr lang="fr-FR" dirty="0" err="1"/>
-              <a:t>deposer</a:t>
-            </a:r>
-            <a:r>
-              <a:rPr lang="fr-FR" dirty="0"/>
-              <a:t> de </a:t>
-            </a:r>
-            <a:r>
-              <a:rPr lang="fr-FR" dirty="0" err="1"/>
-              <a:t>phto</a:t>
-            </a:r>
-            <a:r>
-              <a:rPr lang="fr-FR" dirty="0"/>
-              <a:t> </a:t>
-            </a:r>
-            <a:r>
-              <a:rPr lang="fr-FR" dirty="0" err="1"/>
-              <a:t>regulier</a:t>
-            </a:r>
-            <a:r>
-              <a:rPr lang="fr-FR" dirty="0"/>
-              <a:t> des article   ( la tu met  progression  de nombre d’article  poster sur 6 -12 mois puis 2 a 3 ans   impact sur les impression google/</a:t>
-            </a:r>
-            <a:r>
-              <a:rPr lang="fr-FR" dirty="0" err="1"/>
-              <a:t>yahoo</a:t>
-            </a:r>
-            <a:r>
-              <a:rPr lang="fr-FR" dirty="0"/>
-              <a:t>/ IA  ) </a:t>
-            </a:r>
-            <a:r>
-              <a:rPr lang="fr-FR" dirty="0" err="1"/>
-              <a:t>precision</a:t>
-            </a:r>
-            <a:r>
-              <a:rPr lang="fr-FR" dirty="0"/>
-              <a:t>  une </a:t>
-            </a:r>
-            <a:r>
-              <a:rPr lang="fr-FR" dirty="0" err="1"/>
-              <a:t>verification</a:t>
-            </a:r>
-            <a:r>
-              <a:rPr lang="fr-FR" dirty="0"/>
-              <a:t> de </a:t>
-            </a:r>
-            <a:r>
-              <a:rPr lang="fr-FR" dirty="0" err="1"/>
-              <a:t>solvabilite</a:t>
-            </a:r>
-            <a:r>
-              <a:rPr lang="fr-FR" dirty="0"/>
-              <a:t>  API  </a:t>
-            </a:r>
-            <a:r>
-              <a:rPr lang="fr-FR" dirty="0" err="1"/>
-              <a:t>verification</a:t>
-            </a:r>
-            <a:r>
-              <a:rPr lang="fr-FR" dirty="0"/>
-              <a:t> </a:t>
-            </a:r>
-            <a:r>
-              <a:rPr lang="fr-FR" dirty="0" err="1"/>
-              <a:t>Inesse</a:t>
-            </a:r>
-            <a:r>
-              <a:rPr lang="fr-FR" dirty="0"/>
-              <a:t>   ce fais lors de l’inscription   PS  pour les </a:t>
-            </a:r>
-            <a:r>
-              <a:rPr lang="fr-FR" dirty="0" err="1"/>
-              <a:t>grafique</a:t>
-            </a:r>
-            <a:r>
-              <a:rPr lang="fr-FR" dirty="0"/>
-              <a:t>  </a:t>
-            </a:r>
-            <a:r>
-              <a:rPr lang="fr-FR" dirty="0" err="1"/>
-              <a:t>faudrais</a:t>
-            </a:r>
-            <a:r>
-              <a:rPr lang="fr-FR" dirty="0"/>
-              <a:t> pas mettre  du  CA  car  on  risque de se faire retoquer </a:t>
-            </a:r>
-            <a:endParaRPr dirty="0"/>
+              </a:rPr>
+              <a:t>• Soyez le référent de votre secteur : </a:t>
+            </a:r>
+            <a:r>
+              <a:rPr b="0">
+                <a:solidFill>
+                  <a:srgbClr val="64748B"/>
+                </a:solidFill>
+              </a:rPr>
+              <a:t>Gainable.fr vous fournit l'outil ultime. En publiant régulièrement des articles et en ajoutant des photos de vos chantiers, votre implication et sérieux propulsent votre visibilité locale.</a:t>
+            </a:r>
           </a:p>
           <a:p>
             <a:pPr>
               <a:spcAft>
-                <a:spcPts val="1500"/>
+                <a:spcPts val="1200"/>
               </a:spcAft>
-              <a:defRPr sz="1350">
+              <a:defRPr sz="1250">
                 <a:latin typeface="Arial"/>
               </a:defRPr>
             </a:pPr>
             <a:r>
-              <a:rPr b="1" dirty="0">
+              <a:rPr b="1">
                 <a:solidFill>
                   <a:srgbClr val="1F2D3D"/>
                 </a:solidFill>
               </a:rPr>
-              <a:t>• 0% de Commission sur </a:t>
-            </a:r>
-            <a:r>
-              <a:rPr b="1" dirty="0" err="1">
-                <a:solidFill>
-                  <a:srgbClr val="1F2D3D"/>
+              <a:t>• Zéro commission &amp; Solvabilité validée : </a:t>
+            </a:r>
+            <a:r>
+              <a:rPr b="0">
+                <a:solidFill>
+                  <a:srgbClr val="64748B"/>
                 </a:solidFill>
               </a:rPr>
-              <a:t>vos</a:t>
-            </a:r>
-            <a:r>
-              <a:rPr b="1" dirty="0">
-                <a:solidFill>
-                  <a:srgbClr val="1F2D3D"/>
-                </a:solidFill>
-              </a:rPr>
-              <a:t> devis : </a:t>
-            </a:r>
-            <a:r>
-              <a:rPr b="0" dirty="0" err="1">
-                <a:solidFill>
-                  <a:srgbClr val="64748B"/>
-                </a:solidFill>
-              </a:rPr>
-              <a:t>Contrairement</a:t>
-            </a:r>
-            <a:r>
-              <a:rPr b="0" dirty="0">
-                <a:solidFill>
-                  <a:srgbClr val="64748B"/>
-                </a:solidFill>
-              </a:rPr>
-              <a:t> aux </a:t>
-            </a:r>
-            <a:r>
-              <a:rPr b="0" dirty="0" err="1">
-                <a:solidFill>
-                  <a:srgbClr val="64748B"/>
-                </a:solidFill>
-              </a:rPr>
-              <a:t>intermédiaires</a:t>
-            </a:r>
-            <a:r>
-              <a:rPr b="0" dirty="0">
-                <a:solidFill>
-                  <a:srgbClr val="64748B"/>
-                </a:solidFill>
-              </a:rPr>
-              <a:t> </a:t>
-            </a:r>
-            <a:r>
-              <a:rPr b="0" dirty="0" err="1">
-                <a:solidFill>
-                  <a:srgbClr val="64748B"/>
-                </a:solidFill>
-              </a:rPr>
-              <a:t>classiques</a:t>
-            </a:r>
-            <a:r>
-              <a:rPr b="0" dirty="0">
-                <a:solidFill>
-                  <a:srgbClr val="64748B"/>
-                </a:solidFill>
-              </a:rPr>
-              <a:t>, vous </a:t>
-            </a:r>
-            <a:r>
-              <a:rPr b="0" dirty="0" err="1">
-                <a:solidFill>
-                  <a:srgbClr val="64748B"/>
-                </a:solidFill>
-              </a:rPr>
-              <a:t>conservez</a:t>
-            </a:r>
-            <a:r>
-              <a:rPr b="0" dirty="0">
-                <a:solidFill>
-                  <a:srgbClr val="64748B"/>
-                </a:solidFill>
-              </a:rPr>
-              <a:t> </a:t>
-            </a:r>
-            <a:r>
-              <a:rPr b="0" dirty="0" err="1">
-                <a:solidFill>
-                  <a:srgbClr val="64748B"/>
-                </a:solidFill>
-              </a:rPr>
-              <a:t>l'intégralité</a:t>
-            </a:r>
-            <a:r>
-              <a:rPr b="0" dirty="0">
-                <a:solidFill>
-                  <a:srgbClr val="64748B"/>
-                </a:solidFill>
-              </a:rPr>
-              <a:t> de la </a:t>
-            </a:r>
-            <a:r>
-              <a:rPr b="0" dirty="0" err="1">
-                <a:solidFill>
-                  <a:srgbClr val="64748B"/>
-                </a:solidFill>
-              </a:rPr>
-              <a:t>valeur</a:t>
-            </a:r>
-            <a:r>
-              <a:rPr b="0" dirty="0">
-                <a:solidFill>
-                  <a:srgbClr val="64748B"/>
-                </a:solidFill>
-              </a:rPr>
-              <a:t> de </a:t>
-            </a:r>
-            <a:r>
-              <a:rPr b="0" dirty="0" err="1">
-                <a:solidFill>
-                  <a:srgbClr val="64748B"/>
-                </a:solidFill>
-              </a:rPr>
-              <a:t>vos</a:t>
-            </a:r>
-            <a:r>
-              <a:rPr b="0" dirty="0">
-                <a:solidFill>
-                  <a:srgbClr val="64748B"/>
-                </a:solidFill>
-              </a:rPr>
-              <a:t> </a:t>
-            </a:r>
-            <a:r>
-              <a:rPr b="0" dirty="0" err="1">
-                <a:solidFill>
-                  <a:srgbClr val="64748B"/>
-                </a:solidFill>
-              </a:rPr>
-              <a:t>chantiers</a:t>
-            </a:r>
-            <a:r>
-              <a:rPr b="0" dirty="0">
-                <a:solidFill>
-                  <a:srgbClr val="64748B"/>
-                </a:solidFill>
-              </a:rPr>
-              <a:t>. Vous ne </a:t>
-            </a:r>
-            <a:r>
-              <a:rPr b="0" dirty="0" err="1">
-                <a:solidFill>
-                  <a:srgbClr val="64748B"/>
-                </a:solidFill>
-              </a:rPr>
-              <a:t>payez</a:t>
-            </a:r>
-            <a:r>
-              <a:rPr b="0" dirty="0">
-                <a:solidFill>
-                  <a:srgbClr val="64748B"/>
-                </a:solidFill>
-              </a:rPr>
-              <a:t> </a:t>
-            </a:r>
-            <a:r>
-              <a:rPr b="0" dirty="0" err="1">
-                <a:solidFill>
-                  <a:srgbClr val="64748B"/>
-                </a:solidFill>
-              </a:rPr>
-              <a:t>qu'un</a:t>
-            </a:r>
-            <a:r>
-              <a:rPr b="0" dirty="0">
-                <a:solidFill>
-                  <a:srgbClr val="64748B"/>
-                </a:solidFill>
-              </a:rPr>
-              <a:t> abonnement </a:t>
-            </a:r>
-            <a:r>
-              <a:rPr b="0" dirty="0" err="1">
-                <a:solidFill>
-                  <a:srgbClr val="64748B"/>
-                </a:solidFill>
-              </a:rPr>
-              <a:t>mensuel</a:t>
-            </a:r>
-            <a:r>
-              <a:rPr b="0" dirty="0">
-                <a:solidFill>
-                  <a:srgbClr val="64748B"/>
-                </a:solidFill>
-              </a:rPr>
-              <a:t> fixe.</a:t>
-            </a:r>
-          </a:p>
-          <a:p>
-            <a:pPr>
-              <a:spcAft>
-                <a:spcPts val="1500"/>
-              </a:spcAft>
-              <a:defRPr sz="1350">
-                <a:latin typeface="Arial"/>
-              </a:defRPr>
-            </a:pPr>
-            <a:r>
-              <a:rPr b="1" dirty="0">
-                <a:solidFill>
-                  <a:srgbClr val="1F2D3D"/>
-                </a:solidFill>
-              </a:rPr>
-              <a:t>• </a:t>
-            </a:r>
-            <a:r>
-              <a:rPr b="1" dirty="0" err="1">
-                <a:solidFill>
-                  <a:srgbClr val="1F2D3D"/>
-                </a:solidFill>
-              </a:rPr>
-              <a:t>Visibilité</a:t>
-            </a:r>
-            <a:r>
-              <a:rPr b="1" dirty="0">
-                <a:solidFill>
-                  <a:srgbClr val="1F2D3D"/>
-                </a:solidFill>
-              </a:rPr>
-              <a:t> Locale </a:t>
-            </a:r>
-            <a:r>
-              <a:rPr b="1" dirty="0" err="1">
-                <a:solidFill>
-                  <a:srgbClr val="1F2D3D"/>
-                </a:solidFill>
-              </a:rPr>
-              <a:t>Immédiate</a:t>
-            </a:r>
-            <a:r>
-              <a:rPr b="1" dirty="0">
-                <a:solidFill>
-                  <a:srgbClr val="1F2D3D"/>
-                </a:solidFill>
-              </a:rPr>
-              <a:t> : </a:t>
-            </a:r>
-            <a:r>
-              <a:rPr b="0" dirty="0">
-                <a:solidFill>
-                  <a:srgbClr val="64748B"/>
-                </a:solidFill>
-              </a:rPr>
-              <a:t>Gainable.fr </a:t>
-            </a:r>
-            <a:r>
-              <a:rPr b="0" dirty="0" err="1">
-                <a:solidFill>
-                  <a:srgbClr val="64748B"/>
-                </a:solidFill>
-              </a:rPr>
-              <a:t>mutualise</a:t>
-            </a:r>
-            <a:r>
-              <a:rPr b="0" dirty="0">
-                <a:solidFill>
-                  <a:srgbClr val="64748B"/>
-                </a:solidFill>
-              </a:rPr>
-              <a:t> </a:t>
-            </a:r>
-            <a:r>
-              <a:rPr b="0" dirty="0" err="1">
-                <a:solidFill>
-                  <a:srgbClr val="64748B"/>
-                </a:solidFill>
-              </a:rPr>
-              <a:t>sa</a:t>
-            </a:r>
-            <a:r>
-              <a:rPr b="0" dirty="0">
-                <a:solidFill>
-                  <a:srgbClr val="64748B"/>
-                </a:solidFill>
-              </a:rPr>
-              <a:t> forte </a:t>
-            </a:r>
-            <a:r>
-              <a:rPr b="0" dirty="0" err="1">
-                <a:solidFill>
-                  <a:srgbClr val="64748B"/>
-                </a:solidFill>
-              </a:rPr>
-              <a:t>autorité</a:t>
-            </a:r>
-            <a:r>
-              <a:rPr b="0" dirty="0">
-                <a:solidFill>
-                  <a:srgbClr val="64748B"/>
-                </a:solidFill>
-              </a:rPr>
-              <a:t> (+58k pages </a:t>
-            </a:r>
-            <a:r>
-              <a:rPr b="0" dirty="0" err="1">
-                <a:solidFill>
-                  <a:srgbClr val="64748B"/>
-                </a:solidFill>
-              </a:rPr>
-              <a:t>indexées</a:t>
-            </a:r>
-            <a:r>
-              <a:rPr b="0" dirty="0">
-                <a:solidFill>
-                  <a:srgbClr val="64748B"/>
-                </a:solidFill>
-              </a:rPr>
-              <a:t>) pour </a:t>
-            </a:r>
-            <a:r>
-              <a:rPr b="0" dirty="0" err="1">
-                <a:solidFill>
-                  <a:srgbClr val="64748B"/>
-                </a:solidFill>
-              </a:rPr>
-              <a:t>positionner</a:t>
-            </a:r>
-            <a:r>
-              <a:rPr b="0" dirty="0">
-                <a:solidFill>
-                  <a:srgbClr val="64748B"/>
-                </a:solidFill>
-              </a:rPr>
-              <a:t> </a:t>
-            </a:r>
-            <a:r>
-              <a:rPr b="0" dirty="0" err="1">
-                <a:solidFill>
-                  <a:srgbClr val="64748B"/>
-                </a:solidFill>
-              </a:rPr>
-              <a:t>vos</a:t>
-            </a:r>
-            <a:r>
-              <a:rPr b="0" dirty="0">
-                <a:solidFill>
-                  <a:srgbClr val="64748B"/>
-                </a:solidFill>
-              </a:rPr>
-              <a:t> fiches et </a:t>
-            </a:r>
-            <a:r>
-              <a:rPr b="0" dirty="0" err="1">
-                <a:solidFill>
-                  <a:srgbClr val="64748B"/>
-                </a:solidFill>
-              </a:rPr>
-              <a:t>vos</a:t>
-            </a:r>
-            <a:r>
-              <a:rPr b="0" dirty="0">
-                <a:solidFill>
-                  <a:srgbClr val="64748B"/>
-                </a:solidFill>
-              </a:rPr>
-              <a:t> articles </a:t>
-            </a:r>
-            <a:r>
-              <a:rPr b="0" dirty="0" err="1">
-                <a:solidFill>
-                  <a:srgbClr val="64748B"/>
-                </a:solidFill>
-              </a:rPr>
-              <a:t>en</a:t>
-            </a:r>
-            <a:r>
-              <a:rPr b="0" dirty="0">
-                <a:solidFill>
-                  <a:srgbClr val="64748B"/>
-                </a:solidFill>
-              </a:rPr>
-              <a:t> 1ère page Google sur </a:t>
-            </a:r>
-            <a:r>
-              <a:rPr b="0" dirty="0" err="1">
-                <a:solidFill>
-                  <a:srgbClr val="64748B"/>
-                </a:solidFill>
-              </a:rPr>
-              <a:t>vos</a:t>
-            </a:r>
-            <a:r>
-              <a:rPr b="0" dirty="0">
-                <a:solidFill>
-                  <a:srgbClr val="64748B"/>
-                </a:solidFill>
-              </a:rPr>
-              <a:t> communes </a:t>
-            </a:r>
-            <a:r>
-              <a:rPr b="0" dirty="0" err="1">
-                <a:solidFill>
-                  <a:srgbClr val="64748B"/>
-                </a:solidFill>
-              </a:rPr>
-              <a:t>d'intervention</a:t>
-            </a:r>
-            <a:r>
-              <a:rPr b="0" dirty="0">
-                <a:solidFill>
-                  <a:srgbClr val="64748B"/>
-                </a:solidFill>
-              </a:rPr>
-              <a:t>.</a:t>
-            </a:r>
-          </a:p>
-          <a:p>
-            <a:pPr>
-              <a:spcAft>
-                <a:spcPts val="1500"/>
-              </a:spcAft>
-              <a:defRPr sz="1350">
-                <a:latin typeface="Arial"/>
-              </a:defRPr>
-            </a:pPr>
-            <a:r>
-              <a:rPr b="1" dirty="0">
-                <a:solidFill>
-                  <a:srgbClr val="1F2D3D"/>
-                </a:solidFill>
-              </a:rPr>
-              <a:t>• Contacts </a:t>
-            </a:r>
-            <a:r>
-              <a:rPr b="1" dirty="0" err="1">
-                <a:solidFill>
-                  <a:srgbClr val="1F2D3D"/>
-                </a:solidFill>
-              </a:rPr>
-              <a:t>qualifiés</a:t>
-            </a:r>
-            <a:r>
-              <a:rPr b="1" dirty="0">
-                <a:solidFill>
-                  <a:srgbClr val="1F2D3D"/>
-                </a:solidFill>
-              </a:rPr>
-              <a:t> </a:t>
-            </a:r>
-            <a:r>
-              <a:rPr b="1" dirty="0" err="1">
-                <a:solidFill>
-                  <a:srgbClr val="1F2D3D"/>
-                </a:solidFill>
-              </a:rPr>
-              <a:t>en</a:t>
-            </a:r>
-            <a:r>
-              <a:rPr b="1" dirty="0">
-                <a:solidFill>
-                  <a:srgbClr val="1F2D3D"/>
-                </a:solidFill>
-              </a:rPr>
-              <a:t> direct : </a:t>
-            </a:r>
-            <a:r>
-              <a:rPr b="0" dirty="0">
-                <a:solidFill>
-                  <a:srgbClr val="64748B"/>
-                </a:solidFill>
-              </a:rPr>
-              <a:t>Les </a:t>
-            </a:r>
-            <a:r>
-              <a:rPr b="0" dirty="0" err="1">
-                <a:solidFill>
-                  <a:srgbClr val="64748B"/>
-                </a:solidFill>
-              </a:rPr>
-              <a:t>demandes</a:t>
-            </a:r>
-            <a:r>
-              <a:rPr b="0" dirty="0">
-                <a:solidFill>
-                  <a:srgbClr val="64748B"/>
-                </a:solidFill>
-              </a:rPr>
-              <a:t> des </a:t>
-            </a:r>
-            <a:r>
-              <a:rPr b="0" dirty="0" err="1">
-                <a:solidFill>
-                  <a:srgbClr val="64748B"/>
-                </a:solidFill>
-              </a:rPr>
-              <a:t>particuliers</a:t>
-            </a:r>
-            <a:r>
-              <a:rPr b="0" dirty="0">
-                <a:solidFill>
-                  <a:srgbClr val="64748B"/>
-                </a:solidFill>
-              </a:rPr>
-              <a:t> et </a:t>
-            </a:r>
-            <a:r>
-              <a:rPr b="0" dirty="0" err="1">
-                <a:solidFill>
-                  <a:srgbClr val="64748B"/>
-                </a:solidFill>
-              </a:rPr>
-              <a:t>professionnels</a:t>
-            </a:r>
-            <a:r>
-              <a:rPr b="0" dirty="0">
-                <a:solidFill>
-                  <a:srgbClr val="64748B"/>
-                </a:solidFill>
-              </a:rPr>
-              <a:t> (bureau </a:t>
-            </a:r>
-            <a:r>
-              <a:rPr b="0" dirty="0" err="1">
-                <a:solidFill>
-                  <a:srgbClr val="64748B"/>
-                </a:solidFill>
-              </a:rPr>
-              <a:t>d'études</a:t>
-            </a:r>
-            <a:r>
-              <a:rPr b="0" dirty="0">
-                <a:solidFill>
-                  <a:srgbClr val="64748B"/>
-                </a:solidFill>
-              </a:rPr>
-              <a:t>, diagnostics...) vous </a:t>
-            </a:r>
-            <a:r>
-              <a:rPr b="0" dirty="0" err="1">
-                <a:solidFill>
-                  <a:srgbClr val="64748B"/>
-                </a:solidFill>
-              </a:rPr>
-              <a:t>sont</a:t>
-            </a:r>
-            <a:r>
-              <a:rPr b="0" dirty="0">
-                <a:solidFill>
-                  <a:srgbClr val="64748B"/>
-                </a:solidFill>
-              </a:rPr>
-              <a:t> </a:t>
-            </a:r>
-            <a:r>
-              <a:rPr b="0" dirty="0" err="1">
-                <a:solidFill>
-                  <a:srgbClr val="64748B"/>
-                </a:solidFill>
-              </a:rPr>
-              <a:t>envoyées</a:t>
-            </a:r>
-            <a:r>
-              <a:rPr b="0" dirty="0">
-                <a:solidFill>
-                  <a:srgbClr val="64748B"/>
-                </a:solidFill>
-              </a:rPr>
-              <a:t> </a:t>
-            </a:r>
-            <a:r>
-              <a:rPr b="0" dirty="0" err="1">
-                <a:solidFill>
-                  <a:srgbClr val="64748B"/>
-                </a:solidFill>
-              </a:rPr>
-              <a:t>directement</a:t>
-            </a:r>
-            <a:r>
-              <a:rPr b="0" dirty="0">
-                <a:solidFill>
-                  <a:srgbClr val="64748B"/>
-                </a:solidFill>
-              </a:rPr>
-              <a:t> sans </a:t>
-            </a:r>
-            <a:r>
-              <a:rPr b="0" dirty="0" err="1">
-                <a:solidFill>
-                  <a:srgbClr val="64748B"/>
-                </a:solidFill>
-              </a:rPr>
-              <a:t>intermédiaire</a:t>
-            </a:r>
-            <a:r>
-              <a:rPr b="0" dirty="0">
-                <a:solidFill>
-                  <a:srgbClr val="64748B"/>
-                </a:solidFill>
-              </a:rPr>
-              <a:t>.</a:t>
-            </a:r>
-            <a:endParaRPr lang="fr-FR" b="0" dirty="0">
-              <a:solidFill>
-                <a:srgbClr val="64748B"/>
-              </a:solidFill>
-            </a:endParaRPr>
-          </a:p>
-          <a:p>
-            <a:pPr>
-              <a:spcAft>
-                <a:spcPts val="1500"/>
-              </a:spcAft>
-              <a:defRPr sz="1350">
-                <a:latin typeface="Arial"/>
-              </a:defRPr>
-            </a:pPr>
-            <a:endParaRPr lang="fr-FR" dirty="0">
-              <a:solidFill>
-                <a:srgbClr val="64748B"/>
-              </a:solidFill>
-            </a:endParaRPr>
-          </a:p>
-          <a:p>
-            <a:pPr>
-              <a:spcAft>
-                <a:spcPts val="1500"/>
-              </a:spcAft>
-              <a:defRPr sz="1350">
-                <a:latin typeface="Arial"/>
-              </a:defRPr>
-            </a:pPr>
-            <a:endParaRPr lang="fr-FR" b="0" dirty="0">
-              <a:solidFill>
-                <a:srgbClr val="64748B"/>
-              </a:solidFill>
-            </a:endParaRPr>
-          </a:p>
-          <a:p>
-            <a:pPr>
-              <a:spcAft>
-                <a:spcPts val="1500"/>
-              </a:spcAft>
-              <a:defRPr sz="1350">
-                <a:latin typeface="Arial"/>
-              </a:defRPr>
-            </a:pPr>
-            <a:endParaRPr b="0" dirty="0">
-              <a:solidFill>
-                <a:srgbClr val="64748B"/>
-              </a:solidFill>
-            </a:endParaRPr>
+              <a:t>Conservez 100% de la valeur de vos chantiers. Lors de l'inscription, une vérification administrative et de solvabilité financière est effectuée via l'API Inessence pour valoriser les vrais professionnels.</a:t>
+            </a:r>
           </a:p>
         </p:txBody>
       </p:sp>
       <p:pic>
         <p:nvPicPr>
-          <p:cNvPr id="6" name="Picture 5" descr="ca_growth.png"/>
+          <p:cNvPr id="6" name="Picture 5" descr="seo_impact.png"/>
           <p:cNvPicPr>
             <a:picLocks noChangeAspect="1"/>
           </p:cNvPicPr>
@@ -4463,7 +3761,7 @@
 </file>
 
 <file path=ppt/slides/slide3.xml><?xml version="1.0" encoding="utf-8"?>
-<p:sld xmlns:a="http://schemas.openxmlformats.org/drawingml/2006/main" xmlns:r="http://schemas.openxmlformats.org/officeDocument/2006/relationships" xmlns:p="http://schemas.openxmlformats.org/presentationml/2006/main">
+<p:sld xmlns:a="http://schemas.openxmlformats.org/drawingml/2006/main" xmlns:p="http://schemas.openxmlformats.org/presentationml/2006/main" xmlns:r="http://schemas.openxmlformats.org/officeDocument/2006/relationships">
   <p:cSld>
     <p:bg>
       <p:bgPr>
@@ -4479,14 +3777,7 @@
         <p:cNvGrpSpPr/>
         <p:nvPr/>
       </p:nvGrpSpPr>
-      <p:grpSpPr>
-        <a:xfrm>
-          <a:off x="0" y="0"/>
-          <a:ext cx="0" cy="0"/>
-          <a:chOff x="0" y="0"/>
-          <a:chExt cx="0" cy="0"/>
-        </a:xfrm>
-      </p:grpSpPr>
+      <p:grpSpPr/>
       <p:sp>
         <p:nvSpPr>
           <p:cNvPr id="2" name="TextBox 1"/>
@@ -4546,7 +3837,7 @@
           <a:lstStyle/>
           <a:p>
             <a:pPr>
-              <a:defRPr sz="2600" b="1">
+              <a:defRPr sz="2400" b="1">
                 <a:solidFill>
                   <a:srgbClr val="1F2D3D"/>
                 </a:solidFill>
@@ -4554,7 +3845,7 @@
               </a:defRPr>
             </a:pPr>
             <a:r>
-              <a:t>Le Moteur de Recherche Multi-Filtres de Gainable.fr</a:t>
+              <a:t>Le Moteur de Recherche &amp; Contact Client Direct</a:t>
             </a:r>
           </a:p>
         </p:txBody>
@@ -4601,7 +3892,6 @@
           <a:lstStyle/>
           <a:p>
             <a:pPr algn="ctr"/>
-            <a:endParaRPr/>
           </a:p>
         </p:txBody>
       </p:sp>
@@ -4614,7 +3904,7 @@
         <p:spPr>
           <a:xfrm>
             <a:off x="731520" y="1645920"/>
-            <a:ext cx="5303520" cy="3249608"/>
+            <a:ext cx="5303520" cy="4572000"/>
           </a:xfrm>
           <a:prstGeom prst="rect">
             <a:avLst/>
@@ -4629,521 +3919,95 @@
           <a:p>
             <a:pPr>
               <a:spcAft>
-                <a:spcPts val="2000"/>
+                <a:spcPts val="1500"/>
               </a:spcAft>
-              <a:defRPr sz="1600" b="1">
+              <a:defRPr b="1" sz="1500">
                 <a:solidFill>
                   <a:srgbClr val="1F2D3D"/>
                 </a:solidFill>
               </a:defRPr>
             </a:pPr>
             <a:r>
-              <a:rPr dirty="0"/>
-              <a:t>Un </a:t>
-            </a:r>
-            <a:r>
-              <a:rPr dirty="0" err="1"/>
-              <a:t>parcours</a:t>
-            </a:r>
-            <a:r>
-              <a:rPr dirty="0"/>
-              <a:t> </a:t>
-            </a:r>
-            <a:r>
-              <a:rPr dirty="0" err="1"/>
-              <a:t>utilisateur</a:t>
-            </a:r>
-            <a:r>
-              <a:rPr dirty="0"/>
-              <a:t> </a:t>
-            </a:r>
-            <a:r>
-              <a:rPr dirty="0" err="1"/>
-              <a:t>axé</a:t>
-            </a:r>
-            <a:r>
-              <a:rPr dirty="0"/>
-              <a:t> sur la pertinence technique</a:t>
+              <a:t>Un ciblage technique précis pour capter des leads qualifiés</a:t>
             </a:r>
           </a:p>
           <a:p>
             <a:pPr>
               <a:spcAft>
-                <a:spcPts val="1500"/>
+                <a:spcPts val="1200"/>
               </a:spcAft>
-              <a:defRPr sz="1350">
+              <a:defRPr sz="1250">
                 <a:latin typeface="Arial"/>
               </a:defRPr>
             </a:pPr>
             <a:r>
-              <a:rPr b="1" dirty="0">
+              <a:rPr b="1">
                 <a:solidFill>
                   <a:srgbClr val="1F2D3D"/>
                 </a:solidFill>
               </a:rPr>
-              <a:t>• </a:t>
-            </a:r>
-            <a:r>
-              <a:rPr b="1" dirty="0" err="1">
-                <a:solidFill>
-                  <a:srgbClr val="1F2D3D"/>
+              <a:t>• Filtres Techniques Précis : </a:t>
+            </a:r>
+            <a:r>
+              <a:rPr b="0">
+                <a:solidFill>
+                  <a:srgbClr val="64748B"/>
                 </a:solidFill>
               </a:rPr>
-              <a:t>Filtres</a:t>
-            </a:r>
-            <a:r>
-              <a:rPr b="1" dirty="0">
-                <a:solidFill>
-                  <a:srgbClr val="1F2D3D"/>
-                </a:solidFill>
-              </a:rPr>
-              <a:t> Techniques Précis : </a:t>
-            </a:r>
-            <a:r>
-              <a:rPr b="0" dirty="0">
-                <a:solidFill>
-                  <a:srgbClr val="64748B"/>
-                </a:solidFill>
-              </a:rPr>
-              <a:t>Les clients </a:t>
-            </a:r>
-            <a:r>
-              <a:rPr b="0" dirty="0" err="1">
-                <a:solidFill>
-                  <a:srgbClr val="64748B"/>
-                </a:solidFill>
-              </a:rPr>
-              <a:t>qualifient</a:t>
-            </a:r>
-            <a:r>
-              <a:rPr b="0" dirty="0">
-                <a:solidFill>
-                  <a:srgbClr val="64748B"/>
-                </a:solidFill>
-              </a:rPr>
-              <a:t> </a:t>
-            </a:r>
-            <a:r>
-              <a:rPr b="0" dirty="0" err="1">
-                <a:solidFill>
-                  <a:srgbClr val="64748B"/>
-                </a:solidFill>
-              </a:rPr>
-              <a:t>leur</a:t>
-            </a:r>
-            <a:r>
-              <a:rPr b="0" dirty="0">
-                <a:solidFill>
-                  <a:srgbClr val="64748B"/>
-                </a:solidFill>
-              </a:rPr>
-              <a:t> </a:t>
-            </a:r>
-            <a:r>
-              <a:rPr b="0" dirty="0" err="1">
-                <a:solidFill>
-                  <a:srgbClr val="64748B"/>
-                </a:solidFill>
-              </a:rPr>
-              <a:t>projet</a:t>
-            </a:r>
-            <a:r>
-              <a:rPr b="0" dirty="0">
-                <a:solidFill>
-                  <a:srgbClr val="64748B"/>
-                </a:solidFill>
-              </a:rPr>
-              <a:t> par </a:t>
-            </a:r>
-            <a:r>
-              <a:rPr lang="fr-FR" b="0" dirty="0" err="1">
-                <a:solidFill>
-                  <a:srgbClr val="64748B"/>
-                </a:solidFill>
-              </a:rPr>
-              <a:t>Thecnologie</a:t>
-            </a:r>
-            <a:r>
-              <a:rPr lang="fr-FR" b="0" dirty="0">
-                <a:solidFill>
-                  <a:srgbClr val="64748B"/>
-                </a:solidFill>
-              </a:rPr>
-              <a:t> ( split </a:t>
-            </a:r>
-            <a:r>
-              <a:rPr lang="fr-FR" b="0" dirty="0" err="1">
-                <a:solidFill>
-                  <a:srgbClr val="64748B"/>
-                </a:solidFill>
-              </a:rPr>
-              <a:t>casset</a:t>
-            </a:r>
-            <a:r>
-              <a:rPr lang="fr-FR" b="0" dirty="0">
-                <a:solidFill>
-                  <a:srgbClr val="64748B"/>
-                </a:solidFill>
-              </a:rPr>
-              <a:t>  gainable  VRV …)  type de  d’habitation   appartement  </a:t>
-            </a:r>
-            <a:r>
-              <a:rPr lang="fr-FR" b="0" dirty="0" err="1">
-                <a:solidFill>
-                  <a:srgbClr val="64748B"/>
-                </a:solidFill>
-              </a:rPr>
-              <a:t>meme</a:t>
-            </a:r>
-            <a:r>
-              <a:rPr lang="fr-FR" b="0" dirty="0">
-                <a:solidFill>
-                  <a:srgbClr val="64748B"/>
-                </a:solidFill>
-              </a:rPr>
-              <a:t>  pour les diagnostique  immobilier  (DPE ,amiante …) puis </a:t>
-            </a:r>
-            <a:r>
-              <a:rPr lang="fr-FR" b="0" dirty="0" err="1">
-                <a:solidFill>
-                  <a:srgbClr val="64748B"/>
-                </a:solidFill>
-              </a:rPr>
-              <a:t>region</a:t>
-            </a:r>
-            <a:r>
-              <a:rPr lang="fr-FR" b="0" dirty="0">
-                <a:solidFill>
-                  <a:srgbClr val="64748B"/>
-                </a:solidFill>
-              </a:rPr>
-              <a:t> ville pays </a:t>
-            </a:r>
-            <a:r>
-              <a:rPr b="0" dirty="0">
-                <a:solidFill>
-                  <a:srgbClr val="64748B"/>
-                </a:solidFill>
-              </a:rPr>
-              <a:t>.</a:t>
+              <a:t>Les clients qualifient leur projet par technologie (split, cassette, gainable, VRV...), type d'habitation (maison, appartement...) et par diagnostics (DPE, amiante...), puis filtrent par ville.</a:t>
             </a:r>
           </a:p>
           <a:p>
             <a:pPr>
               <a:spcAft>
-                <a:spcPts val="1500"/>
+                <a:spcPts val="1200"/>
               </a:spcAft>
-              <a:defRPr sz="1350">
+              <a:defRPr sz="1250">
                 <a:latin typeface="Arial"/>
               </a:defRPr>
             </a:pPr>
             <a:r>
-              <a:rPr b="1" dirty="0">
+              <a:rPr b="1">
                 <a:solidFill>
                   <a:srgbClr val="1F2D3D"/>
                 </a:solidFill>
               </a:rPr>
-              <a:t>• </a:t>
-            </a:r>
-            <a:r>
-              <a:rPr b="0" dirty="0">
+              <a:t>• Contact à chaud par téléphone : </a:t>
+            </a:r>
+            <a:r>
+              <a:rPr b="0">
                 <a:solidFill>
                   <a:srgbClr val="64748B"/>
                 </a:solidFill>
               </a:rPr>
-              <a:t>Mise </a:t>
-            </a:r>
-            <a:r>
-              <a:rPr b="0" dirty="0" err="1">
-                <a:solidFill>
-                  <a:srgbClr val="64748B"/>
-                </a:solidFill>
-              </a:rPr>
-              <a:t>en</a:t>
-            </a:r>
-            <a:r>
-              <a:rPr b="0" dirty="0">
-                <a:solidFill>
-                  <a:srgbClr val="64748B"/>
-                </a:solidFill>
-              </a:rPr>
-              <a:t> avant des experts CVC, </a:t>
-            </a:r>
-            <a:r>
-              <a:rPr b="0" dirty="0" err="1">
-                <a:solidFill>
-                  <a:srgbClr val="64748B"/>
-                </a:solidFill>
-              </a:rPr>
-              <a:t>mais</a:t>
-            </a:r>
-            <a:r>
-              <a:rPr b="0" dirty="0">
-                <a:solidFill>
-                  <a:srgbClr val="64748B"/>
-                </a:solidFill>
-              </a:rPr>
-              <a:t> </a:t>
-            </a:r>
-            <a:r>
-              <a:rPr b="0" dirty="0" err="1">
-                <a:solidFill>
-                  <a:srgbClr val="64748B"/>
-                </a:solidFill>
-              </a:rPr>
-              <a:t>également</a:t>
-            </a:r>
-            <a:r>
-              <a:rPr b="0" dirty="0">
-                <a:solidFill>
-                  <a:srgbClr val="64748B"/>
-                </a:solidFill>
-              </a:rPr>
-              <a:t> des </a:t>
-            </a:r>
-            <a:r>
-              <a:rPr b="0" dirty="0" err="1">
-                <a:solidFill>
-                  <a:srgbClr val="64748B"/>
-                </a:solidFill>
-              </a:rPr>
-              <a:t>bureaux</a:t>
-            </a:r>
-            <a:r>
-              <a:rPr b="0" dirty="0">
-                <a:solidFill>
-                  <a:srgbClr val="64748B"/>
-                </a:solidFill>
-              </a:rPr>
-              <a:t> </a:t>
-            </a:r>
-            <a:r>
-              <a:rPr b="0" dirty="0" err="1">
-                <a:solidFill>
-                  <a:srgbClr val="64748B"/>
-                </a:solidFill>
-              </a:rPr>
-              <a:t>d'études</a:t>
-            </a:r>
-            <a:r>
-              <a:rPr b="0" dirty="0">
-                <a:solidFill>
-                  <a:srgbClr val="64748B"/>
-                </a:solidFill>
-              </a:rPr>
-              <a:t> </a:t>
-            </a:r>
-            <a:r>
-              <a:rPr b="0" dirty="0" err="1">
-                <a:solidFill>
-                  <a:srgbClr val="64748B"/>
-                </a:solidFill>
-              </a:rPr>
-              <a:t>thermiques</a:t>
-            </a:r>
-            <a:r>
-              <a:rPr b="0" dirty="0">
-                <a:solidFill>
-                  <a:srgbClr val="64748B"/>
-                </a:solidFill>
-              </a:rPr>
-              <a:t> (RE2020) et </a:t>
-            </a:r>
-            <a:r>
-              <a:rPr b="0" dirty="0" err="1">
-                <a:solidFill>
-                  <a:srgbClr val="64748B"/>
-                </a:solidFill>
-              </a:rPr>
-              <a:t>diagnostiqueurs</a:t>
-            </a:r>
-            <a:r>
-              <a:rPr b="0" dirty="0">
-                <a:solidFill>
-                  <a:srgbClr val="64748B"/>
-                </a:solidFill>
-              </a:rPr>
-              <a:t> (DPE/</a:t>
-            </a:r>
-            <a:r>
-              <a:rPr b="0" dirty="0" err="1">
-                <a:solidFill>
-                  <a:srgbClr val="64748B"/>
-                </a:solidFill>
-              </a:rPr>
-              <a:t>Amiante</a:t>
-            </a:r>
-            <a:r>
-              <a:rPr b="0" dirty="0">
-                <a:solidFill>
-                  <a:srgbClr val="64748B"/>
-                </a:solidFill>
-              </a:rPr>
-              <a:t>).</a:t>
-            </a:r>
-            <a:endParaRPr lang="fr-FR" b="0" dirty="0">
-              <a:solidFill>
-                <a:srgbClr val="64748B"/>
-              </a:solidFill>
-            </a:endParaRPr>
+              <a:t>Permettez aux clients d'accéder directement à vos coordonnées téléphoniques sur votre fiche pour un contact immédiat. Possibilité également de faire des demandes multiples.</a:t>
+            </a:r>
           </a:p>
           <a:p>
             <a:pPr>
               <a:spcAft>
-                <a:spcPts val="1500"/>
+                <a:spcPts val="1200"/>
               </a:spcAft>
-              <a:defRPr sz="1350">
+              <a:defRPr sz="1250">
                 <a:latin typeface="Arial"/>
               </a:defRPr>
             </a:pPr>
             <a:r>
-              <a:rPr lang="fr-FR" dirty="0">
+              <a:rPr b="1">
+                <a:solidFill>
+                  <a:srgbClr val="1F2D3D"/>
+                </a:solidFill>
+              </a:rPr>
+              <a:t>• Label Qualité Certifié Expert Gainable : </a:t>
+            </a:r>
+            <a:r>
+              <a:rPr b="0">
                 <a:solidFill>
                   <a:srgbClr val="64748B"/>
                 </a:solidFill>
               </a:rPr>
-              <a:t>Pense a mettre  aussi la </a:t>
-            </a:r>
-            <a:r>
-              <a:rPr lang="fr-FR" dirty="0" err="1">
-                <a:solidFill>
-                  <a:srgbClr val="64748B"/>
-                </a:solidFill>
-              </a:rPr>
-              <a:t>possiblite</a:t>
-            </a:r>
-            <a:r>
-              <a:rPr lang="fr-FR" dirty="0">
-                <a:solidFill>
-                  <a:srgbClr val="64748B"/>
-                </a:solidFill>
-              </a:rPr>
-              <a:t> que le client puisse avoir le </a:t>
-            </a:r>
-            <a:r>
-              <a:rPr lang="fr-FR" dirty="0" err="1">
-                <a:solidFill>
-                  <a:srgbClr val="64748B"/>
-                </a:solidFill>
-              </a:rPr>
-              <a:t>numeros</a:t>
-            </a:r>
-            <a:r>
-              <a:rPr lang="fr-FR" dirty="0">
-                <a:solidFill>
-                  <a:srgbClr val="64748B"/>
-                </a:solidFill>
-              </a:rPr>
-              <a:t> et les information </a:t>
-            </a:r>
-            <a:r>
-              <a:rPr lang="fr-FR" dirty="0" err="1">
-                <a:solidFill>
-                  <a:srgbClr val="64748B"/>
-                </a:solidFill>
-              </a:rPr>
-              <a:t>telephon</a:t>
-            </a:r>
-            <a:r>
-              <a:rPr lang="fr-FR" dirty="0">
-                <a:solidFill>
-                  <a:srgbClr val="64748B"/>
-                </a:solidFill>
-              </a:rPr>
-              <a:t> pour contacter a chaud et </a:t>
-            </a:r>
-            <a:r>
-              <a:rPr lang="fr-FR" dirty="0" err="1">
-                <a:solidFill>
-                  <a:srgbClr val="64748B"/>
-                </a:solidFill>
-              </a:rPr>
-              <a:t>meme</a:t>
-            </a:r>
-            <a:r>
-              <a:rPr lang="fr-FR" dirty="0">
-                <a:solidFill>
-                  <a:srgbClr val="64748B"/>
-                </a:solidFill>
-              </a:rPr>
-              <a:t> </a:t>
-            </a:r>
-            <a:r>
-              <a:rPr lang="fr-FR" dirty="0" err="1">
-                <a:solidFill>
-                  <a:srgbClr val="64748B"/>
-                </a:solidFill>
-              </a:rPr>
-              <a:t>fair</a:t>
-            </a:r>
-            <a:r>
-              <a:rPr lang="fr-FR" dirty="0">
-                <a:solidFill>
-                  <a:srgbClr val="64748B"/>
-                </a:solidFill>
-              </a:rPr>
-              <a:t> des demande </a:t>
-            </a:r>
-            <a:r>
-              <a:rPr lang="fr-FR" dirty="0" err="1">
-                <a:solidFill>
-                  <a:srgbClr val="64748B"/>
-                </a:solidFill>
-              </a:rPr>
-              <a:t>multipke</a:t>
-            </a:r>
-            <a:r>
-              <a:rPr lang="fr-FR" dirty="0">
-                <a:solidFill>
-                  <a:srgbClr val="64748B"/>
-                </a:solidFill>
-              </a:rPr>
-              <a:t>  </a:t>
-            </a:r>
-            <a:endParaRPr lang="fr-FR" b="0" dirty="0">
-              <a:solidFill>
-                <a:srgbClr val="64748B"/>
-              </a:solidFill>
-            </a:endParaRPr>
-          </a:p>
-          <a:p>
-            <a:pPr>
-              <a:spcAft>
-                <a:spcPts val="1500"/>
-              </a:spcAft>
-              <a:defRPr sz="1350">
-                <a:latin typeface="Arial"/>
-              </a:defRPr>
-            </a:pPr>
-            <a:r>
-              <a:rPr lang="fr-FR" dirty="0">
-                <a:solidFill>
-                  <a:srgbClr val="64748B"/>
-                </a:solidFill>
-              </a:rPr>
-              <a:t>Badge de certification Label </a:t>
-            </a:r>
-            <a:r>
-              <a:rPr lang="fr-FR" dirty="0" err="1">
-                <a:solidFill>
-                  <a:srgbClr val="64748B"/>
-                </a:solidFill>
-              </a:rPr>
-              <a:t>qualite</a:t>
-            </a:r>
-            <a:r>
-              <a:rPr lang="fr-FR" dirty="0">
-                <a:solidFill>
-                  <a:srgbClr val="64748B"/>
-                </a:solidFill>
-              </a:rPr>
-              <a:t> certifier Expert Gainable </a:t>
-            </a:r>
-            <a:endParaRPr b="0" dirty="0">
-              <a:solidFill>
-                <a:srgbClr val="64748B"/>
-              </a:solidFill>
-            </a:endParaRPr>
+              <a:t>Chaque professionnel sérieux est valorisé par notre badge de certification officiel, renforçant immédiatement la confiance avec le client final.</a:t>
+            </a:r>
           </a:p>
         </p:txBody>
       </p:sp>
@@ -5163,8 +4027,8 @@
         </p:blipFill>
         <p:spPr>
           <a:xfrm>
-            <a:off x="731520" y="4114800"/>
-            <a:ext cx="2926080" cy="2194560"/>
+            <a:off x="731520" y="4206240"/>
+            <a:ext cx="2926080" cy="2103120"/>
           </a:xfrm>
           <a:prstGeom prst="rect">
             <a:avLst/>
@@ -5173,13 +4037,7 @@
       </p:pic>
       <p:pic>
         <p:nvPicPr>
-          <p:cNvPr id="9" name="Image 8">
-            <a:extLst>
-              <a:ext uri="{FF2B5EF4-FFF2-40B4-BE49-F238E27FC236}">
-                <a16:creationId xmlns:a16="http://schemas.microsoft.com/office/drawing/2014/main" id="{1882F623-D920-2D34-5925-A8D195AF1BF1}"/>
-              </a:ext>
-            </a:extLst>
-          </p:cNvPr>
+          <p:cNvPr id="7" name="Picture 6" descr="user_scr_search.png"/>
           <p:cNvPicPr>
             <a:picLocks noChangeAspect="1"/>
           </p:cNvPicPr>
@@ -5193,8 +4051,8 @@
         </p:blipFill>
         <p:spPr>
           <a:xfrm>
-            <a:off x="6035040" y="1773158"/>
-            <a:ext cx="6001319" cy="4106434"/>
+            <a:off x="6400800" y="1645920"/>
+            <a:ext cx="5029200" cy="4389120"/>
           </a:xfrm>
           <a:prstGeom prst="rect">
             <a:avLst/>
@@ -5210,7 +4068,7 @@
 </file>
 
 <file path=ppt/slides/slide4.xml><?xml version="1.0" encoding="utf-8"?>
-<p:sld xmlns:a="http://schemas.openxmlformats.org/drawingml/2006/main" xmlns:r="http://schemas.openxmlformats.org/officeDocument/2006/relationships" xmlns:p="http://schemas.openxmlformats.org/presentationml/2006/main">
+<p:sld xmlns:a="http://schemas.openxmlformats.org/drawingml/2006/main" xmlns:p="http://schemas.openxmlformats.org/presentationml/2006/main" xmlns:r="http://schemas.openxmlformats.org/officeDocument/2006/relationships">
   <p:cSld>
     <p:bg>
       <p:bgPr>
@@ -5226,14 +4084,7 @@
         <p:cNvGrpSpPr/>
         <p:nvPr/>
       </p:nvGrpSpPr>
-      <p:grpSpPr>
-        <a:xfrm>
-          <a:off x="0" y="0"/>
-          <a:ext cx="0" cy="0"/>
-          <a:chOff x="0" y="0"/>
-          <a:chExt cx="0" cy="0"/>
-        </a:xfrm>
-      </p:grpSpPr>
+      <p:grpSpPr/>
       <p:sp>
         <p:nvSpPr>
           <p:cNvPr id="2" name="TextBox 1"/>
@@ -5293,7 +4144,7 @@
           <a:lstStyle/>
           <a:p>
             <a:pPr>
-              <a:defRPr sz="2600" b="1">
+              <a:defRPr sz="2400" b="1">
                 <a:solidFill>
                   <a:srgbClr val="1F2D3D"/>
                 </a:solidFill>
@@ -5348,7 +4199,6 @@
           <a:lstStyle/>
           <a:p>
             <a:pPr algn="ctr"/>
-            <a:endParaRPr/>
           </a:p>
         </p:txBody>
       </p:sp>
@@ -5378,7 +4228,7 @@
               <a:spcAft>
                 <a:spcPts val="1500"/>
               </a:spcAft>
-              <a:defRPr sz="1600" b="1">
+              <a:defRPr b="1" sz="1500">
                 <a:solidFill>
                   <a:srgbClr val="1F2D3D"/>
                 </a:solidFill>
@@ -5393,7 +4243,7 @@
               <a:spcAft>
                 <a:spcPts val="1200"/>
               </a:spcAft>
-              <a:defRPr sz="1350">
+              <a:defRPr sz="1250">
                 <a:latin typeface="Arial"/>
               </a:defRPr>
             </a:pPr>
@@ -5419,7 +4269,7 @@
               <a:spcAft>
                 <a:spcPts val="1200"/>
               </a:spcAft>
-              <a:defRPr sz="1350">
+              <a:defRPr sz="1250">
                 <a:latin typeface="Arial"/>
               </a:defRPr>
             </a:pPr>
@@ -5445,7 +4295,7 @@
               <a:spcAft>
                 <a:spcPts val="1200"/>
               </a:spcAft>
-              <a:defRPr sz="1350">
+              <a:defRPr sz="1250">
                 <a:latin typeface="Arial"/>
               </a:defRPr>
             </a:pPr>
@@ -5484,8 +4334,8 @@
         </p:blipFill>
         <p:spPr>
           <a:xfrm>
-            <a:off x="731520" y="4114800"/>
-            <a:ext cx="2926080" cy="2194560"/>
+            <a:off x="731520" y="4206240"/>
+            <a:ext cx="2926080" cy="2103120"/>
           </a:xfrm>
           <a:prstGeom prst="rect">
             <a:avLst/>
@@ -5494,13 +4344,7 @@
       </p:pic>
       <p:pic>
         <p:nvPicPr>
-          <p:cNvPr id="8" name="Image 7">
-            <a:extLst>
-              <a:ext uri="{FF2B5EF4-FFF2-40B4-BE49-F238E27FC236}">
-                <a16:creationId xmlns:a16="http://schemas.microsoft.com/office/drawing/2014/main" id="{744E2FDF-68F9-20FB-DAB6-2D1A36966C92}"/>
-              </a:ext>
-            </a:extLst>
-          </p:cNvPr>
+          <p:cNvPr id="7" name="Picture 6" descr="user_scr_profile.png"/>
           <p:cNvPicPr>
             <a:picLocks noChangeAspect="1"/>
           </p:cNvPicPr>
@@ -5514,8 +4358,8 @@
         </p:blipFill>
         <p:spPr>
           <a:xfrm>
-            <a:off x="6975148" y="1645920"/>
-            <a:ext cx="4967782" cy="4617720"/>
+            <a:off x="6400800" y="1645920"/>
+            <a:ext cx="5029200" cy="4389120"/>
           </a:xfrm>
           <a:prstGeom prst="rect">
             <a:avLst/>
@@ -5524,13 +4368,7 @@
       </p:pic>
       <p:pic>
         <p:nvPicPr>
-          <p:cNvPr id="10" name="Image 9">
-            <a:extLst>
-              <a:ext uri="{FF2B5EF4-FFF2-40B4-BE49-F238E27FC236}">
-                <a16:creationId xmlns:a16="http://schemas.microsoft.com/office/drawing/2014/main" id="{8F86CCDE-9F73-FF58-D704-206626EBF8C8}"/>
-              </a:ext>
-            </a:extLst>
-          </p:cNvPr>
+          <p:cNvPr id="8" name="Picture 7" descr="user_scr_profile_mobile.png"/>
           <p:cNvPicPr>
             <a:picLocks noChangeAspect="1"/>
           </p:cNvPicPr>
@@ -5543,9 +4381,9 @@
           </a:stretch>
         </p:blipFill>
         <p:spPr>
-          <a:xfrm rot="1053672">
-            <a:off x="5927037" y="3707950"/>
-            <a:ext cx="1594361" cy="2978938"/>
+          <a:xfrm>
+            <a:off x="9326880" y="2011680"/>
+            <a:ext cx="2286000" cy="4023360"/>
           </a:xfrm>
           <a:prstGeom prst="rect">
             <a:avLst/>
@@ -5561,7 +4399,7 @@
 </file>
 
 <file path=ppt/slides/slide5.xml><?xml version="1.0" encoding="utf-8"?>
-<p:sld xmlns:a="http://schemas.openxmlformats.org/drawingml/2006/main" xmlns:r="http://schemas.openxmlformats.org/officeDocument/2006/relationships" xmlns:p="http://schemas.openxmlformats.org/presentationml/2006/main">
+<p:sld xmlns:a="http://schemas.openxmlformats.org/drawingml/2006/main" xmlns:p="http://schemas.openxmlformats.org/presentationml/2006/main" xmlns:r="http://schemas.openxmlformats.org/officeDocument/2006/relationships">
   <p:cSld>
     <p:bg>
       <p:bgPr>
@@ -5577,14 +4415,7 @@
         <p:cNvGrpSpPr/>
         <p:nvPr/>
       </p:nvGrpSpPr>
-      <p:grpSpPr>
-        <a:xfrm>
-          <a:off x="0" y="0"/>
-          <a:ext cx="0" cy="0"/>
-          <a:chOff x="0" y="0"/>
-          <a:chExt cx="0" cy="0"/>
-        </a:xfrm>
-      </p:grpSpPr>
+      <p:grpSpPr/>
       <p:sp>
         <p:nvSpPr>
           <p:cNvPr id="2" name="TextBox 1"/>
@@ -5644,7 +4475,7 @@
           <a:lstStyle/>
           <a:p>
             <a:pPr>
-              <a:defRPr sz="2600" b="1">
+              <a:defRPr sz="2400" b="1">
                 <a:solidFill>
                   <a:srgbClr val="1F2D3D"/>
                 </a:solidFill>
@@ -5699,7 +4530,6 @@
           <a:lstStyle/>
           <a:p>
             <a:pPr algn="ctr"/>
-            <a:endParaRPr/>
           </a:p>
         </p:txBody>
       </p:sp>
@@ -5712,7 +4542,7 @@
         <p:spPr>
           <a:xfrm>
             <a:off x="731520" y="1645920"/>
-            <a:ext cx="5029200" cy="3539430"/>
+            <a:ext cx="5029200" cy="4572000"/>
           </a:xfrm>
           <a:prstGeom prst="rect">
             <a:avLst/>
@@ -5729,250 +4559,40 @@
               <a:spcAft>
                 <a:spcPts val="1500"/>
               </a:spcAft>
-              <a:defRPr sz="1600" b="1">
+              <a:defRPr b="1" sz="1500">
                 <a:solidFill>
                   <a:srgbClr val="1F2D3D"/>
                 </a:solidFill>
               </a:defRPr>
             </a:pPr>
             <a:r>
-              <a:rPr dirty="0" err="1"/>
-              <a:t>Associez</a:t>
-            </a:r>
-            <a:r>
-              <a:rPr dirty="0"/>
-              <a:t> </a:t>
-            </a:r>
-            <a:r>
-              <a:rPr dirty="0" err="1"/>
-              <a:t>votre</a:t>
-            </a:r>
-            <a:r>
-              <a:rPr dirty="0"/>
-              <a:t> expertise à des </a:t>
-            </a:r>
-            <a:r>
-              <a:rPr dirty="0" err="1"/>
-              <a:t>requêtes</a:t>
-            </a:r>
-            <a:r>
-              <a:rPr dirty="0"/>
-              <a:t> </a:t>
-            </a:r>
-            <a:r>
-              <a:rPr dirty="0" err="1"/>
-              <a:t>géolocalisées</a:t>
-            </a:r>
-            <a:endParaRPr dirty="0"/>
+              <a:t>Associez votre expertise à des requêtes géolocalisées</a:t>
+            </a:r>
           </a:p>
           <a:p>
             <a:pPr>
               <a:spcAft>
                 <a:spcPts val="1200"/>
               </a:spcAft>
-              <a:defRPr sz="1350">
+              <a:defRPr sz="1250">
                 <a:latin typeface="Arial"/>
               </a:defRPr>
             </a:pPr>
             <a:r>
-              <a:rPr b="1" dirty="0">
+              <a:rPr b="1">
                 <a:solidFill>
                   <a:srgbClr val="1F2D3D"/>
                 </a:solidFill>
               </a:rPr>
-              <a:t>• </a:t>
-            </a:r>
-            <a:r>
-              <a:rPr b="1" dirty="0" err="1">
-                <a:solidFill>
-                  <a:srgbClr val="1F2D3D"/>
+              <a:t>• Référencement local ultra-ciblé : </a:t>
+            </a:r>
+            <a:r>
+              <a:rPr b="0">
+                <a:solidFill>
+                  <a:srgbClr val="64748B"/>
                 </a:solidFill>
               </a:rPr>
-              <a:t>Référencement</a:t>
-            </a:r>
-            <a:r>
-              <a:rPr b="1" dirty="0">
-                <a:solidFill>
-                  <a:srgbClr val="1F2D3D"/>
-                </a:solidFill>
-              </a:rPr>
-              <a:t> local ultra-</a:t>
-            </a:r>
-            <a:r>
-              <a:rPr b="1" dirty="0" err="1">
-                <a:solidFill>
-                  <a:srgbClr val="1F2D3D"/>
-                </a:solidFill>
-              </a:rPr>
-              <a:t>ciblé</a:t>
-            </a:r>
-            <a:r>
-              <a:rPr b="1" dirty="0">
-                <a:solidFill>
-                  <a:srgbClr val="1F2D3D"/>
-                </a:solidFill>
-              </a:rPr>
-              <a:t> : </a:t>
-            </a:r>
-            <a:r>
-              <a:rPr b="0" dirty="0" err="1">
-                <a:solidFill>
-                  <a:srgbClr val="64748B"/>
-                </a:solidFill>
-              </a:rPr>
-              <a:t>Rédigez</a:t>
-            </a:r>
-            <a:r>
-              <a:rPr b="0" dirty="0">
-                <a:solidFill>
-                  <a:srgbClr val="64748B"/>
-                </a:solidFill>
-              </a:rPr>
-              <a:t> des articles </a:t>
-            </a:r>
-            <a:r>
-              <a:rPr b="0" dirty="0" err="1">
-                <a:solidFill>
-                  <a:srgbClr val="64748B"/>
-                </a:solidFill>
-              </a:rPr>
-              <a:t>géolocalisés</a:t>
-            </a:r>
-            <a:r>
-              <a:rPr b="0" dirty="0">
-                <a:solidFill>
-                  <a:srgbClr val="64748B"/>
-                </a:solidFill>
-              </a:rPr>
-              <a:t> (ex: 'Pose de </a:t>
-            </a:r>
-            <a:r>
-              <a:rPr b="0" dirty="0" err="1">
-                <a:solidFill>
-                  <a:srgbClr val="64748B"/>
-                </a:solidFill>
-              </a:rPr>
-              <a:t>climatiseur</a:t>
-            </a:r>
-            <a:r>
-              <a:rPr b="0" dirty="0">
-                <a:solidFill>
-                  <a:srgbClr val="64748B"/>
-                </a:solidFill>
-              </a:rPr>
-              <a:t> gainable à </a:t>
-            </a:r>
-            <a:r>
-              <a:rPr b="0" dirty="0" err="1">
-                <a:solidFill>
-                  <a:srgbClr val="64748B"/>
-                </a:solidFill>
-              </a:rPr>
-              <a:t>Miramas</a:t>
-            </a:r>
-            <a:r>
-              <a:rPr b="0" dirty="0">
-                <a:solidFill>
-                  <a:srgbClr val="64748B"/>
-                </a:solidFill>
-              </a:rPr>
-              <a:t>') pour </a:t>
-            </a:r>
-            <a:r>
-              <a:rPr b="0" dirty="0" err="1">
-                <a:solidFill>
-                  <a:srgbClr val="64748B"/>
-                </a:solidFill>
-              </a:rPr>
-              <a:t>apparaître</a:t>
-            </a:r>
-            <a:r>
-              <a:rPr b="0" dirty="0">
-                <a:solidFill>
-                  <a:srgbClr val="64748B"/>
-                </a:solidFill>
-              </a:rPr>
-              <a:t> </a:t>
-            </a:r>
-            <a:r>
-              <a:rPr b="0" dirty="0" err="1">
-                <a:solidFill>
-                  <a:srgbClr val="64748B"/>
-                </a:solidFill>
-              </a:rPr>
-              <a:t>directement</a:t>
-            </a:r>
-            <a:r>
-              <a:rPr b="0" dirty="0">
-                <a:solidFill>
-                  <a:srgbClr val="64748B"/>
-                </a:solidFill>
-              </a:rPr>
-              <a:t> </a:t>
-            </a:r>
-            <a:r>
-              <a:rPr b="0" dirty="0" err="1">
-                <a:solidFill>
-                  <a:srgbClr val="64748B"/>
-                </a:solidFill>
-              </a:rPr>
-              <a:t>devant</a:t>
-            </a:r>
-            <a:r>
-              <a:rPr b="0" dirty="0">
-                <a:solidFill>
-                  <a:srgbClr val="64748B"/>
-                </a:solidFill>
-              </a:rPr>
-              <a:t> les </a:t>
-            </a:r>
-            <a:r>
-              <a:rPr b="0" dirty="0" err="1">
-                <a:solidFill>
-                  <a:srgbClr val="64748B"/>
-                </a:solidFill>
-              </a:rPr>
-              <a:t>internautes</a:t>
-            </a:r>
-            <a:r>
-              <a:rPr b="0" dirty="0">
-                <a:solidFill>
-                  <a:srgbClr val="64748B"/>
-                </a:solidFill>
-              </a:rPr>
-              <a:t> de </a:t>
-            </a:r>
-            <a:r>
-              <a:rPr b="0" dirty="0" err="1">
-                <a:solidFill>
-                  <a:srgbClr val="64748B"/>
-                </a:solidFill>
-              </a:rPr>
-              <a:t>votre</a:t>
-            </a:r>
-            <a:r>
-              <a:rPr b="0" dirty="0">
-                <a:solidFill>
-                  <a:srgbClr val="64748B"/>
-                </a:solidFill>
-              </a:rPr>
-              <a:t> </a:t>
-            </a:r>
-            <a:r>
-              <a:rPr b="0" dirty="0" err="1">
-                <a:solidFill>
-                  <a:srgbClr val="64748B"/>
-                </a:solidFill>
-              </a:rPr>
-              <a:t>secteur</a:t>
-            </a:r>
-            <a:r>
-              <a:rPr b="0" dirty="0">
-                <a:solidFill>
-                  <a:srgbClr val="64748B"/>
-                </a:solidFill>
-              </a:rPr>
-              <a:t>.</a:t>
+              <a:t>Rédigez des articles géolocalisés (ex: 'Pose de climatiseur gainable à Miramas') pour apparaître directement devant les internautes de votre secteur.</a:t>
             </a:r>
           </a:p>
           <a:p>
@@ -5980,225 +4600,25 @@
               <a:spcAft>
                 <a:spcPts val="1200"/>
               </a:spcAft>
-              <a:defRPr sz="1350">
+              <a:defRPr sz="1250">
                 <a:latin typeface="Arial"/>
               </a:defRPr>
             </a:pPr>
             <a:r>
-              <a:rPr b="1" dirty="0">
+              <a:rPr b="1">
                 <a:solidFill>
                   <a:srgbClr val="1F2D3D"/>
                 </a:solidFill>
               </a:rPr>
-              <a:t>• Quota </a:t>
-            </a:r>
-            <a:r>
-              <a:rPr b="1" dirty="0" err="1">
-                <a:solidFill>
-                  <a:srgbClr val="1F2D3D"/>
+              <a:t>• Quota Mensuel &amp; Agent IA Expert SEO : </a:t>
+            </a:r>
+            <a:r>
+              <a:rPr b="0">
+                <a:solidFill>
+                  <a:srgbClr val="64748B"/>
                 </a:solidFill>
               </a:rPr>
-              <a:t>Mensuel</a:t>
-            </a:r>
-            <a:r>
-              <a:rPr b="1" dirty="0">
-                <a:solidFill>
-                  <a:srgbClr val="1F2D3D"/>
-                </a:solidFill>
-              </a:rPr>
-              <a:t> </a:t>
-            </a:r>
-            <a:r>
-              <a:rPr b="1" dirty="0" err="1">
-                <a:solidFill>
-                  <a:srgbClr val="1F2D3D"/>
-                </a:solidFill>
-              </a:rPr>
-              <a:t>Inclus</a:t>
-            </a:r>
-            <a:r>
-              <a:rPr b="1" dirty="0">
-                <a:solidFill>
-                  <a:srgbClr val="1F2D3D"/>
-                </a:solidFill>
-              </a:rPr>
-              <a:t> (10 articles/</a:t>
-            </a:r>
-            <a:r>
-              <a:rPr b="1" dirty="0" err="1">
-                <a:solidFill>
-                  <a:srgbClr val="1F2D3D"/>
-                </a:solidFill>
-              </a:rPr>
-              <a:t>mois</a:t>
-            </a:r>
-            <a:r>
-              <a:rPr b="1" dirty="0">
-                <a:solidFill>
-                  <a:srgbClr val="1F2D3D"/>
-                </a:solidFill>
-              </a:rPr>
-              <a:t>) </a:t>
-            </a:r>
-            <a:r>
-              <a:rPr lang="fr-FR" b="1" dirty="0">
-                <a:solidFill>
-                  <a:srgbClr val="1F2D3D"/>
-                </a:solidFill>
-              </a:rPr>
-              <a:t>Agent IA Expert SEO orienter Technicien en climatisation  </a:t>
-            </a:r>
-            <a:r>
-              <a:rPr b="1" dirty="0">
-                <a:solidFill>
-                  <a:srgbClr val="1F2D3D"/>
-                </a:solidFill>
-              </a:rPr>
-              <a:t>: </a:t>
-            </a:r>
-            <a:r>
-              <a:rPr b="0" dirty="0" err="1">
-                <a:solidFill>
-                  <a:srgbClr val="64748B"/>
-                </a:solidFill>
-              </a:rPr>
-              <a:t>Chaque</a:t>
-            </a:r>
-            <a:r>
-              <a:rPr b="0" dirty="0">
-                <a:solidFill>
-                  <a:srgbClr val="64748B"/>
-                </a:solidFill>
-              </a:rPr>
-              <a:t> expert dispose d'un droit de publication </a:t>
-            </a:r>
-            <a:r>
-              <a:rPr b="0" dirty="0" err="1">
-                <a:solidFill>
-                  <a:srgbClr val="64748B"/>
-                </a:solidFill>
-              </a:rPr>
-              <a:t>mensuel</a:t>
-            </a:r>
-            <a:r>
-              <a:rPr b="0" dirty="0">
-                <a:solidFill>
-                  <a:srgbClr val="64748B"/>
-                </a:solidFill>
-              </a:rPr>
-              <a:t> de 10 articles. </a:t>
-            </a:r>
-            <a:r>
-              <a:rPr b="0" dirty="0" err="1">
-                <a:solidFill>
-                  <a:srgbClr val="64748B"/>
-                </a:solidFill>
-              </a:rPr>
-              <a:t>C'est</a:t>
-            </a:r>
-            <a:r>
-              <a:rPr b="0" dirty="0">
-                <a:solidFill>
-                  <a:srgbClr val="64748B"/>
-                </a:solidFill>
-              </a:rPr>
-              <a:t> </a:t>
-            </a:r>
-            <a:r>
-              <a:rPr b="0" dirty="0" err="1">
-                <a:solidFill>
-                  <a:srgbClr val="64748B"/>
-                </a:solidFill>
-              </a:rPr>
-              <a:t>l'équivalent</a:t>
-            </a:r>
-            <a:r>
-              <a:rPr b="0" dirty="0">
-                <a:solidFill>
-                  <a:srgbClr val="64748B"/>
-                </a:solidFill>
-              </a:rPr>
-              <a:t> de </a:t>
-            </a:r>
-            <a:r>
-              <a:rPr b="0" dirty="0" err="1">
-                <a:solidFill>
-                  <a:srgbClr val="64748B"/>
-                </a:solidFill>
-              </a:rPr>
-              <a:t>centaines</a:t>
-            </a:r>
-            <a:r>
-              <a:rPr b="0" dirty="0">
-                <a:solidFill>
-                  <a:srgbClr val="64748B"/>
-                </a:solidFill>
-              </a:rPr>
-              <a:t> de prospects </a:t>
-            </a:r>
-            <a:r>
-              <a:rPr b="0" dirty="0" err="1">
-                <a:solidFill>
-                  <a:srgbClr val="64748B"/>
-                </a:solidFill>
-              </a:rPr>
-              <a:t>touchés</a:t>
-            </a:r>
-            <a:r>
-              <a:rPr b="0" dirty="0">
-                <a:solidFill>
-                  <a:srgbClr val="64748B"/>
-                </a:solidFill>
-              </a:rPr>
-              <a:t> </a:t>
-            </a:r>
-            <a:r>
-              <a:rPr b="0" dirty="0" err="1">
-                <a:solidFill>
-                  <a:srgbClr val="64748B"/>
-                </a:solidFill>
-              </a:rPr>
-              <a:t>gratuitement</a:t>
-            </a:r>
-            <a:r>
-              <a:rPr b="0" dirty="0">
-                <a:solidFill>
-                  <a:srgbClr val="64748B"/>
-                </a:solidFill>
-              </a:rPr>
-              <a:t> </a:t>
-            </a:r>
-            <a:r>
-              <a:rPr b="0" dirty="0" err="1">
-                <a:solidFill>
-                  <a:srgbClr val="64748B"/>
-                </a:solidFill>
-              </a:rPr>
-              <a:t>chaque</a:t>
-            </a:r>
-            <a:r>
-              <a:rPr b="0" dirty="0">
-                <a:solidFill>
-                  <a:srgbClr val="64748B"/>
-                </a:solidFill>
-              </a:rPr>
-              <a:t> </a:t>
-            </a:r>
-            <a:r>
-              <a:rPr b="0" dirty="0" err="1">
-                <a:solidFill>
-                  <a:srgbClr val="64748B"/>
-                </a:solidFill>
-              </a:rPr>
-              <a:t>mois</a:t>
-            </a:r>
-            <a:r>
-              <a:rPr b="0" dirty="0">
-                <a:solidFill>
-                  <a:srgbClr val="64748B"/>
-                </a:solidFill>
-              </a:rPr>
-              <a:t>.</a:t>
+              <a:t>Chaque expert dispose d'un quota de 10 articles mensuels. Notre Assistant IA Expert SEO, orienté technique et génie climatique, vous aide à générer vos contenus de haute qualité en quelques minutes.</a:t>
             </a:r>
           </a:p>
           <a:p>
@@ -6206,222 +4626,32 @@
               <a:spcAft>
                 <a:spcPts val="1200"/>
               </a:spcAft>
-              <a:defRPr sz="1350">
+              <a:defRPr sz="1250">
                 <a:latin typeface="Arial"/>
               </a:defRPr>
             </a:pPr>
             <a:r>
-              <a:rPr b="1" dirty="0">
+              <a:rPr b="1">
                 <a:solidFill>
                   <a:srgbClr val="1F2D3D"/>
                 </a:solidFill>
               </a:rPr>
-              <a:t>• </a:t>
-            </a:r>
-            <a:r>
-              <a:rPr b="1" dirty="0" err="1">
-                <a:solidFill>
-                  <a:srgbClr val="1F2D3D"/>
+              <a:t>• Outils Premium d'Édition : </a:t>
+            </a:r>
+            <a:r>
+              <a:rPr b="0">
+                <a:solidFill>
+                  <a:srgbClr val="64748B"/>
                 </a:solidFill>
               </a:rPr>
-              <a:t>Outils</a:t>
-            </a:r>
-            <a:r>
-              <a:rPr b="1" dirty="0">
-                <a:solidFill>
-                  <a:srgbClr val="1F2D3D"/>
-                </a:solidFill>
-              </a:rPr>
-              <a:t> Premium </a:t>
-            </a:r>
-            <a:r>
-              <a:rPr b="1" dirty="0" err="1">
-                <a:solidFill>
-                  <a:srgbClr val="1F2D3D"/>
-                </a:solidFill>
-              </a:rPr>
-              <a:t>d'Édition</a:t>
-            </a:r>
-            <a:r>
-              <a:rPr b="1" dirty="0">
-                <a:solidFill>
-                  <a:srgbClr val="1F2D3D"/>
-                </a:solidFill>
-              </a:rPr>
-              <a:t> : </a:t>
-            </a:r>
-            <a:r>
-              <a:rPr b="0" dirty="0" err="1">
-                <a:solidFill>
-                  <a:srgbClr val="64748B"/>
-                </a:solidFill>
-              </a:rPr>
-              <a:t>Intégrez</a:t>
-            </a:r>
-            <a:r>
-              <a:rPr b="0" dirty="0">
-                <a:solidFill>
-                  <a:srgbClr val="64748B"/>
-                </a:solidFill>
-              </a:rPr>
-              <a:t> des images avec </a:t>
-            </a:r>
-            <a:r>
-              <a:rPr b="0" dirty="0" err="1">
-                <a:solidFill>
-                  <a:srgbClr val="64748B"/>
-                </a:solidFill>
-              </a:rPr>
-              <a:t>balises</a:t>
-            </a:r>
-            <a:r>
-              <a:rPr b="0" dirty="0">
-                <a:solidFill>
-                  <a:srgbClr val="64748B"/>
-                </a:solidFill>
-              </a:rPr>
-              <a:t> alt </a:t>
-            </a:r>
-            <a:r>
-              <a:rPr b="0" dirty="0" err="1">
-                <a:solidFill>
-                  <a:srgbClr val="64748B"/>
-                </a:solidFill>
-              </a:rPr>
-              <a:t>obligatoires</a:t>
-            </a:r>
-            <a:r>
-              <a:rPr b="0" dirty="0">
-                <a:solidFill>
-                  <a:srgbClr val="64748B"/>
-                </a:solidFill>
-              </a:rPr>
-              <a:t> pour Google, </a:t>
-            </a:r>
-            <a:r>
-              <a:rPr b="0" dirty="0" err="1">
-                <a:solidFill>
-                  <a:srgbClr val="64748B"/>
-                </a:solidFill>
-              </a:rPr>
-              <a:t>configurez</a:t>
-            </a:r>
-            <a:r>
-              <a:rPr b="0" dirty="0">
-                <a:solidFill>
-                  <a:srgbClr val="64748B"/>
-                </a:solidFill>
-              </a:rPr>
-              <a:t> des FAQ </a:t>
-            </a:r>
-            <a:r>
-              <a:rPr b="0" dirty="0" err="1">
-                <a:solidFill>
-                  <a:srgbClr val="64748B"/>
-                </a:solidFill>
-              </a:rPr>
-              <a:t>structurées</a:t>
-            </a:r>
-            <a:r>
-              <a:rPr b="0" dirty="0">
-                <a:solidFill>
-                  <a:srgbClr val="64748B"/>
-                </a:solidFill>
-              </a:rPr>
-              <a:t> </a:t>
-            </a:r>
-            <a:r>
-              <a:rPr b="0" dirty="0" err="1">
-                <a:solidFill>
-                  <a:srgbClr val="64748B"/>
-                </a:solidFill>
-              </a:rPr>
-              <a:t>en</a:t>
-            </a:r>
-            <a:r>
-              <a:rPr b="0" dirty="0">
-                <a:solidFill>
-                  <a:srgbClr val="64748B"/>
-                </a:solidFill>
-              </a:rPr>
-              <a:t> JSON pour </a:t>
-            </a:r>
-            <a:r>
-              <a:rPr b="0" dirty="0" err="1">
-                <a:solidFill>
-                  <a:srgbClr val="64748B"/>
-                </a:solidFill>
-              </a:rPr>
-              <a:t>avoir</a:t>
-            </a:r>
-            <a:r>
-              <a:rPr b="0" dirty="0">
-                <a:solidFill>
-                  <a:srgbClr val="64748B"/>
-                </a:solidFill>
-              </a:rPr>
-              <a:t> des Rich Snippets, et </a:t>
-            </a:r>
-            <a:r>
-              <a:rPr b="0" dirty="0" err="1">
-                <a:solidFill>
-                  <a:srgbClr val="64748B"/>
-                </a:solidFill>
-              </a:rPr>
-              <a:t>incorporez</a:t>
-            </a:r>
-            <a:r>
-              <a:rPr b="0" dirty="0">
-                <a:solidFill>
-                  <a:srgbClr val="64748B"/>
-                </a:solidFill>
-              </a:rPr>
-              <a:t> des </a:t>
-            </a:r>
-            <a:r>
-              <a:rPr b="0" dirty="0" err="1">
-                <a:solidFill>
-                  <a:srgbClr val="64748B"/>
-                </a:solidFill>
-              </a:rPr>
-              <a:t>vidéos</a:t>
-            </a:r>
-            <a:r>
-              <a:rPr b="0" dirty="0">
-                <a:solidFill>
-                  <a:srgbClr val="64748B"/>
-                </a:solidFill>
-              </a:rPr>
-              <a:t> </a:t>
-            </a:r>
-            <a:r>
-              <a:rPr b="0" dirty="0" err="1">
-                <a:solidFill>
-                  <a:srgbClr val="64748B"/>
-                </a:solidFill>
-              </a:rPr>
-              <a:t>explicatives</a:t>
-            </a:r>
-            <a:r>
-              <a:rPr b="0" dirty="0">
-                <a:solidFill>
-                  <a:srgbClr val="64748B"/>
-                </a:solidFill>
-              </a:rPr>
-              <a:t>.</a:t>
+              <a:t>Intégrez des images avec balises alt obligatoires pour Google, configurez des FAQ structurées en JSON pour avoir des Rich Snippets, et incorporez des vidéos explicatives.</a:t>
             </a:r>
           </a:p>
         </p:txBody>
       </p:sp>
       <p:pic>
         <p:nvPicPr>
-          <p:cNvPr id="13" name="Image 12">
-            <a:extLst>
-              <a:ext uri="{FF2B5EF4-FFF2-40B4-BE49-F238E27FC236}">
-                <a16:creationId xmlns:a16="http://schemas.microsoft.com/office/drawing/2014/main" id="{FA628249-8C83-3EE1-6637-11D48A2557BF}"/>
-              </a:ext>
-            </a:extLst>
-          </p:cNvPr>
+          <p:cNvPr id="6" name="Picture 5" descr="user_scr_articles.png"/>
           <p:cNvPicPr>
             <a:picLocks noChangeAspect="1"/>
           </p:cNvPicPr>
@@ -6435,8 +4665,8 @@
         </p:blipFill>
         <p:spPr>
           <a:xfrm>
-            <a:off x="6635045" y="1216152"/>
-            <a:ext cx="5184238" cy="4837176"/>
+            <a:off x="6400800" y="1645920"/>
+            <a:ext cx="5029200" cy="4389120"/>
           </a:xfrm>
           <a:prstGeom prst="rect">
             <a:avLst/>
@@ -6452,7 +4682,7 @@
 </file>
 
 <file path=ppt/slides/slide6.xml><?xml version="1.0" encoding="utf-8"?>
-<p:sld xmlns:a="http://schemas.openxmlformats.org/drawingml/2006/main" xmlns:r="http://schemas.openxmlformats.org/officeDocument/2006/relationships" xmlns:p="http://schemas.openxmlformats.org/presentationml/2006/main">
+<p:sld xmlns:a="http://schemas.openxmlformats.org/drawingml/2006/main" xmlns:p="http://schemas.openxmlformats.org/presentationml/2006/main" xmlns:r="http://schemas.openxmlformats.org/officeDocument/2006/relationships">
   <p:cSld>
     <p:bg>
       <p:bgPr>
@@ -6468,14 +4698,7 @@
         <p:cNvGrpSpPr/>
         <p:nvPr/>
       </p:nvGrpSpPr>
-      <p:grpSpPr>
-        <a:xfrm>
-          <a:off x="0" y="0"/>
-          <a:ext cx="0" cy="0"/>
-          <a:chOff x="0" y="0"/>
-          <a:chExt cx="0" cy="0"/>
-        </a:xfrm>
-      </p:grpSpPr>
+      <p:grpSpPr/>
       <p:sp>
         <p:nvSpPr>
           <p:cNvPr id="2" name="TextBox 1"/>
@@ -6535,7 +4758,7 @@
           <a:lstStyle/>
           <a:p>
             <a:pPr>
-              <a:defRPr sz="2600" b="1">
+              <a:defRPr sz="2400" b="1">
                 <a:solidFill>
                   <a:srgbClr val="1F2D3D"/>
                 </a:solidFill>
@@ -6590,7 +4813,6 @@
           <a:lstStyle/>
           <a:p>
             <a:pPr algn="ctr"/>
-            <a:endParaRPr/>
           </a:p>
         </p:txBody>
       </p:sp>
@@ -6620,7 +4842,7 @@
               <a:spcAft>
                 <a:spcPts val="1500"/>
               </a:spcAft>
-              <a:defRPr sz="1600" b="1">
+              <a:defRPr b="1" sz="1500">
                 <a:solidFill>
                   <a:srgbClr val="1F2D3D"/>
                 </a:solidFill>
@@ -6635,7 +4857,7 @@
               <a:spcAft>
                 <a:spcPts val="1200"/>
               </a:spcAft>
-              <a:defRPr sz="1350">
+              <a:defRPr sz="1250">
                 <a:latin typeface="Arial"/>
               </a:defRPr>
             </a:pPr>
@@ -6661,7 +4883,7 @@
               <a:spcAft>
                 <a:spcPts val="1200"/>
               </a:spcAft>
-              <a:defRPr sz="1350">
+              <a:defRPr sz="1250">
                 <a:latin typeface="Arial"/>
               </a:defRPr>
             </a:pPr>
@@ -6687,7 +4909,7 @@
               <a:spcAft>
                 <a:spcPts val="1200"/>
               </a:spcAft>
-              <a:defRPr sz="1350">
+              <a:defRPr sz="1250">
                 <a:latin typeface="Arial"/>
               </a:defRPr>
             </a:pPr>
@@ -6712,7 +4934,7 @@
       </p:sp>
       <p:pic>
         <p:nvPicPr>
-          <p:cNvPr id="7" name="Picture 6" descr="seo_curve.png"/>
+          <p:cNvPr id="6" name="Picture 5" descr="user_scr_seo.png"/>
           <p:cNvPicPr>
             <a:picLocks noChangeAspect="1"/>
           </p:cNvPicPr>
@@ -6726,8 +4948,8 @@
         </p:blipFill>
         <p:spPr>
           <a:xfrm>
-            <a:off x="9265920" y="228600"/>
-            <a:ext cx="2926080" cy="2286000"/>
+            <a:off x="6217920" y="1645920"/>
+            <a:ext cx="5029200" cy="4389120"/>
           </a:xfrm>
           <a:prstGeom prst="rect">
             <a:avLst/>
@@ -6736,13 +4958,7 @@
       </p:pic>
       <p:pic>
         <p:nvPicPr>
-          <p:cNvPr id="9" name="Image 8">
-            <a:extLst>
-              <a:ext uri="{FF2B5EF4-FFF2-40B4-BE49-F238E27FC236}">
-                <a16:creationId xmlns:a16="http://schemas.microsoft.com/office/drawing/2014/main" id="{4A86550D-67FD-C4B7-62FE-0473D7F46B28}"/>
-              </a:ext>
-            </a:extLst>
-          </p:cNvPr>
+          <p:cNvPr id="7" name="Picture 6" descr="seo_curve.png"/>
           <p:cNvPicPr>
             <a:picLocks noChangeAspect="1"/>
           </p:cNvPicPr>
@@ -6756,8 +4972,8 @@
         </p:blipFill>
         <p:spPr>
           <a:xfrm>
-            <a:off x="6400800" y="2545334"/>
-            <a:ext cx="4227576" cy="3946906"/>
+            <a:off x="8686800" y="2926080"/>
+            <a:ext cx="2926080" cy="2286000"/>
           </a:xfrm>
           <a:prstGeom prst="rect">
             <a:avLst/>
@@ -6773,31 +4989,259 @@
 </file>
 
 <file path=ppt/slides/slide7.xml><?xml version="1.0" encoding="utf-8"?>
-<p:sld xmlns:a="http://schemas.openxmlformats.org/drawingml/2006/main" xmlns:r="http://schemas.openxmlformats.org/officeDocument/2006/relationships" xmlns:p="http://schemas.openxmlformats.org/presentationml/2006/main">
+<p:sld xmlns:a="http://schemas.openxmlformats.org/drawingml/2006/main" xmlns:p="http://schemas.openxmlformats.org/presentationml/2006/main" xmlns:r="http://schemas.openxmlformats.org/officeDocument/2006/relationships">
   <p:cSld>
+    <p:bg>
+      <p:bgPr>
+        <a:solidFill>
+          <a:srgbClr val="F8FAFC"/>
+        </a:solidFill>
+        <a:effectLst/>
+      </p:bgPr>
+    </p:bg>
     <p:spTree>
       <p:nvGrpSpPr>
         <p:cNvPr id="1" name=""/>
         <p:cNvGrpSpPr/>
         <p:nvPr/>
       </p:nvGrpSpPr>
-      <p:grpSpPr>
-        <a:xfrm>
-          <a:off x="0" y="0"/>
-          <a:ext cx="0" cy="0"/>
-          <a:chOff x="0" y="0"/>
-          <a:chExt cx="0" cy="0"/>
-        </a:xfrm>
-      </p:grpSpPr>
+      <p:grpSpPr/>
+      <p:sp>
+        <p:nvSpPr>
+          <p:cNvPr id="2" name="TextBox 1"/>
+          <p:cNvSpPr txBox="1"/>
+          <p:nvPr/>
+        </p:nvSpPr>
+        <p:spPr>
+          <a:xfrm>
+            <a:off x="731520" y="365760"/>
+            <a:ext cx="10698480" cy="365760"/>
+          </a:xfrm>
+          <a:prstGeom prst="rect">
+            <a:avLst/>
+          </a:prstGeom>
+          <a:noFill/>
+        </p:spPr>
+        <p:txBody>
+          <a:bodyPr wrap="square">
+            <a:spAutoFit/>
+          </a:bodyPr>
+          <a:lstStyle/>
+          <a:p>
+            <a:pPr>
+              <a:defRPr sz="1100" b="1">
+                <a:solidFill>
+                  <a:srgbClr val="D59B2B"/>
+                </a:solidFill>
+                <a:latin typeface="Arial"/>
+              </a:defRPr>
+            </a:pPr>
+            <a:r>
+              <a:t>LABELLISATION</a:t>
+            </a:r>
+          </a:p>
+        </p:txBody>
+      </p:sp>
+      <p:sp>
+        <p:nvSpPr>
+          <p:cNvPr id="3" name="TextBox 2"/>
+          <p:cNvSpPr txBox="1"/>
+          <p:nvPr/>
+        </p:nvSpPr>
+        <p:spPr>
+          <a:xfrm>
+            <a:off x="731520" y="640080"/>
+            <a:ext cx="10698480" cy="731520"/>
+          </a:xfrm>
+          <a:prstGeom prst="rect">
+            <a:avLst/>
+          </a:prstGeom>
+          <a:noFill/>
+        </p:spPr>
+        <p:txBody>
+          <a:bodyPr wrap="square">
+            <a:spAutoFit/>
+          </a:bodyPr>
+          <a:lstStyle/>
+          <a:p>
+            <a:pPr>
+              <a:defRPr sz="2400" b="1">
+                <a:solidFill>
+                  <a:srgbClr val="1F2D3D"/>
+                </a:solidFill>
+                <a:latin typeface="Arial"/>
+              </a:defRPr>
+            </a:pPr>
+            <a:r>
+              <a:t>Le Label Gainable.fr : Gage de Confiance &amp; Transparence</a:t>
+            </a:r>
+          </a:p>
+        </p:txBody>
+      </p:sp>
+      <p:sp>
+        <p:nvSpPr>
+          <p:cNvPr id="4" name="Rectangle 3"/>
+          <p:cNvSpPr/>
+          <p:nvPr/>
+        </p:nvSpPr>
+        <p:spPr>
+          <a:xfrm>
+            <a:off x="731520" y="1371600"/>
+            <a:ext cx="10728655" cy="18288"/>
+          </a:xfrm>
+          <a:prstGeom prst="rect">
+            <a:avLst/>
+          </a:prstGeom>
+          <a:solidFill>
+            <a:srgbClr val="E2E8F0"/>
+          </a:solidFill>
+          <a:ln>
+            <a:solidFill>
+              <a:srgbClr val="E2E8F0"/>
+            </a:solidFill>
+          </a:ln>
+        </p:spPr>
+        <p:style>
+          <a:lnRef idx="1">
+            <a:schemeClr val="accent1"/>
+          </a:lnRef>
+          <a:fillRef idx="3">
+            <a:schemeClr val="accent1"/>
+          </a:fillRef>
+          <a:effectRef idx="2">
+            <a:schemeClr val="accent1"/>
+          </a:effectRef>
+          <a:fontRef idx="minor">
+            <a:schemeClr val="lt1"/>
+          </a:fontRef>
+        </p:style>
+        <p:txBody>
+          <a:bodyPr rtlCol="0" anchor="ctr"/>
+          <a:lstStyle/>
+          <a:p>
+            <a:pPr algn="ctr"/>
+          </a:p>
+        </p:txBody>
+      </p:sp>
+      <p:sp>
+        <p:nvSpPr>
+          <p:cNvPr id="5" name="TextBox 4"/>
+          <p:cNvSpPr txBox="1"/>
+          <p:nvPr/>
+        </p:nvSpPr>
+        <p:spPr>
+          <a:xfrm>
+            <a:off x="731520" y="1645920"/>
+            <a:ext cx="5303520" cy="4572000"/>
+          </a:xfrm>
+          <a:prstGeom prst="rect">
+            <a:avLst/>
+          </a:prstGeom>
+          <a:noFill/>
+        </p:spPr>
+        <p:txBody>
+          <a:bodyPr wrap="square">
+            <a:spAutoFit/>
+          </a:bodyPr>
+          <a:lstStyle/>
+          <a:p>
+            <a:pPr>
+              <a:spcAft>
+                <a:spcPts val="1500"/>
+              </a:spcAft>
+              <a:defRPr b="1" sz="1500">
+                <a:solidFill>
+                  <a:srgbClr val="1F2D3D"/>
+                </a:solidFill>
+              </a:defRPr>
+            </a:pPr>
+            <a:r>
+              <a:t>Valorisez votre savoir-faire auprès de vos futurs clients</a:t>
+            </a:r>
+          </a:p>
+          <a:p>
+            <a:pPr>
+              <a:spcAft>
+                <a:spcPts val="1200"/>
+              </a:spcAft>
+              <a:defRPr sz="1250">
+                <a:latin typeface="Arial"/>
+              </a:defRPr>
+            </a:pPr>
+            <a:r>
+              <a:rPr b="1">
+                <a:solidFill>
+                  <a:srgbClr val="1F2D3D"/>
+                </a:solidFill>
+              </a:rPr>
+              <a:t>• Transparence &amp; Confiance : </a:t>
+            </a:r>
+            <a:r>
+              <a:rPr b="0">
+                <a:solidFill>
+                  <a:srgbClr val="64748B"/>
+                </a:solidFill>
+              </a:rPr>
+              <a:t>Gainable.fr valorise les professionnels sérieux et garantit aux particuliers une recherche simple, rapide et fiable.</a:t>
+            </a:r>
+          </a:p>
+          <a:p>
+            <a:pPr>
+              <a:spcAft>
+                <a:spcPts val="1200"/>
+              </a:spcAft>
+              <a:defRPr sz="1250">
+                <a:latin typeface="Arial"/>
+              </a:defRPr>
+            </a:pPr>
+            <a:r>
+              <a:rPr b="1">
+                <a:solidFill>
+                  <a:srgbClr val="1F2D3D"/>
+                </a:solidFill>
+              </a:rPr>
+              <a:t>• Badge "Expert Vérifié" visible : </a:t>
+            </a:r>
+            <a:r>
+              <a:rPr b="0">
+                <a:solidFill>
+                  <a:srgbClr val="64748B"/>
+                </a:solidFill>
+              </a:rPr>
+              <a:t>Ce label, gage de qualité, s'affiche directement sur votre profil public pour maximiser la conversion de vos prospects en clients.</a:t>
+            </a:r>
+          </a:p>
+          <a:p>
+            <a:pPr>
+              <a:spcAft>
+                <a:spcPts val="1200"/>
+              </a:spcAft>
+              <a:defRPr sz="1250">
+                <a:latin typeface="Arial"/>
+              </a:defRPr>
+            </a:pPr>
+            <a:r>
+              <a:rPr b="1">
+                <a:solidFill>
+                  <a:srgbClr val="1F2D3D"/>
+                </a:solidFill>
+              </a:rPr>
+              <a:t>• Critères de Labellisation stricts : </a:t>
+            </a:r>
+            <a:r>
+              <a:rPr b="0">
+                <a:solidFill>
+                  <a:srgbClr val="64748B"/>
+                </a:solidFill>
+              </a:rPr>
+              <a:t>Vérification des informations administratives, contrôle des marques et certifications, validation de la zone géographique et analyse de solvabilité via API Inessence.</a:t>
+            </a:r>
+          </a:p>
+        </p:txBody>
+      </p:sp>
       <p:pic>
         <p:nvPicPr>
-          <p:cNvPr id="3" name="Image 2">
-            <a:extLst>
-              <a:ext uri="{FF2B5EF4-FFF2-40B4-BE49-F238E27FC236}">
-                <a16:creationId xmlns:a16="http://schemas.microsoft.com/office/drawing/2014/main" id="{67543C45-38EF-1D9C-06C2-3D5EA6D5DCDA}"/>
-              </a:ext>
-            </a:extLst>
-          </p:cNvPr>
+          <p:cNvPr id="6" name="Picture 5" descr="user_scr_labels.png"/>
           <p:cNvPicPr>
             <a:picLocks noChangeAspect="1"/>
           </p:cNvPicPr>
@@ -6811,8 +5255,8 @@
         </p:blipFill>
         <p:spPr>
           <a:xfrm>
-            <a:off x="212944" y="0"/>
-            <a:ext cx="7102671" cy="6858000"/>
+            <a:off x="6400800" y="1645920"/>
+            <a:ext cx="5029200" cy="4389120"/>
           </a:xfrm>
           <a:prstGeom prst="rect">
             <a:avLst/>
@@ -6820,11 +5264,6 @@
         </p:spPr>
       </p:pic>
     </p:spTree>
-    <p:extLst>
-      <p:ext uri="{BB962C8B-B14F-4D97-AF65-F5344CB8AC3E}">
-        <p14:creationId xmlns:p14="http://schemas.microsoft.com/office/powerpoint/2010/main" val="3928231092"/>
-      </p:ext>
-    </p:extLst>
   </p:cSld>
   <p:clrMapOvr>
     <a:masterClrMapping/>
@@ -6833,31 +5272,285 @@
 </file>
 
 <file path=ppt/slides/slide8.xml><?xml version="1.0" encoding="utf-8"?>
-<p:sld xmlns:a="http://schemas.openxmlformats.org/drawingml/2006/main" xmlns:r="http://schemas.openxmlformats.org/officeDocument/2006/relationships" xmlns:p="http://schemas.openxmlformats.org/presentationml/2006/main">
+<p:sld xmlns:a="http://schemas.openxmlformats.org/drawingml/2006/main" xmlns:p="http://schemas.openxmlformats.org/presentationml/2006/main" xmlns:r="http://schemas.openxmlformats.org/officeDocument/2006/relationships">
   <p:cSld>
+    <p:bg>
+      <p:bgPr>
+        <a:solidFill>
+          <a:srgbClr val="F8FAFC"/>
+        </a:solidFill>
+        <a:effectLst/>
+      </p:bgPr>
+    </p:bg>
     <p:spTree>
       <p:nvGrpSpPr>
         <p:cNvPr id="1" name=""/>
         <p:cNvGrpSpPr/>
         <p:nvPr/>
       </p:nvGrpSpPr>
-      <p:grpSpPr>
-        <a:xfrm>
-          <a:off x="0" y="0"/>
-          <a:ext cx="0" cy="0"/>
-          <a:chOff x="0" y="0"/>
-          <a:chExt cx="0" cy="0"/>
-        </a:xfrm>
-      </p:grpSpPr>
+      <p:grpSpPr/>
+      <p:sp>
+        <p:nvSpPr>
+          <p:cNvPr id="2" name="TextBox 1"/>
+          <p:cNvSpPr txBox="1"/>
+          <p:nvPr/>
+        </p:nvSpPr>
+        <p:spPr>
+          <a:xfrm>
+            <a:off x="731520" y="365760"/>
+            <a:ext cx="10698480" cy="365760"/>
+          </a:xfrm>
+          <a:prstGeom prst="rect">
+            <a:avLst/>
+          </a:prstGeom>
+          <a:noFill/>
+        </p:spPr>
+        <p:txBody>
+          <a:bodyPr wrap="square">
+            <a:spAutoFit/>
+          </a:bodyPr>
+          <a:lstStyle/>
+          <a:p>
+            <a:pPr>
+              <a:defRPr sz="1100" b="1">
+                <a:solidFill>
+                  <a:srgbClr val="D59B2B"/>
+                </a:solidFill>
+                <a:latin typeface="Arial"/>
+              </a:defRPr>
+            </a:pPr>
+            <a:r>
+              <a:t>FORMULES ET OFFRES</a:t>
+            </a:r>
+          </a:p>
+        </p:txBody>
+      </p:sp>
+      <p:sp>
+        <p:nvSpPr>
+          <p:cNvPr id="3" name="TextBox 2"/>
+          <p:cNvSpPr txBox="1"/>
+          <p:nvPr/>
+        </p:nvSpPr>
+        <p:spPr>
+          <a:xfrm>
+            <a:off x="731520" y="640080"/>
+            <a:ext cx="10698480" cy="731520"/>
+          </a:xfrm>
+          <a:prstGeom prst="rect">
+            <a:avLst/>
+          </a:prstGeom>
+          <a:noFill/>
+        </p:spPr>
+        <p:txBody>
+          <a:bodyPr wrap="square">
+            <a:spAutoFit/>
+          </a:bodyPr>
+          <a:lstStyle/>
+          <a:p>
+            <a:pPr>
+              <a:defRPr sz="2400" b="1">
+                <a:solidFill>
+                  <a:srgbClr val="1F2D3D"/>
+                </a:solidFill>
+                <a:latin typeface="Arial"/>
+              </a:defRPr>
+            </a:pPr>
+            <a:r>
+              <a:t>Tarifs Transparents &amp; Formules d'Adhésion</a:t>
+            </a:r>
+          </a:p>
+        </p:txBody>
+      </p:sp>
+      <p:sp>
+        <p:nvSpPr>
+          <p:cNvPr id="4" name="Rectangle 3"/>
+          <p:cNvSpPr/>
+          <p:nvPr/>
+        </p:nvSpPr>
+        <p:spPr>
+          <a:xfrm>
+            <a:off x="731520" y="1371600"/>
+            <a:ext cx="10728655" cy="18288"/>
+          </a:xfrm>
+          <a:prstGeom prst="rect">
+            <a:avLst/>
+          </a:prstGeom>
+          <a:solidFill>
+            <a:srgbClr val="E2E8F0"/>
+          </a:solidFill>
+          <a:ln>
+            <a:solidFill>
+              <a:srgbClr val="E2E8F0"/>
+            </a:solidFill>
+          </a:ln>
+        </p:spPr>
+        <p:style>
+          <a:lnRef idx="1">
+            <a:schemeClr val="accent1"/>
+          </a:lnRef>
+          <a:fillRef idx="3">
+            <a:schemeClr val="accent1"/>
+          </a:fillRef>
+          <a:effectRef idx="2">
+            <a:schemeClr val="accent1"/>
+          </a:effectRef>
+          <a:fontRef idx="minor">
+            <a:schemeClr val="lt1"/>
+          </a:fontRef>
+        </p:style>
+        <p:txBody>
+          <a:bodyPr rtlCol="0" anchor="ctr"/>
+          <a:lstStyle/>
+          <a:p>
+            <a:pPr algn="ctr"/>
+          </a:p>
+        </p:txBody>
+      </p:sp>
+      <p:sp>
+        <p:nvSpPr>
+          <p:cNvPr id="5" name="TextBox 4"/>
+          <p:cNvSpPr txBox="1"/>
+          <p:nvPr/>
+        </p:nvSpPr>
+        <p:spPr>
+          <a:xfrm>
+            <a:off x="731520" y="1645920"/>
+            <a:ext cx="5303520" cy="4572000"/>
+          </a:xfrm>
+          <a:prstGeom prst="rect">
+            <a:avLst/>
+          </a:prstGeom>
+          <a:noFill/>
+        </p:spPr>
+        <p:txBody>
+          <a:bodyPr wrap="square">
+            <a:spAutoFit/>
+          </a:bodyPr>
+          <a:lstStyle/>
+          <a:p>
+            <a:pPr>
+              <a:spcAft>
+                <a:spcPts val="1500"/>
+              </a:spcAft>
+              <a:defRPr b="1" sz="1500">
+                <a:solidFill>
+                  <a:srgbClr val="1F2D3D"/>
+                </a:solidFill>
+              </a:defRPr>
+            </a:pPr>
+            <a:r>
+              <a:t>Des offres adaptées à votre profil de professionnel</a:t>
+            </a:r>
+          </a:p>
+          <a:p>
+            <a:pPr>
+              <a:spcAft>
+                <a:spcPts val="1200"/>
+              </a:spcAft>
+              <a:defRPr sz="1250">
+                <a:latin typeface="Arial"/>
+              </a:defRPr>
+            </a:pPr>
+            <a:r>
+              <a:rPr b="1">
+                <a:solidFill>
+                  <a:srgbClr val="1F2D3D"/>
+                </a:solidFill>
+              </a:rPr>
+              <a:t>• Société Expert CVC : </a:t>
+            </a:r>
+            <a:r>
+              <a:rPr b="0">
+                <a:solidFill>
+                  <a:srgbClr val="64748B"/>
+                </a:solidFill>
+              </a:rPr>
+              <a:t>850 € HT par an (Tarif de lancement au lieu de 1200 € HT). Conçu spécifiquement pour les installateurs de climatisation, clim réversible et PAC.</a:t>
+            </a:r>
+          </a:p>
+          <a:p>
+            <a:pPr>
+              <a:spcAft>
+                <a:spcPts val="1200"/>
+              </a:spcAft>
+              <a:defRPr sz="1250">
+                <a:latin typeface="Arial"/>
+              </a:defRPr>
+            </a:pPr>
+            <a:r>
+              <a:rPr b="1">
+                <a:solidFill>
+                  <a:srgbClr val="1F2D3D"/>
+                </a:solidFill>
+              </a:rPr>
+              <a:t>• Diagnostiqueur Immobilier : </a:t>
+            </a:r>
+            <a:r>
+              <a:rPr b="0">
+                <a:solidFill>
+                  <a:srgbClr val="64748B"/>
+                </a:solidFill>
+              </a:rPr>
+              <a:t>750 € HT par an (Tarif de lancement au lieu de 1100 € HT). Pour les experts en diagnostics DPE, amiante, etc.</a:t>
+            </a:r>
+          </a:p>
+          <a:p>
+            <a:pPr>
+              <a:spcAft>
+                <a:spcPts val="1200"/>
+              </a:spcAft>
+              <a:defRPr sz="1250">
+                <a:latin typeface="Arial"/>
+              </a:defRPr>
+            </a:pPr>
+            <a:r>
+              <a:rPr b="1">
+                <a:solidFill>
+                  <a:srgbClr val="1F2D3D"/>
+                </a:solidFill>
+              </a:rPr>
+              <a:t>• Bureau d'Étude Thermique : </a:t>
+            </a:r>
+            <a:r>
+              <a:rPr b="0">
+                <a:solidFill>
+                  <a:srgbClr val="64748B"/>
+                </a:solidFill>
+              </a:rPr>
+              <a:t>Gratuit pour les experts en thermique (ciblage RE2020, codes APE BE dédiés).</a:t>
+            </a:r>
+          </a:p>
+          <a:p>
+            <a:pPr>
+              <a:spcAft>
+                <a:spcPts val="1200"/>
+              </a:spcAft>
+              <a:defRPr sz="1250">
+                <a:latin typeface="Arial"/>
+              </a:defRPr>
+            </a:pPr>
+            <a:r>
+              <a:rPr b="1">
+                <a:solidFill>
+                  <a:srgbClr val="1F2D3D"/>
+                </a:solidFill>
+              </a:rPr>
+              <a:t>• Toutes fonctionnalités incluses : </a:t>
+            </a:r>
+            <a:r>
+              <a:rPr b="0">
+                <a:solidFill>
+                  <a:srgbClr val="64748B"/>
+                </a:solidFill>
+              </a:rPr>
+              <a:t>0% de commission sur vos contacts, leads et demandes illimités, quota de 10 articles SEO rédigés par mois, assistant IA, et badge de labellisation.</a:t>
+            </a:r>
+          </a:p>
+        </p:txBody>
+      </p:sp>
       <p:pic>
         <p:nvPicPr>
-          <p:cNvPr id="3" name="Image 2">
-            <a:extLst>
-              <a:ext uri="{FF2B5EF4-FFF2-40B4-BE49-F238E27FC236}">
-                <a16:creationId xmlns:a16="http://schemas.microsoft.com/office/drawing/2014/main" id="{2F0611A9-1E02-F7FE-1A6E-7ACFB3824758}"/>
-              </a:ext>
-            </a:extLst>
-          </p:cNvPr>
+          <p:cNvPr id="6" name="Picture 5" descr="user_scr_pricing.png"/>
           <p:cNvPicPr>
             <a:picLocks noChangeAspect="1"/>
           </p:cNvPicPr>
@@ -6871,8 +5564,8 @@
         </p:blipFill>
         <p:spPr>
           <a:xfrm>
-            <a:off x="2090627" y="0"/>
-            <a:ext cx="8010746" cy="6858000"/>
+            <a:off x="6400800" y="1645920"/>
+            <a:ext cx="5029200" cy="4389120"/>
           </a:xfrm>
           <a:prstGeom prst="rect">
             <a:avLst/>
@@ -6880,11 +5573,6 @@
         </p:spPr>
       </p:pic>
     </p:spTree>
-    <p:extLst>
-      <p:ext uri="{BB962C8B-B14F-4D97-AF65-F5344CB8AC3E}">
-        <p14:creationId xmlns:p14="http://schemas.microsoft.com/office/powerpoint/2010/main" val="3985098138"/>
-      </p:ext>
-    </p:extLst>
   </p:cSld>
   <p:clrMapOvr>
     <a:masterClrMapping/>
@@ -6893,12 +5581,12 @@
 </file>
 
 <file path=ppt/slides/slide9.xml><?xml version="1.0" encoding="utf-8"?>
-<p:sld xmlns:a="http://schemas.openxmlformats.org/drawingml/2006/main" xmlns:r="http://schemas.openxmlformats.org/officeDocument/2006/relationships" xmlns:p="http://schemas.openxmlformats.org/presentationml/2006/main">
+<p:sld xmlns:a="http://schemas.openxmlformats.org/drawingml/2006/main" xmlns:p="http://schemas.openxmlformats.org/presentationml/2006/main" xmlns:r="http://schemas.openxmlformats.org/officeDocument/2006/relationships">
   <p:cSld>
     <p:bg>
       <p:bgPr>
         <a:solidFill>
-          <a:srgbClr val="1F2D3D"/>
+          <a:srgbClr val="F8FAFC"/>
         </a:solidFill>
         <a:effectLst/>
       </p:bgPr>
@@ -6909,14 +5597,7 @@
         <p:cNvGrpSpPr/>
         <p:nvPr/>
       </p:nvGrpSpPr>
-      <p:grpSpPr>
-        <a:xfrm>
-          <a:off x="0" y="0"/>
-          <a:ext cx="0" cy="0"/>
-          <a:chOff x="0" y="0"/>
-          <a:chExt cx="0" cy="0"/>
-        </a:xfrm>
-      </p:grpSpPr>
+      <p:grpSpPr/>
       <p:sp>
         <p:nvSpPr>
           <p:cNvPr id="2" name="TextBox 1"/>
@@ -6925,8 +5606,8 @@
         </p:nvSpPr>
         <p:spPr>
           <a:xfrm>
-            <a:off x="457200" y="1097280"/>
-            <a:ext cx="5943600" cy="5237331"/>
+            <a:off x="731520" y="365760"/>
+            <a:ext cx="10698480" cy="365760"/>
           </a:xfrm>
           <a:prstGeom prst="rect">
             <a:avLst/>
@@ -6940,349 +5621,2112 @@
           <a:lstStyle/>
           <a:p>
             <a:pPr>
-              <a:spcAft>
-                <a:spcPts val="1000"/>
-              </a:spcAft>
-              <a:defRPr sz="2800" b="1">
-                <a:solidFill>
-                  <a:srgbClr val="FFFFFF"/>
+              <a:defRPr sz="1100" b="1">
+                <a:solidFill>
+                  <a:srgbClr val="D59B2B"/>
                 </a:solidFill>
                 <a:latin typeface="Arial"/>
               </a:defRPr>
             </a:pPr>
             <a:r>
-              <a:rPr dirty="0" err="1"/>
-              <a:t>Prenez</a:t>
-            </a:r>
-            <a:r>
-              <a:rPr dirty="0"/>
-              <a:t> le </a:t>
-            </a:r>
-            <a:r>
-              <a:rPr dirty="0" err="1"/>
-              <a:t>contrôle</a:t>
-            </a:r>
-            <a:r>
-              <a:rPr dirty="0"/>
-              <a:t> de </a:t>
-            </a:r>
-            <a:r>
-              <a:rPr dirty="0" err="1"/>
-              <a:t>votre</a:t>
-            </a:r>
-            <a:r>
-              <a:rPr dirty="0"/>
-              <a:t> Acquisition Locale</a:t>
-            </a:r>
-          </a:p>
-          <a:p>
-            <a:pPr>
-              <a:spcAft>
-                <a:spcPts val="2400"/>
-              </a:spcAft>
-              <a:defRPr sz="1500">
-                <a:solidFill>
-                  <a:srgbClr val="D59B2B"/>
-                </a:solidFill>
-                <a:latin typeface="Arial"/>
-              </a:defRPr>
-            </a:pPr>
-            <a:r>
-              <a:rPr dirty="0" err="1"/>
-              <a:t>Boostez</a:t>
-            </a:r>
-            <a:r>
-              <a:rPr dirty="0"/>
-              <a:t> </a:t>
-            </a:r>
-            <a:r>
-              <a:rPr dirty="0" err="1"/>
-              <a:t>vos</a:t>
-            </a:r>
-            <a:r>
-              <a:rPr dirty="0"/>
-              <a:t> </a:t>
-            </a:r>
-            <a:r>
-              <a:rPr dirty="0" err="1"/>
-              <a:t>demandes</a:t>
-            </a:r>
-            <a:r>
-              <a:rPr dirty="0"/>
-              <a:t> de </a:t>
-            </a:r>
-            <a:r>
-              <a:rPr dirty="0" err="1"/>
-              <a:t>climatisation</a:t>
-            </a:r>
-            <a:r>
-              <a:rPr dirty="0"/>
-              <a:t>, diagnostics et études </a:t>
-            </a:r>
-            <a:r>
-              <a:rPr dirty="0" err="1"/>
-              <a:t>thermiques</a:t>
-            </a:r>
-            <a:r>
-              <a:rPr dirty="0"/>
-              <a:t> sans </a:t>
-            </a:r>
-            <a:r>
-              <a:rPr dirty="0" err="1"/>
-              <a:t>intermédiaires</a:t>
-            </a:r>
-            <a:r>
-              <a:rPr dirty="0"/>
-              <a:t>.</a:t>
-            </a:r>
-          </a:p>
-          <a:p>
-            <a:pPr>
-              <a:spcAft>
-                <a:spcPts val="1200"/>
-              </a:spcAft>
-              <a:defRPr sz="1400">
-                <a:solidFill>
-                  <a:srgbClr val="FFFFFF"/>
-                </a:solidFill>
-              </a:defRPr>
-            </a:pPr>
-            <a:r>
-              <a:rPr dirty="0"/>
-              <a:t>✔ Abonnement fixe transparent &amp; 0% commission</a:t>
-            </a:r>
-            <a:endParaRPr lang="fr-FR" dirty="0"/>
-          </a:p>
-          <a:p>
-            <a:pPr>
-              <a:spcAft>
-                <a:spcPts val="1200"/>
-              </a:spcAft>
-              <a:defRPr sz="1400">
-                <a:solidFill>
-                  <a:srgbClr val="FFFFFF"/>
-                </a:solidFill>
-              </a:defRPr>
-            </a:pPr>
-            <a:r>
-              <a:rPr lang="fr-FR" dirty="0">
-                <a:solidFill>
-                  <a:schemeClr val="bg1"/>
-                </a:solidFill>
-              </a:rPr>
-              <a:t>✔ valoriser les vrais professionnels,</a:t>
-            </a:r>
-          </a:p>
-          <a:p>
-            <a:pPr>
-              <a:spcAft>
-                <a:spcPts val="1200"/>
-              </a:spcAft>
-              <a:defRPr sz="1400">
-                <a:solidFill>
-                  <a:srgbClr val="FFFFFF"/>
-                </a:solidFill>
-              </a:defRPr>
-            </a:pPr>
-            <a:r>
-              <a:rPr lang="fr-FR" dirty="0">
-                <a:solidFill>
-                  <a:schemeClr val="bg1"/>
-                </a:solidFill>
-              </a:rPr>
-              <a:t>✔ apporter des contacts réellement qualifiés,</a:t>
-            </a:r>
-          </a:p>
-          <a:p>
-            <a:pPr>
-              <a:spcAft>
-                <a:spcPts val="1200"/>
-              </a:spcAft>
-              <a:defRPr sz="1400">
-                <a:solidFill>
-                  <a:srgbClr val="FFFFFF"/>
-                </a:solidFill>
-              </a:defRPr>
-            </a:pPr>
-            <a:r>
-              <a:rPr lang="fr-FR" dirty="0">
-                <a:solidFill>
-                  <a:schemeClr val="bg1"/>
-                </a:solidFill>
-              </a:rPr>
-              <a:t>✔ rétablir la confiance entre artisans et clients,</a:t>
-            </a:r>
-          </a:p>
-          <a:p>
-            <a:pPr>
-              <a:spcAft>
-                <a:spcPts val="1200"/>
-              </a:spcAft>
-              <a:defRPr sz="1400">
-                <a:solidFill>
-                  <a:srgbClr val="FFFFFF"/>
-                </a:solidFill>
-              </a:defRPr>
-            </a:pPr>
-            <a:r>
-              <a:rPr lang="fr-FR" dirty="0">
-                <a:solidFill>
-                  <a:schemeClr val="bg1"/>
-                </a:solidFill>
-              </a:rPr>
-              <a:t>✔ donner aux TPE/PME les outils pour rivaliser avec les grands acteurs du web.</a:t>
-            </a:r>
-          </a:p>
-          <a:p>
-            <a:pPr>
-              <a:spcAft>
-                <a:spcPts val="1200"/>
-              </a:spcAft>
-              <a:defRPr sz="1400">
-                <a:solidFill>
-                  <a:srgbClr val="FFFFFF"/>
-                </a:solidFill>
-              </a:defRPr>
-            </a:pPr>
-            <a:r>
-              <a:rPr dirty="0"/>
-              <a:t>✔ Plus de 58 000 pages et articles </a:t>
-            </a:r>
-            <a:r>
-              <a:rPr dirty="0" err="1"/>
-              <a:t>référencés</a:t>
-            </a:r>
-            <a:r>
-              <a:rPr dirty="0"/>
-              <a:t> sur Google</a:t>
-            </a:r>
-          </a:p>
-          <a:p>
-            <a:pPr>
-              <a:spcAft>
-                <a:spcPts val="2400"/>
-              </a:spcAft>
-              <a:defRPr sz="1400">
-                <a:solidFill>
-                  <a:srgbClr val="FFFFFF"/>
-                </a:solidFill>
-              </a:defRPr>
-            </a:pPr>
-            <a:r>
-              <a:rPr dirty="0"/>
-              <a:t>✔ </a:t>
-            </a:r>
-            <a:r>
-              <a:rPr dirty="0" err="1"/>
-              <a:t>Suivi</a:t>
-            </a:r>
-            <a:r>
-              <a:rPr dirty="0"/>
-              <a:t> </a:t>
-            </a:r>
-            <a:r>
-              <a:rPr dirty="0" err="1"/>
-              <a:t>en</a:t>
-            </a:r>
-            <a:r>
-              <a:rPr dirty="0"/>
-              <a:t> temps </a:t>
-            </a:r>
-            <a:r>
-              <a:rPr dirty="0" err="1"/>
-              <a:t>réel</a:t>
-            </a:r>
-            <a:r>
-              <a:rPr dirty="0"/>
-              <a:t> des leads, impressions et positions </a:t>
-            </a:r>
-            <a:r>
-              <a:rPr dirty="0" err="1"/>
-              <a:t>moyennes</a:t>
-            </a:r>
-            <a:endParaRPr dirty="0"/>
-          </a:p>
-          <a:p>
-            <a:pPr>
-              <a:defRPr sz="1400" b="1">
-                <a:solidFill>
-                  <a:srgbClr val="D59B2B"/>
-                </a:solidFill>
-                <a:latin typeface="Arial"/>
-              </a:defRPr>
-            </a:pPr>
-            <a:r>
-              <a:rPr dirty="0" err="1"/>
-              <a:t>Rejoignez</a:t>
-            </a:r>
-            <a:r>
-              <a:rPr dirty="0"/>
-              <a:t> le réseau des experts : </a:t>
-            </a:r>
-            <a:r>
-              <a:rPr dirty="0">
-                <a:hlinkClick r:id="rId2"/>
-              </a:rPr>
-              <a:t>www.gainable.fr</a:t>
-            </a:r>
-            <a:r>
-              <a:rPr lang="fr-FR" dirty="0"/>
-              <a:t> </a:t>
-            </a:r>
-            <a:r>
-              <a:rPr lang="fr-FR" dirty="0">
-                <a:hlinkClick r:id="rId3"/>
-              </a:rPr>
-              <a:t>www.gainable.be</a:t>
-            </a:r>
-            <a:r>
-              <a:rPr lang="fr-FR" dirty="0"/>
-              <a:t>  </a:t>
-            </a:r>
-            <a:r>
-              <a:rPr lang="fr-FR" dirty="0">
-                <a:hlinkClick r:id="rId4"/>
-              </a:rPr>
-              <a:t>www.gainable.ch</a:t>
-            </a:r>
-            <a:r>
-              <a:rPr lang="fr-FR" dirty="0"/>
-              <a:t> </a:t>
-            </a:r>
-            <a:br>
-              <a:rPr dirty="0"/>
-            </a:br>
-            <a:r>
-              <a:rPr dirty="0"/>
-              <a:t>Contact commercial : contact@gainable.ch</a:t>
-            </a:r>
-          </a:p>
-        </p:txBody>
-      </p:sp>
-      <p:pic>
-        <p:nvPicPr>
-          <p:cNvPr id="3" name="Picture 2" descr="espace_pro_conclusion_1765140856043.png"/>
-          <p:cNvPicPr>
-            <a:picLocks noChangeAspect="1"/>
-          </p:cNvPicPr>
+              <a:t>POSITIONNEMENT CONCURRENTIEL</a:t>
+            </a:r>
+          </a:p>
+        </p:txBody>
+      </p:sp>
+      <p:sp>
+        <p:nvSpPr>
+          <p:cNvPr id="3" name="TextBox 2"/>
+          <p:cNvSpPr txBox="1"/>
           <p:nvPr/>
-        </p:nvPicPr>
-        <p:blipFill>
-          <a:blip r:embed="rId5"/>
-          <a:stretch>
-            <a:fillRect/>
-          </a:stretch>
-        </p:blipFill>
+        </p:nvSpPr>
         <p:spPr>
           <a:xfrm>
-            <a:off x="6705295" y="0"/>
-            <a:ext cx="5486400" cy="6858000"/>
+            <a:off x="731520" y="640080"/>
+            <a:ext cx="10698480" cy="731520"/>
           </a:xfrm>
           <a:prstGeom prst="rect">
             <a:avLst/>
           </a:prstGeom>
+          <a:noFill/>
         </p:spPr>
-      </p:pic>
+        <p:txBody>
+          <a:bodyPr wrap="square">
+            <a:spAutoFit/>
+          </a:bodyPr>
+          <a:lstStyle/>
+          <a:p>
+            <a:pPr>
+              <a:defRPr sz="2400" b="1">
+                <a:solidFill>
+                  <a:srgbClr val="1F2D3D"/>
+                </a:solidFill>
+                <a:latin typeface="Arial"/>
+              </a:defRPr>
+            </a:pPr>
+            <a:r>
+              <a:t>Comparatif des Plateformes Concurrentes</a:t>
+            </a:r>
+          </a:p>
+        </p:txBody>
+      </p:sp>
+      <p:sp>
+        <p:nvSpPr>
+          <p:cNvPr id="4" name="Rectangle 3"/>
+          <p:cNvSpPr/>
+          <p:nvPr/>
+        </p:nvSpPr>
+        <p:spPr>
+          <a:xfrm>
+            <a:off x="731520" y="1371600"/>
+            <a:ext cx="10728655" cy="18288"/>
+          </a:xfrm>
+          <a:prstGeom prst="rect">
+            <a:avLst/>
+          </a:prstGeom>
+          <a:solidFill>
+            <a:srgbClr val="E2E8F0"/>
+          </a:solidFill>
+          <a:ln>
+            <a:solidFill>
+              <a:srgbClr val="E2E8F0"/>
+            </a:solidFill>
+          </a:ln>
+        </p:spPr>
+        <p:style>
+          <a:lnRef idx="1">
+            <a:schemeClr val="accent1"/>
+          </a:lnRef>
+          <a:fillRef idx="3">
+            <a:schemeClr val="accent1"/>
+          </a:fillRef>
+          <a:effectRef idx="2">
+            <a:schemeClr val="accent1"/>
+          </a:effectRef>
+          <a:fontRef idx="minor">
+            <a:schemeClr val="lt1"/>
+          </a:fontRef>
+        </p:style>
+        <p:txBody>
+          <a:bodyPr rtlCol="0" anchor="ctr"/>
+          <a:lstStyle/>
+          <a:p>
+            <a:pPr algn="ctr"/>
+          </a:p>
+        </p:txBody>
+      </p:sp>
+      <p:sp>
+        <p:nvSpPr>
+          <p:cNvPr id="5" name="TextBox 4"/>
+          <p:cNvSpPr txBox="1"/>
+          <p:nvPr/>
+        </p:nvSpPr>
+        <p:spPr>
+          <a:xfrm>
+            <a:off x="320040" y="1389888"/>
+            <a:ext cx="11521440" cy="292608"/>
+          </a:xfrm>
+          <a:prstGeom prst="rect">
+            <a:avLst/>
+          </a:prstGeom>
+          <a:noFill/>
+        </p:spPr>
+        <p:txBody>
+          <a:bodyPr wrap="none">
+            <a:spAutoFit/>
+          </a:bodyPr>
+          <a:lstStyle/>
+          <a:p>
+            <a:pPr>
+              <a:defRPr sz="1150" i="1">
+                <a:solidFill>
+                  <a:srgbClr val="64748B"/>
+                </a:solidFill>
+                <a:latin typeface="Arial"/>
+              </a:defRPr>
+            </a:pPr>
+            <a:r>
+              <a:t>Gainable.fr face aux principales plateformes du marché CVC, Diagnostics &amp; Bâtiment</a:t>
+            </a:r>
+          </a:p>
+        </p:txBody>
+      </p:sp>
+      <p:graphicFrame>
+        <p:nvGraphicFramePr>
+          <p:cNvPr id="6" name="Table 5"/>
+          <p:cNvGraphicFramePr>
+            <a:graphicFrameLocks noGrp="1"/>
+          </p:cNvGraphicFramePr>
+          <p:nvPr/>
+        </p:nvGraphicFramePr>
+        <p:xfrm>
+          <a:off x="201168" y="1719072"/>
+          <a:ext cx="11777472" cy="4956048"/>
+        </p:xfrm>
+        <a:graphic>
+          <a:graphicData uri="http://schemas.openxmlformats.org/drawingml/2006/table">
+            <a:tbl>
+              <a:tblPr firstRow="1" bandRow="1">
+                <a:tableStyleId>{5C22544A-7EE6-4342-B048-85BDC9FD1C3A}</a:tableStyleId>
+              </a:tblPr>
+              <a:tblGrid>
+                <a:gridCol w="2240280"/>
+                <a:gridCol w="2697480"/>
+                <a:gridCol w="1600200"/>
+                <a:gridCol w="1325880"/>
+                <a:gridCol w="1325880"/>
+                <a:gridCol w="1325880"/>
+                <a:gridCol w="1261872"/>
+              </a:tblGrid>
+              <a:tr h="475488">
+                <a:tc>
+                  <a:txBody>
+                    <a:bodyPr wrap="square"/>
+                    <a:lstStyle/>
+                    <a:p>
+                      <a:pPr algn="ctr">
+                        <a:defRPr sz="1000" b="1">
+                          <a:solidFill>
+                            <a:srgbClr val="FFFFFF"/>
+                          </a:solidFill>
+                          <a:latin typeface="Arial"/>
+                        </a:defRPr>
+                      </a:pPr>
+                      <a:r>
+                        <a:t>Plateforme</a:t>
+                      </a:r>
+                    </a:p>
+                  </a:txBody>
+                  <a:tcPr>
+                    <a:solidFill>
+                      <a:srgbClr val="1F2D3D"/>
+                    </a:solidFill>
+                  </a:tcPr>
+                </a:tc>
+                <a:tc>
+                  <a:txBody>
+                    <a:bodyPr wrap="square"/>
+                    <a:lstStyle/>
+                    <a:p>
+                      <a:pPr algn="ctr">
+                        <a:defRPr sz="1000" b="1">
+                          <a:solidFill>
+                            <a:srgbClr val="FFFFFF"/>
+                          </a:solidFill>
+                          <a:latin typeface="Arial"/>
+                        </a:defRPr>
+                      </a:pPr>
+                      <a:r>
+                        <a:t>Modèle économique</a:t>
+                      </a:r>
+                    </a:p>
+                  </a:txBody>
+                  <a:tcPr>
+                    <a:solidFill>
+                      <a:srgbClr val="1F2D3D"/>
+                    </a:solidFill>
+                  </a:tcPr>
+                </a:tc>
+                <a:tc>
+                  <a:txBody>
+                    <a:bodyPr wrap="square"/>
+                    <a:lstStyle/>
+                    <a:p>
+                      <a:pPr algn="ctr">
+                        <a:defRPr sz="1000" b="1">
+                          <a:solidFill>
+                            <a:srgbClr val="FFFFFF"/>
+                          </a:solidFill>
+                          <a:latin typeface="Arial"/>
+                        </a:defRPr>
+                      </a:pPr>
+                      <a:r>
+                        <a:t>Coût estimatif</a:t>
+                      </a:r>
+                    </a:p>
+                  </a:txBody>
+                  <a:tcPr>
+                    <a:solidFill>
+                      <a:srgbClr val="1F2D3D"/>
+                    </a:solidFill>
+                  </a:tcPr>
+                </a:tc>
+                <a:tc>
+                  <a:txBody>
+                    <a:bodyPr wrap="square"/>
+                    <a:lstStyle/>
+                    <a:p>
+                      <a:pPr algn="ctr">
+                        <a:defRPr sz="1000" b="1">
+                          <a:solidFill>
+                            <a:srgbClr val="FFFFFF"/>
+                          </a:solidFill>
+                          <a:latin typeface="Arial"/>
+                        </a:defRPr>
+                      </a:pPr>
+                      <a:r>
+                        <a:t>Leads</a:t>
+                      </a:r>
+                      <a:br/>
+                      <a:r>
+                        <a:t>exclusifs</a:t>
+                      </a:r>
+                    </a:p>
+                  </a:txBody>
+                  <a:tcPr>
+                    <a:solidFill>
+                      <a:srgbClr val="1F2D3D"/>
+                    </a:solidFill>
+                  </a:tcPr>
+                </a:tc>
+                <a:tc>
+                  <a:txBody>
+                    <a:bodyPr wrap="square"/>
+                    <a:lstStyle/>
+                    <a:p>
+                      <a:pPr algn="ctr">
+                        <a:defRPr sz="1000" b="1">
+                          <a:solidFill>
+                            <a:srgbClr val="FFFFFF"/>
+                          </a:solidFill>
+                          <a:latin typeface="Arial"/>
+                        </a:defRPr>
+                      </a:pPr>
+                      <a:r>
+                        <a:t>Commission</a:t>
+                      </a:r>
+                      <a:br/>
+                      <a:r>
+                        <a:t>chantier</a:t>
+                      </a:r>
+                    </a:p>
+                  </a:txBody>
+                  <a:tcPr>
+                    <a:solidFill>
+                      <a:srgbClr val="1F2D3D"/>
+                    </a:solidFill>
+                  </a:tcPr>
+                </a:tc>
+                <a:tc>
+                  <a:txBody>
+                    <a:bodyPr wrap="square"/>
+                    <a:lstStyle/>
+                    <a:p>
+                      <a:pPr algn="ctr">
+                        <a:defRPr sz="1000" b="1">
+                          <a:solidFill>
+                            <a:srgbClr val="FFFFFF"/>
+                          </a:solidFill>
+                          <a:latin typeface="Arial"/>
+                        </a:defRPr>
+                      </a:pPr>
+                      <a:r>
+                        <a:t>SEO</a:t>
+                      </a:r>
+                      <a:br/>
+                      <a:r>
+                        <a:t>intégré</a:t>
+                      </a:r>
+                    </a:p>
+                  </a:txBody>
+                  <a:tcPr>
+                    <a:solidFill>
+                      <a:srgbClr val="1F2D3D"/>
+                    </a:solidFill>
+                  </a:tcPr>
+                </a:tc>
+                <a:tc>
+                  <a:txBody>
+                    <a:bodyPr wrap="square"/>
+                    <a:lstStyle/>
+                    <a:p>
+                      <a:pPr algn="ctr">
+                        <a:defRPr sz="1000" b="1">
+                          <a:solidFill>
+                            <a:srgbClr val="FFFFFF"/>
+                          </a:solidFill>
+                          <a:latin typeface="Arial"/>
+                        </a:defRPr>
+                      </a:pPr>
+                      <a:r>
+                        <a:t>IA</a:t>
+                      </a:r>
+                      <a:br/>
+                      <a:r>
+                        <a:t>incluse</a:t>
+                      </a:r>
+                    </a:p>
+                  </a:txBody>
+                  <a:tcPr>
+                    <a:solidFill>
+                      <a:srgbClr val="1F2D3D"/>
+                    </a:solidFill>
+                  </a:tcPr>
+                </a:tc>
+              </a:tr>
+              <a:tr h="640080">
+                <a:tc>
+                  <a:txBody>
+                    <a:bodyPr wrap="square"/>
+                    <a:lstStyle/>
+                    <a:p>
+                      <a:pPr algn="l">
+                        <a:defRPr sz="1000" b="1">
+                          <a:solidFill>
+                            <a:srgbClr val="065F46"/>
+                          </a:solidFill>
+                          <a:latin typeface="Arial"/>
+                        </a:defRPr>
+                      </a:pPr>
+                      <a:r>
+                        <a:t>⭐ Gainable.fr</a:t>
+                      </a:r>
+                    </a:p>
+                    <a:p>
+                      <a:pPr algn="l">
+                        <a:defRPr sz="950" b="1">
+                          <a:solidFill>
+                            <a:srgbClr val="64748B"/>
+                          </a:solidFill>
+                          <a:latin typeface="Arial"/>
+                        </a:defRPr>
+                      </a:pPr>
+                      <a:r>
+                        <a:t>gainable.fr | .be | .ch</a:t>
+                      </a:r>
+                    </a:p>
+                  </a:txBody>
+                  <a:tcPr>
+                    <a:solidFill>
+                      <a:srgbClr val="ECFDF5"/>
+                    </a:solidFill>
+                  </a:tcPr>
+                </a:tc>
+                <a:tc>
+                  <a:txBody>
+                    <a:bodyPr wrap="square"/>
+                    <a:lstStyle/>
+                    <a:p>
+                      <a:pPr algn="l">
+                        <a:defRPr sz="1000" b="0">
+                          <a:solidFill>
+                            <a:srgbClr val="065F46"/>
+                          </a:solidFill>
+                          <a:latin typeface="Arial"/>
+                        </a:defRPr>
+                      </a:pPr>
+                      <a:r>
+                        <a:t>Annuaire spécialisé CVC &amp; Diag</a:t>
+                      </a:r>
+                    </a:p>
+                    <a:p>
+                      <a:pPr algn="l">
+                        <a:defRPr sz="950" b="0">
+                          <a:solidFill>
+                            <a:srgbClr val="64748B"/>
+                          </a:solidFill>
+                          <a:latin typeface="Arial"/>
+                        </a:defRPr>
+                      </a:pPr>
+                      <a:r>
+                        <a:t>+ Articles SEO + Assistant IA</a:t>
+                      </a:r>
+                    </a:p>
+                  </a:txBody>
+                  <a:tcPr>
+                    <a:solidFill>
+                      <a:srgbClr val="ECFDF5"/>
+                    </a:solidFill>
+                  </a:tcPr>
+                </a:tc>
+                <a:tc>
+                  <a:txBody>
+                    <a:bodyPr wrap="square"/>
+                    <a:lstStyle/>
+                    <a:p>
+                      <a:pPr algn="ctr">
+                        <a:defRPr sz="1000" b="1">
+                          <a:solidFill>
+                            <a:srgbClr val="065F46"/>
+                          </a:solidFill>
+                          <a:latin typeface="Arial"/>
+                        </a:defRPr>
+                      </a:pPr>
+                      <a:r>
+                        <a:t>850 € HT/an (CVC)</a:t>
+                      </a:r>
+                    </a:p>
+                    <a:p>
+                      <a:pPr algn="ctr">
+                        <a:defRPr sz="950" b="1">
+                          <a:solidFill>
+                            <a:srgbClr val="64748B"/>
+                          </a:solidFill>
+                          <a:latin typeface="Arial"/>
+                        </a:defRPr>
+                      </a:pPr>
+                      <a:r>
+                        <a:t>750 € HT/an (Diag) · 0€ BE</a:t>
+                      </a:r>
+                    </a:p>
+                  </a:txBody>
+                  <a:tcPr>
+                    <a:solidFill>
+                      <a:srgbClr val="ECFDF5"/>
+                    </a:solidFill>
+                  </a:tcPr>
+                </a:tc>
+                <a:tc>
+                  <a:txBody>
+                    <a:bodyPr wrap="square"/>
+                    <a:lstStyle/>
+                    <a:p>
+                      <a:pPr algn="ctr">
+                        <a:defRPr sz="1000" b="1">
+                          <a:solidFill>
+                            <a:srgbClr val="10B981"/>
+                          </a:solidFill>
+                          <a:latin typeface="Arial"/>
+                        </a:defRPr>
+                      </a:pPr>
+                      <a:r>
+                        <a:t>✔ OUI</a:t>
+                      </a:r>
+                    </a:p>
+                    <a:p>
+                      <a:pPr algn="ctr">
+                        <a:defRPr sz="950" b="1">
+                          <a:solidFill>
+                            <a:srgbClr val="64748B"/>
+                          </a:solidFill>
+                          <a:latin typeface="Arial"/>
+                        </a:defRPr>
+                      </a:pPr>
+                      <a:r>
+                        <a:t>Contact direct</a:t>
+                      </a:r>
+                    </a:p>
+                  </a:txBody>
+                  <a:tcPr>
+                    <a:solidFill>
+                      <a:srgbClr val="ECFDF5"/>
+                    </a:solidFill>
+                  </a:tcPr>
+                </a:tc>
+                <a:tc>
+                  <a:txBody>
+                    <a:bodyPr wrap="square"/>
+                    <a:lstStyle/>
+                    <a:p>
+                      <a:pPr algn="ctr">
+                        <a:defRPr sz="1000" b="1">
+                          <a:solidFill>
+                            <a:srgbClr val="065F46"/>
+                          </a:solidFill>
+                          <a:latin typeface="Arial"/>
+                        </a:defRPr>
+                      </a:pPr>
+                      <a:r>
+                        <a:t>0 %</a:t>
+                      </a:r>
+                    </a:p>
+                    <a:p>
+                      <a:pPr algn="ctr">
+                        <a:defRPr sz="950" b="1">
+                          <a:solidFill>
+                            <a:srgbClr val="64748B"/>
+                          </a:solidFill>
+                          <a:latin typeface="Arial"/>
+                        </a:defRPr>
+                      </a:pPr>
+                      <a:r>
+                        <a:t>Aucune commission</a:t>
+                      </a:r>
+                    </a:p>
+                  </a:txBody>
+                  <a:tcPr>
+                    <a:solidFill>
+                      <a:srgbClr val="ECFDF5"/>
+                    </a:solidFill>
+                  </a:tcPr>
+                </a:tc>
+                <a:tc>
+                  <a:txBody>
+                    <a:bodyPr wrap="square"/>
+                    <a:lstStyle/>
+                    <a:p>
+                      <a:pPr algn="ctr">
+                        <a:defRPr sz="1000" b="1">
+                          <a:solidFill>
+                            <a:srgbClr val="10B981"/>
+                          </a:solidFill>
+                          <a:latin typeface="Arial"/>
+                        </a:defRPr>
+                      </a:pPr>
+                      <a:r>
+                        <a:t>✔ OUI</a:t>
+                      </a:r>
+                    </a:p>
+                    <a:p>
+                      <a:pPr algn="ctr">
+                        <a:defRPr sz="950" b="1">
+                          <a:solidFill>
+                            <a:srgbClr val="64748B"/>
+                          </a:solidFill>
+                          <a:latin typeface="Arial"/>
+                        </a:defRPr>
+                      </a:pPr>
+                      <a:r>
+                        <a:t>Articles + IA + Rich Snippets</a:t>
+                      </a:r>
+                    </a:p>
+                  </a:txBody>
+                  <a:tcPr>
+                    <a:solidFill>
+                      <a:srgbClr val="ECFDF5"/>
+                    </a:solidFill>
+                  </a:tcPr>
+                </a:tc>
+                <a:tc>
+                  <a:txBody>
+                    <a:bodyPr wrap="square"/>
+                    <a:lstStyle/>
+                    <a:p>
+                      <a:pPr algn="ctr">
+                        <a:defRPr sz="1000" b="1">
+                          <a:solidFill>
+                            <a:srgbClr val="10B981"/>
+                          </a:solidFill>
+                          <a:latin typeface="Arial"/>
+                        </a:defRPr>
+                      </a:pPr>
+                      <a:r>
+                        <a:t>✔ OUI</a:t>
+                      </a:r>
+                    </a:p>
+                    <a:p>
+                      <a:pPr algn="ctr">
+                        <a:defRPr sz="950" b="1">
+                          <a:solidFill>
+                            <a:srgbClr val="64748B"/>
+                          </a:solidFill>
+                          <a:latin typeface="Arial"/>
+                        </a:defRPr>
+                      </a:pPr>
+                      <a:r>
+                        <a:t>Assistant rédacteur intégré</a:t>
+                      </a:r>
+                    </a:p>
+                  </a:txBody>
+                  <a:tcPr>
+                    <a:solidFill>
+                      <a:srgbClr val="ECFDF5"/>
+                    </a:solidFill>
+                  </a:tcPr>
+                </a:tc>
+              </a:tr>
+              <a:tr h="640080">
+                <a:tc>
+                  <a:txBody>
+                    <a:bodyPr wrap="square"/>
+                    <a:lstStyle/>
+                    <a:p>
+                      <a:pPr algn="l">
+                        <a:defRPr sz="900" b="1">
+                          <a:solidFill>
+                            <a:srgbClr val="1F2D3D"/>
+                          </a:solidFill>
+                          <a:latin typeface="Arial"/>
+                        </a:defRPr>
+                      </a:pPr>
+                      <a:r>
+                        <a:t>Habitapresto</a:t>
+                      </a:r>
+                    </a:p>
+                    <a:p>
+                      <a:pPr algn="l">
+                        <a:defRPr sz="850" b="1">
+                          <a:solidFill>
+                            <a:srgbClr val="64748B"/>
+                          </a:solidFill>
+                          <a:latin typeface="Arial"/>
+                        </a:defRPr>
+                      </a:pPr>
+                      <a:r>
+                        <a:t>Travaux.com</a:t>
+                      </a:r>
+                    </a:p>
+                  </a:txBody>
+                  <a:tcPr>
+                    <a:solidFill>
+                      <a:srgbClr val="FFFFFF"/>
+                    </a:solidFill>
+                  </a:tcPr>
+                </a:tc>
+                <a:tc>
+                  <a:txBody>
+                    <a:bodyPr wrap="square"/>
+                    <a:lstStyle/>
+                    <a:p>
+                      <a:pPr algn="l">
+                        <a:defRPr sz="900" b="0">
+                          <a:solidFill>
+                            <a:srgbClr val="1F2D3D"/>
+                          </a:solidFill>
+                          <a:latin typeface="Arial"/>
+                        </a:defRPr>
+                      </a:pPr>
+                      <a:r>
+                        <a:t>Marketplace de leads</a:t>
+                      </a:r>
+                    </a:p>
+                    <a:p>
+                      <a:pPr algn="l">
+                        <a:defRPr sz="850" b="0">
+                          <a:solidFill>
+                            <a:srgbClr val="64748B"/>
+                          </a:solidFill>
+                          <a:latin typeface="Arial"/>
+                        </a:defRPr>
+                      </a:pPr>
+                      <a:r>
+                        <a:t>Revendu ×3 à 5 concurrents</a:t>
+                      </a:r>
+                    </a:p>
+                  </a:txBody>
+                  <a:tcPr>
+                    <a:solidFill>
+                      <a:srgbClr val="FFFFFF"/>
+                    </a:solidFill>
+                  </a:tcPr>
+                </a:tc>
+                <a:tc>
+                  <a:txBody>
+                    <a:bodyPr wrap="square"/>
+                    <a:lstStyle/>
+                    <a:p>
+                      <a:pPr algn="ctr">
+                        <a:defRPr sz="900" b="0">
+                          <a:solidFill>
+                            <a:srgbClr val="1F2D3D"/>
+                          </a:solidFill>
+                          <a:latin typeface="Arial"/>
+                        </a:defRPr>
+                      </a:pPr>
+                      <a:r>
+                        <a:t>20–80 € HT / lead</a:t>
+                      </a:r>
+                    </a:p>
+                    <a:p>
+                      <a:pPr algn="ctr">
+                        <a:defRPr sz="850" b="0">
+                          <a:solidFill>
+                            <a:srgbClr val="64748B"/>
+                          </a:solidFill>
+                          <a:latin typeface="Arial"/>
+                        </a:defRPr>
+                      </a:pPr>
+                      <a:r>
+                        <a:t>Facturation par contact</a:t>
+                      </a:r>
+                    </a:p>
+                  </a:txBody>
+                  <a:tcPr>
+                    <a:solidFill>
+                      <a:srgbClr val="FFFFFF"/>
+                    </a:solidFill>
+                  </a:tcPr>
+                </a:tc>
+                <a:tc>
+                  <a:txBody>
+                    <a:bodyPr wrap="square"/>
+                    <a:lstStyle/>
+                    <a:p>
+                      <a:pPr algn="ctr">
+                        <a:defRPr sz="900" b="0">
+                          <a:solidFill>
+                            <a:srgbClr val="DC2626"/>
+                          </a:solidFill>
+                          <a:latin typeface="Arial"/>
+                        </a:defRPr>
+                      </a:pPr>
+                      <a:r>
+                        <a:t>✘ NON</a:t>
+                      </a:r>
+                    </a:p>
+                    <a:p>
+                      <a:pPr algn="ctr">
+                        <a:defRPr sz="850" b="0">
+                          <a:solidFill>
+                            <a:srgbClr val="64748B"/>
+                          </a:solidFill>
+                          <a:latin typeface="Arial"/>
+                        </a:defRPr>
+                      </a:pPr>
+                      <a:r>
+                        <a:t>Partagés (multi-pros)</a:t>
+                      </a:r>
+                    </a:p>
+                  </a:txBody>
+                  <a:tcPr>
+                    <a:solidFill>
+                      <a:srgbClr val="FFFFFF"/>
+                    </a:solidFill>
+                  </a:tcPr>
+                </a:tc>
+                <a:tc>
+                  <a:txBody>
+                    <a:bodyPr wrap="square"/>
+                    <a:lstStyle/>
+                    <a:p>
+                      <a:pPr algn="ctr">
+                        <a:defRPr sz="900" b="0">
+                          <a:solidFill>
+                            <a:srgbClr val="1F2D3D"/>
+                          </a:solidFill>
+                          <a:latin typeface="Arial"/>
+                        </a:defRPr>
+                      </a:pPr>
+                      <a:r>
+                        <a:t>0 %</a:t>
+                      </a:r>
+                    </a:p>
+                    <a:p>
+                      <a:pPr algn="ctr">
+                        <a:defRPr sz="850" b="0">
+                          <a:solidFill>
+                            <a:srgbClr val="64748B"/>
+                          </a:solidFill>
+                          <a:latin typeface="Arial"/>
+                        </a:defRPr>
+                      </a:pPr>
+                      <a:r>
+                        <a:t>(achat au lead)</a:t>
+                      </a:r>
+                    </a:p>
+                  </a:txBody>
+                  <a:tcPr>
+                    <a:solidFill>
+                      <a:srgbClr val="FFFFFF"/>
+                    </a:solidFill>
+                  </a:tcPr>
+                </a:tc>
+                <a:tc>
+                  <a:txBody>
+                    <a:bodyPr wrap="square"/>
+                    <a:lstStyle/>
+                    <a:p>
+                      <a:pPr algn="ctr">
+                        <a:defRPr sz="900" b="0">
+                          <a:solidFill>
+                            <a:srgbClr val="DC2626"/>
+                          </a:solidFill>
+                          <a:latin typeface="Arial"/>
+                        </a:defRPr>
+                      </a:pPr>
+                      <a:r>
+                        <a:t>✘ NON</a:t>
+                      </a:r>
+                    </a:p>
+                    <a:p>
+                      <a:pPr algn="ctr">
+                        <a:defRPr sz="850" b="0">
+                          <a:solidFill>
+                            <a:srgbClr val="64748B"/>
+                          </a:solidFill>
+                          <a:latin typeface="Arial"/>
+                        </a:defRPr>
+                      </a:pPr>
+                      <a:r>
+                        <a:t>Pas d'outillage SEO</a:t>
+                      </a:r>
+                    </a:p>
+                  </a:txBody>
+                  <a:tcPr>
+                    <a:solidFill>
+                      <a:srgbClr val="FFFFFF"/>
+                    </a:solidFill>
+                  </a:tcPr>
+                </a:tc>
+                <a:tc>
+                  <a:txBody>
+                    <a:bodyPr wrap="square"/>
+                    <a:lstStyle/>
+                    <a:p>
+                      <a:pPr algn="ctr">
+                        <a:defRPr sz="900" b="0">
+                          <a:solidFill>
+                            <a:srgbClr val="DC2626"/>
+                          </a:solidFill>
+                          <a:latin typeface="Arial"/>
+                        </a:defRPr>
+                      </a:pPr>
+                      <a:r>
+                        <a:t>✘ NON</a:t>
+                      </a:r>
+                    </a:p>
+                  </a:txBody>
+                  <a:tcPr>
+                    <a:solidFill>
+                      <a:srgbClr val="FFFFFF"/>
+                    </a:solidFill>
+                  </a:tcPr>
+                </a:tc>
+              </a:tr>
+              <a:tr h="640080">
+                <a:tc>
+                  <a:txBody>
+                    <a:bodyPr wrap="square"/>
+                    <a:lstStyle/>
+                    <a:p>
+                      <a:pPr algn="l">
+                        <a:defRPr sz="900" b="1">
+                          <a:solidFill>
+                            <a:srgbClr val="1F2D3D"/>
+                          </a:solidFill>
+                          <a:latin typeface="Arial"/>
+                        </a:defRPr>
+                      </a:pPr>
+                      <a:r>
+                        <a:t>Maclem</a:t>
+                      </a:r>
+                    </a:p>
+                    <a:p>
+                      <a:pPr algn="l">
+                        <a:defRPr sz="850" b="1">
+                          <a:solidFill>
+                            <a:srgbClr val="64748B"/>
+                          </a:solidFill>
+                          <a:latin typeface="Arial"/>
+                        </a:defRPr>
+                      </a:pPr>
+                      <a:r>
+                        <a:t>Plateforme CVC</a:t>
+                      </a:r>
+                    </a:p>
+                  </a:txBody>
+                  <a:tcPr>
+                    <a:solidFill>
+                      <a:srgbClr val="F8FAFC"/>
+                    </a:solidFill>
+                  </a:tcPr>
+                </a:tc>
+                <a:tc>
+                  <a:txBody>
+                    <a:bodyPr wrap="square"/>
+                    <a:lstStyle/>
+                    <a:p>
+                      <a:pPr algn="l">
+                        <a:defRPr sz="900" b="0">
+                          <a:solidFill>
+                            <a:srgbClr val="1F2D3D"/>
+                          </a:solidFill>
+                          <a:latin typeface="Arial"/>
+                        </a:defRPr>
+                      </a:pPr>
+                      <a:r>
+                        <a:t>Comparateur &amp; annuaire CVC</a:t>
+                      </a:r>
+                    </a:p>
+                    <a:p>
+                      <a:pPr algn="l">
+                        <a:defRPr sz="850" b="0">
+                          <a:solidFill>
+                            <a:srgbClr val="64748B"/>
+                          </a:solidFill>
+                          <a:latin typeface="Arial"/>
+                        </a:defRPr>
+                      </a:pPr>
+                      <a:r>
+                        <a:t>Génération de leads partagés</a:t>
+                      </a:r>
+                    </a:p>
+                  </a:txBody>
+                  <a:tcPr>
+                    <a:solidFill>
+                      <a:srgbClr val="F8FAFC"/>
+                    </a:solidFill>
+                  </a:tcPr>
+                </a:tc>
+                <a:tc>
+                  <a:txBody>
+                    <a:bodyPr wrap="square"/>
+                    <a:lstStyle/>
+                    <a:p>
+                      <a:pPr algn="ctr">
+                        <a:defRPr sz="900" b="0">
+                          <a:solidFill>
+                            <a:srgbClr val="1F2D3D"/>
+                          </a:solidFill>
+                          <a:latin typeface="Arial"/>
+                        </a:defRPr>
+                      </a:pPr>
+                      <a:r>
+                        <a:t>Abonnement</a:t>
+                      </a:r>
+                    </a:p>
+                    <a:p>
+                      <a:pPr algn="ctr">
+                        <a:defRPr sz="850" b="0">
+                          <a:solidFill>
+                            <a:srgbClr val="64748B"/>
+                          </a:solidFill>
+                          <a:latin typeface="Arial"/>
+                        </a:defRPr>
+                      </a:pPr>
+                      <a:r>
+                        <a:t>+ commission chantier</a:t>
+                      </a:r>
+                    </a:p>
+                  </a:txBody>
+                  <a:tcPr>
+                    <a:solidFill>
+                      <a:srgbClr val="F8FAFC"/>
+                    </a:solidFill>
+                  </a:tcPr>
+                </a:tc>
+                <a:tc>
+                  <a:txBody>
+                    <a:bodyPr wrap="square"/>
+                    <a:lstStyle/>
+                    <a:p>
+                      <a:pPr algn="ctr">
+                        <a:defRPr sz="900" b="0">
+                          <a:solidFill>
+                            <a:srgbClr val="DC2626"/>
+                          </a:solidFill>
+                          <a:latin typeface="Arial"/>
+                        </a:defRPr>
+                      </a:pPr>
+                      <a:r>
+                        <a:t>✘ NON</a:t>
+                      </a:r>
+                    </a:p>
+                    <a:p>
+                      <a:pPr algn="ctr">
+                        <a:defRPr sz="850" b="0">
+                          <a:solidFill>
+                            <a:srgbClr val="64748B"/>
+                          </a:solidFill>
+                          <a:latin typeface="Arial"/>
+                        </a:defRPr>
+                      </a:pPr>
+                      <a:r>
+                        <a:t>Multi-pros</a:t>
+                      </a:r>
+                    </a:p>
+                  </a:txBody>
+                  <a:tcPr>
+                    <a:solidFill>
+                      <a:srgbClr val="F8FAFC"/>
+                    </a:solidFill>
+                  </a:tcPr>
+                </a:tc>
+                <a:tc>
+                  <a:txBody>
+                    <a:bodyPr wrap="square"/>
+                    <a:lstStyle/>
+                    <a:p>
+                      <a:pPr algn="ctr">
+                        <a:defRPr sz="900" b="0">
+                          <a:solidFill>
+                            <a:srgbClr val="1F2D3D"/>
+                          </a:solidFill>
+                          <a:latin typeface="Arial"/>
+                        </a:defRPr>
+                      </a:pPr>
+                      <a:r>
+                        <a:t>5–10 %</a:t>
+                      </a:r>
+                    </a:p>
+                    <a:p>
+                      <a:pPr algn="ctr">
+                        <a:defRPr sz="850" b="0">
+                          <a:solidFill>
+                            <a:srgbClr val="64748B"/>
+                          </a:solidFill>
+                          <a:latin typeface="Arial"/>
+                        </a:defRPr>
+                      </a:pPr>
+                      <a:r>
+                        <a:t>du montant chantier</a:t>
+                      </a:r>
+                    </a:p>
+                  </a:txBody>
+                  <a:tcPr>
+                    <a:solidFill>
+                      <a:srgbClr val="F8FAFC"/>
+                    </a:solidFill>
+                  </a:tcPr>
+                </a:tc>
+                <a:tc>
+                  <a:txBody>
+                    <a:bodyPr wrap="square"/>
+                    <a:lstStyle/>
+                    <a:p>
+                      <a:pPr algn="ctr">
+                        <a:defRPr sz="900" b="0">
+                          <a:solidFill>
+                            <a:srgbClr val="CA8A04"/>
+                          </a:solidFill>
+                          <a:latin typeface="Arial"/>
+                        </a:defRPr>
+                      </a:pPr>
+                      <a:r>
+                        <a:t>Partiel</a:t>
+                      </a:r>
+                    </a:p>
+                    <a:p>
+                      <a:pPr algn="ctr">
+                        <a:defRPr sz="850" b="0">
+                          <a:solidFill>
+                            <a:srgbClr val="64748B"/>
+                          </a:solidFill>
+                          <a:latin typeface="Arial"/>
+                        </a:defRPr>
+                      </a:pPr>
+                      <a:r>
+                        <a:t>Peu de contenu local</a:t>
+                      </a:r>
+                    </a:p>
+                  </a:txBody>
+                  <a:tcPr>
+                    <a:solidFill>
+                      <a:srgbClr val="F8FAFC"/>
+                    </a:solidFill>
+                  </a:tcPr>
+                </a:tc>
+                <a:tc>
+                  <a:txBody>
+                    <a:bodyPr wrap="square"/>
+                    <a:lstStyle/>
+                    <a:p>
+                      <a:pPr algn="ctr">
+                        <a:defRPr sz="900" b="0">
+                          <a:solidFill>
+                            <a:srgbClr val="DC2626"/>
+                          </a:solidFill>
+                          <a:latin typeface="Arial"/>
+                        </a:defRPr>
+                      </a:pPr>
+                      <a:r>
+                        <a:t>✘ NON</a:t>
+                      </a:r>
+                    </a:p>
+                  </a:txBody>
+                  <a:tcPr>
+                    <a:solidFill>
+                      <a:srgbClr val="F8FAFC"/>
+                    </a:solidFill>
+                  </a:tcPr>
+                </a:tc>
+              </a:tr>
+              <a:tr h="640080">
+                <a:tc>
+                  <a:txBody>
+                    <a:bodyPr wrap="square"/>
+                    <a:lstStyle/>
+                    <a:p>
+                      <a:pPr algn="l">
+                        <a:defRPr sz="900" b="1">
+                          <a:solidFill>
+                            <a:srgbClr val="1F2D3D"/>
+                          </a:solidFill>
+                          <a:latin typeface="Arial"/>
+                        </a:defRPr>
+                      </a:pPr>
+                      <a:r>
+                        <a:t>IZI by EDF</a:t>
+                      </a:r>
+                    </a:p>
+                    <a:p>
+                      <a:pPr algn="l">
+                        <a:defRPr sz="850" b="1">
+                          <a:solidFill>
+                            <a:srgbClr val="64748B"/>
+                          </a:solidFill>
+                          <a:latin typeface="Arial"/>
+                        </a:defRPr>
+                      </a:pPr>
+                      <a:r>
+                        <a:t>Engie Home Services</a:t>
+                      </a:r>
+                    </a:p>
+                  </a:txBody>
+                  <a:tcPr>
+                    <a:solidFill>
+                      <a:srgbClr val="FFFFFF"/>
+                    </a:solidFill>
+                  </a:tcPr>
+                </a:tc>
+                <a:tc>
+                  <a:txBody>
+                    <a:bodyPr wrap="square"/>
+                    <a:lstStyle/>
+                    <a:p>
+                      <a:pPr algn="l">
+                        <a:defRPr sz="900" b="0">
+                          <a:solidFill>
+                            <a:srgbClr val="1F2D3D"/>
+                          </a:solidFill>
+                          <a:latin typeface="Arial"/>
+                        </a:defRPr>
+                      </a:pPr>
+                      <a:r>
+                        <a:t>Plateforme énergie nationale</a:t>
+                      </a:r>
+                    </a:p>
+                    <a:p>
+                      <a:pPr algn="l">
+                        <a:defRPr sz="850" b="0">
+                          <a:solidFill>
+                            <a:srgbClr val="64748B"/>
+                          </a:solidFill>
+                          <a:latin typeface="Arial"/>
+                        </a:defRPr>
+                      </a:pPr>
+                      <a:r>
+                        <a:t>Subventions + installation</a:t>
+                      </a:r>
+                    </a:p>
+                  </a:txBody>
+                  <a:tcPr>
+                    <a:solidFill>
+                      <a:srgbClr val="FFFFFF"/>
+                    </a:solidFill>
+                  </a:tcPr>
+                </a:tc>
+                <a:tc>
+                  <a:txBody>
+                    <a:bodyPr wrap="square"/>
+                    <a:lstStyle/>
+                    <a:p>
+                      <a:pPr algn="ctr">
+                        <a:defRPr sz="900" b="0">
+                          <a:solidFill>
+                            <a:srgbClr val="1F2D3D"/>
+                          </a:solidFill>
+                          <a:latin typeface="Arial"/>
+                        </a:defRPr>
+                      </a:pPr>
+                      <a:r>
+                        <a:t>Commission chantier</a:t>
+                      </a:r>
+                    </a:p>
+                    <a:p>
+                      <a:pPr algn="ctr">
+                        <a:defRPr sz="850" b="0">
+                          <a:solidFill>
+                            <a:srgbClr val="64748B"/>
+                          </a:solidFill>
+                          <a:latin typeface="Arial"/>
+                        </a:defRPr>
+                      </a:pPr>
+                      <a:r>
+                        <a:t>Imposée par le groupe</a:t>
+                      </a:r>
+                    </a:p>
+                  </a:txBody>
+                  <a:tcPr>
+                    <a:solidFill>
+                      <a:srgbClr val="FFFFFF"/>
+                    </a:solidFill>
+                  </a:tcPr>
+                </a:tc>
+                <a:tc>
+                  <a:txBody>
+                    <a:bodyPr wrap="square"/>
+                    <a:lstStyle/>
+                    <a:p>
+                      <a:pPr algn="ctr">
+                        <a:defRPr sz="900" b="0">
+                          <a:solidFill>
+                            <a:srgbClr val="DC2626"/>
+                          </a:solidFill>
+                          <a:latin typeface="Arial"/>
+                        </a:defRPr>
+                      </a:pPr>
+                      <a:r>
+                        <a:t>✘ NON</a:t>
+                      </a:r>
+                    </a:p>
+                    <a:p>
+                      <a:pPr algn="ctr">
+                        <a:defRPr sz="850" b="0">
+                          <a:solidFill>
+                            <a:srgbClr val="64748B"/>
+                          </a:solidFill>
+                          <a:latin typeface="Arial"/>
+                        </a:defRPr>
+                      </a:pPr>
+                      <a:r>
+                        <a:t>Groupe imposé</a:t>
+                      </a:r>
+                    </a:p>
+                  </a:txBody>
+                  <a:tcPr>
+                    <a:solidFill>
+                      <a:srgbClr val="FFFFFF"/>
+                    </a:solidFill>
+                  </a:tcPr>
+                </a:tc>
+                <a:tc>
+                  <a:txBody>
+                    <a:bodyPr wrap="square"/>
+                    <a:lstStyle/>
+                    <a:p>
+                      <a:pPr algn="ctr">
+                        <a:defRPr sz="900" b="0">
+                          <a:solidFill>
+                            <a:srgbClr val="1F2D3D"/>
+                          </a:solidFill>
+                          <a:latin typeface="Arial"/>
+                        </a:defRPr>
+                      </a:pPr>
+                      <a:r>
+                        <a:t>10–15 %</a:t>
+                      </a:r>
+                    </a:p>
+                    <a:p>
+                      <a:pPr algn="ctr">
+                        <a:defRPr sz="850" b="0">
+                          <a:solidFill>
+                            <a:srgbClr val="64748B"/>
+                          </a:solidFill>
+                          <a:latin typeface="Arial"/>
+                        </a:defRPr>
+                      </a:pPr>
+                      <a:r>
+                        <a:t>du montant chantier</a:t>
+                      </a:r>
+                    </a:p>
+                  </a:txBody>
+                  <a:tcPr>
+                    <a:solidFill>
+                      <a:srgbClr val="FFFFFF"/>
+                    </a:solidFill>
+                  </a:tcPr>
+                </a:tc>
+                <a:tc>
+                  <a:txBody>
+                    <a:bodyPr wrap="square"/>
+                    <a:lstStyle/>
+                    <a:p>
+                      <a:pPr algn="ctr">
+                        <a:defRPr sz="900" b="0">
+                          <a:solidFill>
+                            <a:srgbClr val="DC2626"/>
+                          </a:solidFill>
+                          <a:latin typeface="Arial"/>
+                        </a:defRPr>
+                      </a:pPr>
+                      <a:r>
+                        <a:t>✘ NON</a:t>
+                      </a:r>
+                    </a:p>
+                    <a:p>
+                      <a:pPr algn="ctr">
+                        <a:defRPr sz="850" b="0">
+                          <a:solidFill>
+                            <a:srgbClr val="64748B"/>
+                          </a:solidFill>
+                          <a:latin typeface="Arial"/>
+                        </a:defRPr>
+                      </a:pPr>
+                      <a:r>
+                        <a:t>Marque nationale seule</a:t>
+                      </a:r>
+                    </a:p>
+                  </a:txBody>
+                  <a:tcPr>
+                    <a:solidFill>
+                      <a:srgbClr val="FFFFFF"/>
+                    </a:solidFill>
+                  </a:tcPr>
+                </a:tc>
+                <a:tc>
+                  <a:txBody>
+                    <a:bodyPr wrap="square"/>
+                    <a:lstStyle/>
+                    <a:p>
+                      <a:pPr algn="ctr">
+                        <a:defRPr sz="900" b="0">
+                          <a:solidFill>
+                            <a:srgbClr val="DC2626"/>
+                          </a:solidFill>
+                          <a:latin typeface="Arial"/>
+                        </a:defRPr>
+                      </a:pPr>
+                      <a:r>
+                        <a:t>✘ NON</a:t>
+                      </a:r>
+                    </a:p>
+                  </a:txBody>
+                  <a:tcPr>
+                    <a:solidFill>
+                      <a:srgbClr val="FFFFFF"/>
+                    </a:solidFill>
+                  </a:tcPr>
+                </a:tc>
+              </a:tr>
+              <a:tr h="640080">
+                <a:tc>
+                  <a:txBody>
+                    <a:bodyPr wrap="square"/>
+                    <a:lstStyle/>
+                    <a:p>
+                      <a:pPr algn="l">
+                        <a:defRPr sz="900" b="1">
+                          <a:solidFill>
+                            <a:srgbClr val="1F2D3D"/>
+                          </a:solidFill>
+                          <a:latin typeface="Arial"/>
+                        </a:defRPr>
+                      </a:pPr>
+                      <a:r>
+                        <a:t>Houzz Pro</a:t>
+                      </a:r>
+                    </a:p>
+                    <a:p>
+                      <a:pPr algn="l">
+                        <a:defRPr sz="850" b="1">
+                          <a:solidFill>
+                            <a:srgbClr val="64748B"/>
+                          </a:solidFill>
+                          <a:latin typeface="Arial"/>
+                        </a:defRPr>
+                      </a:pPr>
+                      <a:r>
+                        <a:t>Plateforme internationale</a:t>
+                      </a:r>
+                    </a:p>
+                  </a:txBody>
+                  <a:tcPr>
+                    <a:solidFill>
+                      <a:srgbClr val="F8FAFC"/>
+                    </a:solidFill>
+                  </a:tcPr>
+                </a:tc>
+                <a:tc>
+                  <a:txBody>
+                    <a:bodyPr wrap="square"/>
+                    <a:lstStyle/>
+                    <a:p>
+                      <a:pPr algn="l">
+                        <a:defRPr sz="900" b="0">
+                          <a:solidFill>
+                            <a:srgbClr val="1F2D3D"/>
+                          </a:solidFill>
+                          <a:latin typeface="Arial"/>
+                        </a:defRPr>
+                      </a:pPr>
+                      <a:r>
+                        <a:t>Déco &amp; rénovation</a:t>
+                      </a:r>
+                    </a:p>
+                    <a:p>
+                      <a:pPr algn="l">
+                        <a:defRPr sz="850" b="0">
+                          <a:solidFill>
+                            <a:srgbClr val="64748B"/>
+                          </a:solidFill>
+                          <a:latin typeface="Arial"/>
+                        </a:defRPr>
+                      </a:pPr>
+                      <a:r>
+                        <a:t>Pas spécialisé CVC France</a:t>
+                      </a:r>
+                    </a:p>
+                  </a:txBody>
+                  <a:tcPr>
+                    <a:solidFill>
+                      <a:srgbClr val="F8FAFC"/>
+                    </a:solidFill>
+                  </a:tcPr>
+                </a:tc>
+                <a:tc>
+                  <a:txBody>
+                    <a:bodyPr wrap="square"/>
+                    <a:lstStyle/>
+                    <a:p>
+                      <a:pPr algn="ctr">
+                        <a:defRPr sz="900" b="0">
+                          <a:solidFill>
+                            <a:srgbClr val="1F2D3D"/>
+                          </a:solidFill>
+                          <a:latin typeface="Arial"/>
+                        </a:defRPr>
+                      </a:pPr>
+                      <a:r>
+                        <a:t>250–600 € HT / mois</a:t>
+                      </a:r>
+                    </a:p>
+                    <a:p>
+                      <a:pPr algn="ctr">
+                        <a:defRPr sz="850" b="0">
+                          <a:solidFill>
+                            <a:srgbClr val="64748B"/>
+                          </a:solidFill>
+                          <a:latin typeface="Arial"/>
+                        </a:defRPr>
+                      </a:pPr>
+                      <a:r>
+                        <a:t>Sans garantie de leads</a:t>
+                      </a:r>
+                    </a:p>
+                  </a:txBody>
+                  <a:tcPr>
+                    <a:solidFill>
+                      <a:srgbClr val="F8FAFC"/>
+                    </a:solidFill>
+                  </a:tcPr>
+                </a:tc>
+                <a:tc>
+                  <a:txBody>
+                    <a:bodyPr wrap="square"/>
+                    <a:lstStyle/>
+                    <a:p>
+                      <a:pPr algn="ctr">
+                        <a:defRPr sz="900" b="0">
+                          <a:solidFill>
+                            <a:srgbClr val="CA8A04"/>
+                          </a:solidFill>
+                          <a:latin typeface="Arial"/>
+                        </a:defRPr>
+                      </a:pPr>
+                      <a:r>
+                        <a:t>Partiel</a:t>
+                      </a:r>
+                    </a:p>
+                    <a:p>
+                      <a:pPr algn="ctr">
+                        <a:defRPr sz="850" b="0">
+                          <a:solidFill>
+                            <a:srgbClr val="64748B"/>
+                          </a:solidFill>
+                          <a:latin typeface="Arial"/>
+                        </a:defRPr>
+                      </a:pPr>
+                      <a:r>
+                        <a:t>Non qualifié CVC</a:t>
+                      </a:r>
+                    </a:p>
+                  </a:txBody>
+                  <a:tcPr>
+                    <a:solidFill>
+                      <a:srgbClr val="F8FAFC"/>
+                    </a:solidFill>
+                  </a:tcPr>
+                </a:tc>
+                <a:tc>
+                  <a:txBody>
+                    <a:bodyPr wrap="square"/>
+                    <a:lstStyle/>
+                    <a:p>
+                      <a:pPr algn="ctr">
+                        <a:defRPr sz="900" b="0">
+                          <a:solidFill>
+                            <a:srgbClr val="1F2D3D"/>
+                          </a:solidFill>
+                          <a:latin typeface="Arial"/>
+                        </a:defRPr>
+                      </a:pPr>
+                      <a:r>
+                        <a:t>0 %</a:t>
+                      </a:r>
+                    </a:p>
+                  </a:txBody>
+                  <a:tcPr>
+                    <a:solidFill>
+                      <a:srgbClr val="F8FAFC"/>
+                    </a:solidFill>
+                  </a:tcPr>
+                </a:tc>
+                <a:tc>
+                  <a:txBody>
+                    <a:bodyPr wrap="square"/>
+                    <a:lstStyle/>
+                    <a:p>
+                      <a:pPr algn="ctr">
+                        <a:defRPr sz="900" b="0">
+                          <a:solidFill>
+                            <a:srgbClr val="CA8A04"/>
+                          </a:solidFill>
+                          <a:latin typeface="Arial"/>
+                        </a:defRPr>
+                      </a:pPr>
+                      <a:r>
+                        <a:t>Partiel</a:t>
+                      </a:r>
+                    </a:p>
+                    <a:p>
+                      <a:pPr algn="ctr">
+                        <a:defRPr sz="850" b="0">
+                          <a:solidFill>
+                            <a:srgbClr val="64748B"/>
+                          </a:solidFill>
+                          <a:latin typeface="Arial"/>
+                        </a:defRPr>
+                      </a:pPr>
+                      <a:r>
+                        <a:t>Généraliste</a:t>
+                      </a:r>
+                    </a:p>
+                  </a:txBody>
+                  <a:tcPr>
+                    <a:solidFill>
+                      <a:srgbClr val="F8FAFC"/>
+                    </a:solidFill>
+                  </a:tcPr>
+                </a:tc>
+                <a:tc>
+                  <a:txBody>
+                    <a:bodyPr wrap="square"/>
+                    <a:lstStyle/>
+                    <a:p>
+                      <a:pPr algn="ctr">
+                        <a:defRPr sz="900" b="0">
+                          <a:solidFill>
+                            <a:srgbClr val="DC2626"/>
+                          </a:solidFill>
+                          <a:latin typeface="Arial"/>
+                        </a:defRPr>
+                      </a:pPr>
+                      <a:r>
+                        <a:t>✘ NON</a:t>
+                      </a:r>
+                    </a:p>
+                  </a:txBody>
+                  <a:tcPr>
+                    <a:solidFill>
+                      <a:srgbClr val="F8FAFC"/>
+                    </a:solidFill>
+                  </a:tcPr>
+                </a:tc>
+              </a:tr>
+              <a:tr h="640080">
+                <a:tc>
+                  <a:txBody>
+                    <a:bodyPr wrap="square"/>
+                    <a:lstStyle/>
+                    <a:p>
+                      <a:pPr algn="l">
+                        <a:defRPr sz="900" b="1">
+                          <a:solidFill>
+                            <a:srgbClr val="1F2D3D"/>
+                          </a:solidFill>
+                          <a:latin typeface="Arial"/>
+                        </a:defRPr>
+                      </a:pPr>
+                      <a:r>
+                        <a:t>PagesJaunes / Yelp</a:t>
+                      </a:r>
+                    </a:p>
+                    <a:p>
+                      <a:pPr algn="l">
+                        <a:defRPr sz="850" b="1">
+                          <a:solidFill>
+                            <a:srgbClr val="64748B"/>
+                          </a:solidFill>
+                          <a:latin typeface="Arial"/>
+                        </a:defRPr>
+                      </a:pPr>
+                      <a:r>
+                        <a:t>Annuaires généralistes</a:t>
+                      </a:r>
+                    </a:p>
+                  </a:txBody>
+                  <a:tcPr>
+                    <a:solidFill>
+                      <a:srgbClr val="FFFFFF"/>
+                    </a:solidFill>
+                  </a:tcPr>
+                </a:tc>
+                <a:tc>
+                  <a:txBody>
+                    <a:bodyPr wrap="square"/>
+                    <a:lstStyle/>
+                    <a:p>
+                      <a:pPr algn="l">
+                        <a:defRPr sz="900" b="0">
+                          <a:solidFill>
+                            <a:srgbClr val="1F2D3D"/>
+                          </a:solidFill>
+                          <a:latin typeface="Arial"/>
+                        </a:defRPr>
+                      </a:pPr>
+                      <a:r>
+                        <a:t>Annuaire classique</a:t>
+                      </a:r>
+                    </a:p>
+                    <a:p>
+                      <a:pPr algn="l">
+                        <a:defRPr sz="850" b="0">
+                          <a:solidFill>
+                            <a:srgbClr val="64748B"/>
+                          </a:solidFill>
+                          <a:latin typeface="Arial"/>
+                        </a:defRPr>
+                      </a:pPr>
+                      <a:r>
+                        <a:t>Pas de spécialisation CVC</a:t>
+                      </a:r>
+                    </a:p>
+                  </a:txBody>
+                  <a:tcPr>
+                    <a:solidFill>
+                      <a:srgbClr val="FFFFFF"/>
+                    </a:solidFill>
+                  </a:tcPr>
+                </a:tc>
+                <a:tc>
+                  <a:txBody>
+                    <a:bodyPr wrap="square"/>
+                    <a:lstStyle/>
+                    <a:p>
+                      <a:pPr algn="ctr">
+                        <a:defRPr sz="900" b="0">
+                          <a:solidFill>
+                            <a:srgbClr val="1F2D3D"/>
+                          </a:solidFill>
+                          <a:latin typeface="Arial"/>
+                        </a:defRPr>
+                      </a:pPr>
+                      <a:r>
+                        <a:t>0 à 150 € HT / mois</a:t>
+                      </a:r>
+                    </a:p>
+                    <a:p>
+                      <a:pPr algn="ctr">
+                        <a:defRPr sz="850" b="0">
+                          <a:solidFill>
+                            <a:srgbClr val="64748B"/>
+                          </a:solidFill>
+                          <a:latin typeface="Arial"/>
+                        </a:defRPr>
+                      </a:pPr>
+                      <a:r>
+                        <a:t>Option payante limitée</a:t>
+                      </a:r>
+                    </a:p>
+                  </a:txBody>
+                  <a:tcPr>
+                    <a:solidFill>
+                      <a:srgbClr val="FFFFFF"/>
+                    </a:solidFill>
+                  </a:tcPr>
+                </a:tc>
+                <a:tc>
+                  <a:txBody>
+                    <a:bodyPr wrap="square"/>
+                    <a:lstStyle/>
+                    <a:p>
+                      <a:pPr algn="ctr">
+                        <a:defRPr sz="900" b="0">
+                          <a:solidFill>
+                            <a:srgbClr val="DC2626"/>
+                          </a:solidFill>
+                          <a:latin typeface="Arial"/>
+                        </a:defRPr>
+                      </a:pPr>
+                      <a:r>
+                        <a:t>✘ NON</a:t>
+                      </a:r>
+                    </a:p>
+                    <a:p>
+                      <a:pPr algn="ctr">
+                        <a:defRPr sz="850" b="0">
+                          <a:solidFill>
+                            <a:srgbClr val="64748B"/>
+                          </a:solidFill>
+                          <a:latin typeface="Arial"/>
+                        </a:defRPr>
+                      </a:pPr>
+                      <a:r>
+                        <a:t>Peu qualifié</a:t>
+                      </a:r>
+                    </a:p>
+                  </a:txBody>
+                  <a:tcPr>
+                    <a:solidFill>
+                      <a:srgbClr val="FFFFFF"/>
+                    </a:solidFill>
+                  </a:tcPr>
+                </a:tc>
+                <a:tc>
+                  <a:txBody>
+                    <a:bodyPr wrap="square"/>
+                    <a:lstStyle/>
+                    <a:p>
+                      <a:pPr algn="ctr">
+                        <a:defRPr sz="900" b="0">
+                          <a:solidFill>
+                            <a:srgbClr val="1F2D3D"/>
+                          </a:solidFill>
+                          <a:latin typeface="Arial"/>
+                        </a:defRPr>
+                      </a:pPr>
+                      <a:r>
+                        <a:t>0 %</a:t>
+                      </a:r>
+                    </a:p>
+                  </a:txBody>
+                  <a:tcPr>
+                    <a:solidFill>
+                      <a:srgbClr val="FFFFFF"/>
+                    </a:solidFill>
+                  </a:tcPr>
+                </a:tc>
+                <a:tc>
+                  <a:txBody>
+                    <a:bodyPr wrap="square"/>
+                    <a:lstStyle/>
+                    <a:p>
+                      <a:pPr algn="ctr">
+                        <a:defRPr sz="900" b="0">
+                          <a:solidFill>
+                            <a:srgbClr val="DC2626"/>
+                          </a:solidFill>
+                          <a:latin typeface="Arial"/>
+                        </a:defRPr>
+                      </a:pPr>
+                      <a:r>
+                        <a:t>✘ NON</a:t>
+                      </a:r>
+                    </a:p>
+                    <a:p>
+                      <a:pPr algn="ctr">
+                        <a:defRPr sz="850" b="0">
+                          <a:solidFill>
+                            <a:srgbClr val="64748B"/>
+                          </a:solidFill>
+                          <a:latin typeface="Arial"/>
+                        </a:defRPr>
+                      </a:pPr>
+                      <a:r>
+                        <a:t>Pas d'articles, pas d'IA</a:t>
+                      </a:r>
+                    </a:p>
+                  </a:txBody>
+                  <a:tcPr>
+                    <a:solidFill>
+                      <a:srgbClr val="FFFFFF"/>
+                    </a:solidFill>
+                  </a:tcPr>
+                </a:tc>
+                <a:tc>
+                  <a:txBody>
+                    <a:bodyPr wrap="square"/>
+                    <a:lstStyle/>
+                    <a:p>
+                      <a:pPr algn="ctr">
+                        <a:defRPr sz="900" b="0">
+                          <a:solidFill>
+                            <a:srgbClr val="DC2626"/>
+                          </a:solidFill>
+                          <a:latin typeface="Arial"/>
+                        </a:defRPr>
+                      </a:pPr>
+                      <a:r>
+                        <a:t>✘ NON</a:t>
+                      </a:r>
+                    </a:p>
+                  </a:txBody>
+                  <a:tcPr>
+                    <a:solidFill>
+                      <a:srgbClr val="FFFFFF"/>
+                    </a:solidFill>
+                  </a:tcPr>
+                </a:tc>
+              </a:tr>
+              <a:tr h="640080">
+                <a:tc>
+                  <a:txBody>
+                    <a:bodyPr wrap="square"/>
+                    <a:lstStyle/>
+                    <a:p>
+                      <a:pPr algn="l">
+                        <a:defRPr sz="900" b="1">
+                          <a:solidFill>
+                            <a:srgbClr val="1F2D3D"/>
+                          </a:solidFill>
+                          <a:latin typeface="Arial"/>
+                        </a:defRPr>
+                      </a:pPr>
+                      <a:r>
+                        <a:t>Google Ads / Meta Ads</a:t>
+                      </a:r>
+                    </a:p>
+                    <a:p>
+                      <a:pPr algn="l">
+                        <a:defRPr sz="850" b="1">
+                          <a:solidFill>
+                            <a:srgbClr val="64748B"/>
+                          </a:solidFill>
+                          <a:latin typeface="Arial"/>
+                        </a:defRPr>
+                      </a:pPr>
+                      <a:r>
+                        <a:t>Publicité payante</a:t>
+                      </a:r>
+                    </a:p>
+                  </a:txBody>
+                  <a:tcPr>
+                    <a:solidFill>
+                      <a:srgbClr val="F8FAFC"/>
+                    </a:solidFill>
+                  </a:tcPr>
+                </a:tc>
+                <a:tc>
+                  <a:txBody>
+                    <a:bodyPr wrap="square"/>
+                    <a:lstStyle/>
+                    <a:p>
+                      <a:pPr algn="l">
+                        <a:defRPr sz="900" b="0">
+                          <a:solidFill>
+                            <a:srgbClr val="1F2D3D"/>
+                          </a:solidFill>
+                          <a:latin typeface="Arial"/>
+                        </a:defRPr>
+                      </a:pPr>
+                      <a:r>
+                        <a:t>Référencement payé (SEM)</a:t>
+                      </a:r>
+                    </a:p>
+                    <a:p>
+                      <a:pPr algn="l">
+                        <a:defRPr sz="850" b="0">
+                          <a:solidFill>
+                            <a:srgbClr val="64748B"/>
+                          </a:solidFill>
+                          <a:latin typeface="Arial"/>
+                        </a:defRPr>
+                      </a:pPr>
+                      <a:r>
+                        <a:t>Arrête si budget coupé</a:t>
+                      </a:r>
+                    </a:p>
+                  </a:txBody>
+                  <a:tcPr>
+                    <a:solidFill>
+                      <a:srgbClr val="F8FAFC"/>
+                    </a:solidFill>
+                  </a:tcPr>
+                </a:tc>
+                <a:tc>
+                  <a:txBody>
+                    <a:bodyPr wrap="square"/>
+                    <a:lstStyle/>
+                    <a:p>
+                      <a:pPr algn="ctr">
+                        <a:defRPr sz="900" b="0">
+                          <a:solidFill>
+                            <a:srgbClr val="1F2D3D"/>
+                          </a:solidFill>
+                          <a:latin typeface="Arial"/>
+                        </a:defRPr>
+                      </a:pPr>
+                      <a:r>
+                        <a:t>300–1 500 € HT / mois</a:t>
+                      </a:r>
+                    </a:p>
+                    <a:p>
+                      <a:pPr algn="ctr">
+                        <a:defRPr sz="850" b="0">
+                          <a:solidFill>
+                            <a:srgbClr val="64748B"/>
+                          </a:solidFill>
+                          <a:latin typeface="Arial"/>
+                        </a:defRPr>
+                      </a:pPr>
+                      <a:r>
+                        <a:t>Variable selon conc.</a:t>
+                      </a:r>
+                    </a:p>
+                  </a:txBody>
+                  <a:tcPr>
+                    <a:solidFill>
+                      <a:srgbClr val="F8FAFC"/>
+                    </a:solidFill>
+                  </a:tcPr>
+                </a:tc>
+                <a:tc>
+                  <a:txBody>
+                    <a:bodyPr wrap="square"/>
+                    <a:lstStyle/>
+                    <a:p>
+                      <a:pPr algn="ctr">
+                        <a:defRPr sz="900" b="0">
+                          <a:solidFill>
+                            <a:srgbClr val="CA8A04"/>
+                          </a:solidFill>
+                          <a:latin typeface="Arial"/>
+                        </a:defRPr>
+                      </a:pPr>
+                      <a:r>
+                        <a:t>Partiel</a:t>
+                      </a:r>
+                    </a:p>
+                    <a:p>
+                      <a:pPr algn="ctr">
+                        <a:defRPr sz="850" b="0">
+                          <a:solidFill>
+                            <a:srgbClr val="64748B"/>
+                          </a:solidFill>
+                          <a:latin typeface="Arial"/>
+                        </a:defRPr>
+                      </a:pPr>
+                      <a:r>
+                        <a:t>Non filtré CVC</a:t>
+                      </a:r>
+                    </a:p>
+                  </a:txBody>
+                  <a:tcPr>
+                    <a:solidFill>
+                      <a:srgbClr val="F8FAFC"/>
+                    </a:solidFill>
+                  </a:tcPr>
+                </a:tc>
+                <a:tc>
+                  <a:txBody>
+                    <a:bodyPr wrap="square"/>
+                    <a:lstStyle/>
+                    <a:p>
+                      <a:pPr algn="ctr">
+                        <a:defRPr sz="900" b="0">
+                          <a:solidFill>
+                            <a:srgbClr val="1F2D3D"/>
+                          </a:solidFill>
+                          <a:latin typeface="Arial"/>
+                        </a:defRPr>
+                      </a:pPr>
+                      <a:r>
+                        <a:t>0 %</a:t>
+                      </a:r>
+                    </a:p>
+                    <a:p>
+                      <a:pPr algn="ctr">
+                        <a:defRPr sz="850" b="0">
+                          <a:solidFill>
+                            <a:srgbClr val="64748B"/>
+                          </a:solidFill>
+                          <a:latin typeface="Arial"/>
+                        </a:defRPr>
+                      </a:pPr>
+                      <a:r>
+                        <a:t>(coût au clic)</a:t>
+                      </a:r>
+                    </a:p>
+                  </a:txBody>
+                  <a:tcPr>
+                    <a:solidFill>
+                      <a:srgbClr val="F8FAFC"/>
+                    </a:solidFill>
+                  </a:tcPr>
+                </a:tc>
+                <a:tc>
+                  <a:txBody>
+                    <a:bodyPr wrap="square"/>
+                    <a:lstStyle/>
+                    <a:p>
+                      <a:pPr algn="ctr">
+                        <a:defRPr sz="900" b="0">
+                          <a:solidFill>
+                            <a:srgbClr val="DC2626"/>
+                          </a:solidFill>
+                          <a:latin typeface="Arial"/>
+                        </a:defRPr>
+                      </a:pPr>
+                      <a:r>
+                        <a:t>✘ NON</a:t>
+                      </a:r>
+                    </a:p>
+                    <a:p>
+                      <a:pPr algn="ctr">
+                        <a:defRPr sz="850" b="0">
+                          <a:solidFill>
+                            <a:srgbClr val="64748B"/>
+                          </a:solidFill>
+                          <a:latin typeface="Arial"/>
+                        </a:defRPr>
+                      </a:pPr>
+                      <a:r>
+                        <a:t>Aucun SEO organique</a:t>
+                      </a:r>
+                    </a:p>
+                  </a:txBody>
+                  <a:tcPr>
+                    <a:solidFill>
+                      <a:srgbClr val="F8FAFC"/>
+                    </a:solidFill>
+                  </a:tcPr>
+                </a:tc>
+                <a:tc>
+                  <a:txBody>
+                    <a:bodyPr wrap="square"/>
+                    <a:lstStyle/>
+                    <a:p>
+                      <a:pPr algn="ctr">
+                        <a:defRPr sz="900" b="0">
+                          <a:solidFill>
+                            <a:srgbClr val="DC2626"/>
+                          </a:solidFill>
+                          <a:latin typeface="Arial"/>
+                        </a:defRPr>
+                      </a:pPr>
+                      <a:r>
+                        <a:t>✘ NON</a:t>
+                      </a:r>
+                    </a:p>
+                  </a:txBody>
+                  <a:tcPr>
+                    <a:solidFill>
+                      <a:srgbClr val="F8FAFC"/>
+                    </a:solidFill>
+                  </a:tcPr>
+                </a:tc>
+              </a:tr>
+            </a:tbl>
+          </a:graphicData>
+        </a:graphic>
+      </p:graphicFrame>
+      <p:sp>
+        <p:nvSpPr>
+          <p:cNvPr id="7" name="TextBox 6"/>
+          <p:cNvSpPr txBox="1"/>
+          <p:nvPr/>
+        </p:nvSpPr>
+        <p:spPr>
+          <a:xfrm>
+            <a:off x="274320" y="6629400"/>
+            <a:ext cx="11612880" cy="201168"/>
+          </a:xfrm>
+          <a:prstGeom prst="rect">
+            <a:avLst/>
+          </a:prstGeom>
+          <a:noFill/>
+        </p:spPr>
+        <p:txBody>
+          <a:bodyPr wrap="none">
+            <a:spAutoFit/>
+          </a:bodyPr>
+          <a:lstStyle/>
+          <a:p>
+            <a:pPr>
+              <a:defRPr sz="800" i="1">
+                <a:solidFill>
+                  <a:srgbClr val="64748B"/>
+                </a:solidFill>
+                <a:latin typeface="Arial"/>
+              </a:defRPr>
+            </a:pPr>
+            <a:r>
+              <a:t>* Estimations indicatives basées sur les grilles tarifaires publiques 2025–2026. Commission = prélèvement sur le chiffre d'affaires chantier signé.</a:t>
+            </a:r>
+          </a:p>
+        </p:txBody>
+      </p:sp>
     </p:spTree>
   </p:cSld>
   <p:clrMapOvr>
